--- a/株式会社カナリア/【株式会社カナリア御中】論点整理シート_20260907.pptx
+++ b/株式会社カナリア/【株式会社カナリア御中】論点整理シート_20260907.pptx
@@ -7598,13 +7598,6 @@
                       <a:pPr marL="0" marR="0" lvl="0" indent="0" algn="ctr" rtl="0">
                         <a:buNone/>
                       </a:pPr>
-                      <a:endParaRPr lang="en-US" sz="1400" b="1" dirty="0">
-                        <a:solidFill>
-                          <a:schemeClr val="lt1"/>
-                        </a:solidFill>
-                        <a:latin typeface="游ゴシック" panose="020B0604030504040204" pitchFamily="50" charset="-128"/>
-                        <a:ea typeface="游ゴシック" panose="020B0604030504040204" pitchFamily="50" charset="-128"/>
-                      </a:endParaRPr>
                       <a:r>
                         <a:rPr lang="en-US" altLang="ja-JP" sz="1400" b="1" dirty="0">
                           <a:solidFill>
@@ -7671,10 +7664,6 @@
                       <a:pPr marL="0" marR="0" lvl="0" indent="0" algn="ctr" rtl="0">
                         <a:buNone/>
                       </a:pPr>
-                      <a:endParaRPr lang="ja-JP" altLang="en-US" sz="1400" dirty="0">
-                        <a:latin typeface="游ゴシック" panose="020B0604030504040204" pitchFamily="50" charset="-128"/>
-                        <a:ea typeface="游ゴシック" panose="020B0604030504040204" pitchFamily="50" charset="-128"/>
-                      </a:endParaRPr>
                       <a:r>
                         <a:rPr lang="ja-JP" altLang="en-US" sz="1400" b="1" dirty="0">
                           <a:solidFill>
@@ -7739,10 +7728,6 @@
                       <a:pPr marL="0" marR="0" lvl="0" indent="0" algn="ctr" rtl="0">
                         <a:buNone/>
                       </a:pPr>
-                      <a:endParaRPr lang="ja-JP" altLang="en-US" sz="1400" dirty="0">
-                        <a:latin typeface="游ゴシック" panose="020B0604030504040204" pitchFamily="50" charset="-128"/>
-                        <a:ea typeface="游ゴシック" panose="020B0604030504040204" pitchFamily="50" charset="-128"/>
-                      </a:endParaRPr>
                       <a:r>
                         <a:rPr lang="ja-JP" altLang="en-US" sz="1400" b="1" dirty="0">
                           <a:solidFill>
@@ -7807,10 +7792,6 @@
                       <a:pPr marL="0" marR="0" lvl="0" indent="0" algn="ctr" rtl="0">
                         <a:buNone/>
                       </a:pPr>
-                      <a:endParaRPr lang="ja-JP" altLang="en-US" sz="1400" dirty="0">
-                        <a:latin typeface="游ゴシック" panose="020B0604030504040204" pitchFamily="50" charset="-128"/>
-                        <a:ea typeface="游ゴシック" panose="020B0604030504040204" pitchFamily="50" charset="-128"/>
-                      </a:endParaRPr>
                       <a:r>
                         <a:rPr lang="ja-JP" altLang="en-US" sz="1400" b="1" dirty="0">
                           <a:solidFill>
@@ -7875,10 +7856,6 @@
                       <a:pPr marL="0" marR="0" lvl="0" indent="0" algn="ctr" rtl="0">
                         <a:buNone/>
                       </a:pPr>
-                      <a:endParaRPr lang="ja-JP" altLang="en-US" sz="1400" dirty="0">
-                        <a:latin typeface="游ゴシック" panose="020B0604030504040204" pitchFamily="50" charset="-128"/>
-                        <a:ea typeface="游ゴシック" panose="020B0604030504040204" pitchFamily="50" charset="-128"/>
-                      </a:endParaRPr>
                       <a:r>
                         <a:rPr lang="ja-JP" altLang="en-US" sz="1400" b="1" dirty="0">
                           <a:solidFill>
@@ -7952,10 +7929,6 @@
                       <a:pPr marL="0" marR="0" lvl="0" indent="0" algn="ctr" rtl="0">
                         <a:buNone/>
                       </a:pPr>
-                      <a:endParaRPr lang="ja-JP" altLang="en-US" sz="1600" b="0" dirty="0">
-                        <a:latin typeface="游ゴシック" panose="020B0604030504040204" pitchFamily="50" charset="-128"/>
-                        <a:ea typeface="游ゴシック" panose="020B0604030504040204" pitchFamily="50" charset="-128"/>
-                      </a:endParaRPr>
                       <a:r>
                         <a:rPr lang="en-US" altLang="ja-JP" sz="1600" b="0" dirty="0">
                           <a:latin typeface="游ゴシック" panose="020B0604030504040204" pitchFamily="50" charset="-128"/>
@@ -8017,10 +7990,6 @@
                       <a:pPr marL="0" marR="0" lvl="0" indent="0" algn="ctr" rtl="0">
                         <a:buNone/>
                       </a:pPr>
-                      <a:endParaRPr lang="ja-JP" altLang="en-US" sz="1400" b="0" dirty="0">
-                        <a:latin typeface="游ゴシック" panose="020B0604030504040204" pitchFamily="50" charset="-128"/>
-                        <a:ea typeface="游ゴシック" panose="020B0604030504040204" pitchFamily="50" charset="-128"/>
-                      </a:endParaRPr>
                       <a:r>
                         <a:rPr lang="ja-JP" altLang="en-US" sz="1300" b="0" dirty="0">
                           <a:latin typeface="游ゴシック" panose="020B0604030504040204" pitchFamily="50" charset="-128"/>
@@ -8216,10 +8185,6 @@
                       <a:pPr marL="0" marR="0" lvl="0" indent="0" algn="ctr" rtl="0">
                         <a:buNone/>
                       </a:pPr>
-                      <a:endParaRPr lang="ja-JP" altLang="en-US" sz="1800" b="1" dirty="0">
-                        <a:latin typeface="游ゴシック" panose="020B0604030504040204" pitchFamily="50" charset="-128"/>
-                        <a:ea typeface="游ゴシック" panose="020B0604030504040204" pitchFamily="50" charset="-128"/>
-                      </a:endParaRPr>
                       <a:r>
                         <a:rPr lang="ja-JP" altLang="en-US" sz="1100" b="0" dirty="0">
                           <a:solidFill>
@@ -8291,10 +8256,6 @@
                       <a:pPr marL="0" marR="0" lvl="0" indent="0" algn="ctr" rtl="0">
                         <a:buNone/>
                       </a:pPr>
-                      <a:endParaRPr lang="ja-JP" altLang="en-US" sz="1600" b="0" dirty="0">
-                        <a:latin typeface="游ゴシック" panose="020B0604030504040204" pitchFamily="50" charset="-128"/>
-                        <a:ea typeface="游ゴシック" panose="020B0604030504040204" pitchFamily="50" charset="-128"/>
-                      </a:endParaRPr>
                       <a:r>
                         <a:rPr lang="en-US" altLang="ja-JP" sz="1600" b="0" dirty="0">
                           <a:latin typeface="游ゴシック" panose="020B0604030504040204" pitchFamily="50" charset="-128"/>
@@ -8356,10 +8317,6 @@
                       <a:pPr marL="0" marR="0" lvl="0" indent="0" algn="ctr" rtl="0">
                         <a:buNone/>
                       </a:pPr>
-                      <a:endParaRPr lang="ja-JP" altLang="en-US" sz="1400" b="0" dirty="0">
-                        <a:latin typeface="游ゴシック" panose="020B0604030504040204" pitchFamily="50" charset="-128"/>
-                        <a:ea typeface="游ゴシック" panose="020B0604030504040204" pitchFamily="50" charset="-128"/>
-                      </a:endParaRPr>
                       <a:r>
                         <a:rPr lang="en-US" altLang="ja-JP" sz="1300" b="0" dirty="0">
                           <a:latin typeface="游ゴシック" panose="020B0604030504040204" pitchFamily="50" charset="-128"/>
@@ -8567,10 +8524,6 @@
                       <a:pPr marL="0" marR="0" lvl="0" indent="0" algn="ctr" rtl="0">
                         <a:buNone/>
                       </a:pPr>
-                      <a:endParaRPr lang="ja-JP" altLang="en-US" sz="1800" b="1" dirty="0">
-                        <a:latin typeface="游ゴシック" panose="020B0604030504040204" pitchFamily="50" charset="-128"/>
-                        <a:ea typeface="游ゴシック" panose="020B0604030504040204" pitchFamily="50" charset="-128"/>
-                      </a:endParaRPr>
                       <a:r>
                         <a:rPr lang="ja-JP" altLang="en-US" sz="1100" b="0" dirty="0">
                           <a:solidFill>
@@ -8642,10 +8595,6 @@
                       <a:pPr marL="0" marR="0" lvl="0" indent="0" algn="ctr" rtl="0">
                         <a:buNone/>
                       </a:pPr>
-                      <a:endParaRPr lang="ja-JP" altLang="en-US" sz="1600" b="0" dirty="0">
-                        <a:latin typeface="游ゴシック" panose="020B0604030504040204" pitchFamily="50" charset="-128"/>
-                        <a:ea typeface="游ゴシック" panose="020B0604030504040204" pitchFamily="50" charset="-128"/>
-                      </a:endParaRPr>
                       <a:r>
                         <a:rPr lang="en-US" altLang="ja-JP" sz="1600" b="0" dirty="0">
                           <a:latin typeface="游ゴシック" panose="020B0604030504040204" pitchFamily="50" charset="-128"/>
@@ -8707,10 +8656,6 @@
                       <a:pPr marL="0" marR="0" lvl="0" indent="0" algn="ctr" rtl="0">
                         <a:buNone/>
                       </a:pPr>
-                      <a:endParaRPr lang="ja-JP" altLang="en-US" sz="1400" b="0" dirty="0">
-                        <a:latin typeface="游ゴシック" panose="020B0604030504040204" pitchFamily="50" charset="-128"/>
-                        <a:ea typeface="游ゴシック" panose="020B0604030504040204" pitchFamily="50" charset="-128"/>
-                      </a:endParaRPr>
                       <a:r>
                         <a:rPr lang="en-US" altLang="ja-JP" sz="1300" b="0" dirty="0">
                           <a:latin typeface="游ゴシック" panose="020B0604030504040204" pitchFamily="50" charset="-128"/>
@@ -8780,10 +8725,6 @@
                         <a:buFont typeface="游ゴシック"/>
                         <a:buNone/>
                       </a:pPr>
-                      <a:endParaRPr lang="en-US" altLang="ja-JP" sz="1400" dirty="0">
-                        <a:latin typeface="游ゴシック" panose="020B0604030504040204" pitchFamily="50" charset="-128"/>
-                        <a:ea typeface="游ゴシック" panose="020B0604030504040204" pitchFamily="50" charset="-128"/>
-                      </a:endParaRPr>
                       <a:r>
                         <a:rPr lang="ja-JP" altLang="en-US" sz="1100" dirty="0" b="0">
                           <a:latin typeface="游ゴシック" panose="020B0604030504040204" pitchFamily="50" charset="-128"/>
@@ -8804,10 +8745,6 @@
                         <a:buFont typeface="游ゴシック"/>
                         <a:buNone/>
                       </a:pPr>
-                      <a:endParaRPr lang="en-US" altLang="ja-JP" sz="1400" dirty="0">
-                        <a:latin typeface="游ゴシック" panose="020B0604030504040204" pitchFamily="50" charset="-128"/>
-                        <a:ea typeface="游ゴシック" panose="020B0604030504040204" pitchFamily="50" charset="-128"/>
-                      </a:endParaRPr>
                       <a:r>
                         <a:rPr lang="ja-JP" altLang="en-US" sz="1100" dirty="0" b="0">
                           <a:latin typeface="游ゴシック" panose="020B0604030504040204" pitchFamily="50" charset="-128"/>
@@ -8948,10 +8885,6 @@
                       <a:pPr marL="0" marR="0" lvl="0" indent="0" algn="ctr" rtl="0">
                         <a:buNone/>
                       </a:pPr>
-                      <a:endParaRPr lang="ja-JP" altLang="en-US" sz="1600" b="1" dirty="0">
-                        <a:latin typeface="游ゴシック" panose="020B0604030504040204" pitchFamily="50" charset="-128"/>
-                        <a:ea typeface="游ゴシック" panose="020B0604030504040204" pitchFamily="50" charset="-128"/>
-                      </a:endParaRPr>
                       <a:r>
                         <a:rPr lang="ja-JP" altLang="en-US" sz="1100" b="0" dirty="0">
                           <a:solidFill>
@@ -9023,10 +8956,6 @@
                       <a:pPr marL="0" marR="0" lvl="0" indent="0" algn="ctr" rtl="0">
                         <a:buNone/>
                       </a:pPr>
-                      <a:endParaRPr lang="ja-JP" altLang="en-US" sz="1600" b="0" dirty="0">
-                        <a:latin typeface="游ゴシック" panose="020B0604030504040204" pitchFamily="50" charset="-128"/>
-                        <a:ea typeface="游ゴシック" panose="020B0604030504040204" pitchFamily="50" charset="-128"/>
-                      </a:endParaRPr>
                       <a:r>
                         <a:rPr lang="en-US" altLang="ja-JP" sz="1600" b="0" dirty="0">
                           <a:latin typeface="游ゴシック" panose="020B0604030504040204" pitchFamily="50" charset="-128"/>
@@ -9319,10 +9248,6 @@
                       <a:pPr marL="0" marR="0" lvl="0" indent="0" algn="ctr" rtl="0">
                         <a:buNone/>
                       </a:pPr>
-                      <a:endParaRPr lang="ja-JP" altLang="en-US" sz="1600" b="1" dirty="0">
-                        <a:latin typeface="游ゴシック" panose="020B0604030504040204" pitchFamily="50" charset="-128"/>
-                        <a:ea typeface="游ゴシック" panose="020B0604030504040204" pitchFamily="50" charset="-128"/>
-                      </a:endParaRPr>
                       <a:r>
                         <a:rPr lang="ja-JP" altLang="en-US" sz="1100" b="0" dirty="0">
                           <a:solidFill>
@@ -9394,10 +9319,6 @@
                       <a:pPr marL="0" marR="0" lvl="0" indent="0" algn="ctr" rtl="0">
                         <a:buNone/>
                       </a:pPr>
-                      <a:endParaRPr lang="ja-JP" altLang="en-US" sz="1600" b="0" dirty="0">
-                        <a:latin typeface="游ゴシック" panose="020B0604030504040204" pitchFamily="50" charset="-128"/>
-                        <a:ea typeface="游ゴシック" panose="020B0604030504040204" pitchFamily="50" charset="-128"/>
-                      </a:endParaRPr>
                       <a:r>
                         <a:rPr lang="en-US" altLang="ja-JP" sz="1600" b="0" dirty="0">
                           <a:latin typeface="游ゴシック" panose="020B0604030504040204" pitchFamily="50" charset="-128"/>
@@ -9463,10 +9384,6 @@
                         <a:buFont typeface="游ゴシック"/>
                         <a:buNone/>
                       </a:pPr>
-                      <a:endParaRPr lang="en-US" altLang="ja-JP" sz="1600" b="0" dirty="0">
-                        <a:latin typeface="游ゴシック" panose="020B0604030504040204" pitchFamily="50" charset="-128"/>
-                        <a:ea typeface="游ゴシック" panose="020B0604030504040204" pitchFamily="50" charset="-128"/>
-                      </a:endParaRPr>
                       <a:r>
                         <a:rPr lang="ja-JP" altLang="en-US" sz="1300" b="0" dirty="0">
                           <a:latin typeface="游ゴシック" panose="020B0604030504040204" pitchFamily="50" charset="-128"/>
@@ -9534,10 +9451,6 @@
                         <a:tabLst/>
                         <a:defRPr/>
                       </a:pPr>
-                      <a:endParaRPr lang="en-US" altLang="ja-JP" sz="1400" dirty="0">
-                        <a:latin typeface="游ゴシック" panose="020B0604030504040204" pitchFamily="50" charset="-128"/>
-                        <a:ea typeface="游ゴシック" panose="020B0604030504040204" pitchFamily="50" charset="-128"/>
-                      </a:endParaRPr>
                       <a:r>
                         <a:rPr lang="ja-JP" altLang="en-US" sz="1100" dirty="0" b="0">
                           <a:latin typeface="游ゴシック" panose="020B0604030504040204" pitchFamily="50" charset="-128"/>
@@ -9560,10 +9473,6 @@
                         <a:tabLst/>
                         <a:defRPr/>
                       </a:pPr>
-                      <a:endParaRPr lang="en-US" altLang="ja-JP" sz="1400" dirty="0">
-                        <a:latin typeface="游ゴシック" panose="020B0604030504040204" pitchFamily="50" charset="-128"/>
-                        <a:ea typeface="游ゴシック" panose="020B0604030504040204" pitchFamily="50" charset="-128"/>
-                      </a:endParaRPr>
                       <a:r>
                         <a:rPr lang="ja-JP" altLang="en-US" sz="1100" dirty="0" b="0">
                           <a:latin typeface="游ゴシック" panose="020B0604030504040204" pitchFamily="50" charset="-128"/>
@@ -9621,10 +9530,6 @@
                       <a:pPr marL="0" marR="0" lvl="0" indent="0" algn="ctr" rtl="0">
                         <a:buNone/>
                       </a:pPr>
-                      <a:endParaRPr lang="en-US" altLang="ja-JP" sz="1600" b="1" dirty="0">
-                        <a:latin typeface="游ゴシック" panose="020B0604030504040204" pitchFamily="50" charset="-128"/>
-                        <a:ea typeface="游ゴシック" panose="020B0604030504040204" pitchFamily="50" charset="-128"/>
-                      </a:endParaRPr>
                       <a:r>
                         <a:rPr lang="en-US" altLang="ja-JP" sz="1100" b="0" dirty="0">
                           <a:latin typeface="游ゴシック" panose="020B0604030504040204" pitchFamily="50" charset="-128"/>
@@ -9637,10 +9542,6 @@
                       <a:pPr marL="0" marR="0" lvl="0" indent="0" algn="ctr" rtl="0">
                         <a:buNone/>
                       </a:pPr>
-                      <a:endParaRPr lang="en-US" altLang="ja-JP" sz="1600" b="1" dirty="0">
-                        <a:latin typeface="游ゴシック" panose="020B0604030504040204" pitchFamily="50" charset="-128"/>
-                        <a:ea typeface="游ゴシック" panose="020B0604030504040204" pitchFamily="50" charset="-128"/>
-                      </a:endParaRPr>
                       <a:r>
                         <a:rPr lang="en-US" altLang="ja-JP" sz="1100" b="0" dirty="0">
                           <a:latin typeface="游ゴシック" panose="020B0604030504040204" pitchFamily="50" charset="-128"/>
@@ -9698,10 +9599,6 @@
                       <a:pPr marL="0" marR="0" lvl="0" indent="0" algn="ctr" rtl="0">
                         <a:buNone/>
                       </a:pPr>
-                      <a:endParaRPr lang="ja-JP" altLang="en-US" sz="1600" b="1" dirty="0">
-                        <a:latin typeface="游ゴシック" panose="020B0604030504040204" pitchFamily="50" charset="-128"/>
-                        <a:ea typeface="游ゴシック" panose="020B0604030504040204" pitchFamily="50" charset="-128"/>
-                      </a:endParaRPr>
                       <a:r>
                         <a:rPr lang="ja-JP" altLang="en-US" sz="1100" b="0" dirty="0">
                           <a:solidFill>
@@ -9769,10 +9666,6 @@
                       <a:pPr marL="0" marR="0" lvl="0" indent="0" algn="ctr" rtl="0">
                         <a:buNone/>
                       </a:pPr>
-                      <a:endParaRPr lang="ja-JP" altLang="en-US" sz="1600" b="0" dirty="0">
-                        <a:latin typeface="游ゴシック" panose="020B0604030504040204" pitchFamily="50" charset="-128"/>
-                        <a:ea typeface="游ゴシック" panose="020B0604030504040204" pitchFamily="50" charset="-128"/>
-                      </a:endParaRPr>
                       <a:r>
                         <a:rPr lang="en-US" altLang="ja-JP" sz="1600" b="0" dirty="0">
                           <a:latin typeface="游ゴシック" panose="020B0604030504040204" pitchFamily="50" charset="-128"/>
@@ -9982,10 +9875,6 @@
                       <a:pPr marL="0" marR="0" lvl="0" indent="0" algn="ctr" rtl="0">
                         <a:buNone/>
                       </a:pPr>
-                      <a:endParaRPr lang="en-US" altLang="ja-JP" sz="1600" b="1" dirty="0">
-                        <a:latin typeface="游ゴシック" panose="020B0604030504040204" pitchFamily="50" charset="-128"/>
-                        <a:ea typeface="游ゴシック" panose="020B0604030504040204" pitchFamily="50" charset="-128"/>
-                      </a:endParaRPr>
                       <a:r>
                         <a:rPr lang="en-US" altLang="ja-JP" sz="1100" b="0" dirty="0">
                           <a:latin typeface="游ゴシック" panose="020B0604030504040204" pitchFamily="50" charset="-128"/>
@@ -9998,10 +9887,6 @@
                       <a:pPr marL="0" marR="0" lvl="0" indent="0" algn="ctr" rtl="0">
                         <a:buNone/>
                       </a:pPr>
-                      <a:endParaRPr lang="en-US" altLang="ja-JP" sz="1600" b="1" dirty="0">
-                        <a:latin typeface="游ゴシック" panose="020B0604030504040204" pitchFamily="50" charset="-128"/>
-                        <a:ea typeface="游ゴシック" panose="020B0604030504040204" pitchFamily="50" charset="-128"/>
-                      </a:endParaRPr>
                       <a:r>
                         <a:rPr lang="en-US" altLang="ja-JP" sz="1100" b="0" dirty="0">
                           <a:latin typeface="游ゴシック" panose="020B0604030504040204" pitchFamily="50" charset="-128"/>
@@ -10059,10 +9944,6 @@
                       <a:pPr marL="0" marR="0" lvl="0" indent="0" algn="ctr" rtl="0">
                         <a:buNone/>
                       </a:pPr>
-                      <a:endParaRPr lang="ja-JP" altLang="en-US" sz="1600" b="1" dirty="0">
-                        <a:latin typeface="游ゴシック" panose="020B0604030504040204" pitchFamily="50" charset="-128"/>
-                        <a:ea typeface="游ゴシック" panose="020B0604030504040204" pitchFamily="50" charset="-128"/>
-                      </a:endParaRPr>
                       <a:r>
                         <a:rPr lang="ja-JP" altLang="en-US" sz="1100" b="0" dirty="0">
                           <a:solidFill>
@@ -10130,10 +10011,6 @@
                       <a:pPr marL="0" marR="0" lvl="0" indent="0" algn="ctr" rtl="0">
                         <a:buNone/>
                       </a:pPr>
-                      <a:endParaRPr lang="ja-JP" altLang="en-US" sz="1600" b="0" dirty="0">
-                        <a:latin typeface="游ゴシック" panose="020B0604030504040204" pitchFamily="50" charset="-128"/>
-                        <a:ea typeface="游ゴシック" panose="020B0604030504040204" pitchFamily="50" charset="-128"/>
-                      </a:endParaRPr>
                       <a:r>
                         <a:rPr lang="en-US" altLang="ja-JP" sz="1600" b="0" dirty="0">
                           <a:latin typeface="游ゴシック" panose="020B0604030504040204" pitchFamily="50" charset="-128"/>
@@ -10414,10 +10291,6 @@
                         <a:buFont typeface="游ゴシック"/>
                         <a:buNone/>
                       </a:pPr>
-                      <a:endParaRPr lang="ja-JP" altLang="en-US" sz="1600" b="1" dirty="0">
-                        <a:latin typeface="游ゴシック" panose="020B0604030504040204" pitchFamily="50" charset="-128"/>
-                        <a:ea typeface="游ゴシック" panose="020B0604030504040204" pitchFamily="50" charset="-128"/>
-                      </a:endParaRPr>
                       <a:r>
                         <a:rPr lang="ja-JP" altLang="en-US" sz="1100" b="0" dirty="0">
                           <a:solidFill>
@@ -10485,10 +10358,6 @@
                       <a:pPr marL="0" marR="0" lvl="0" indent="0" algn="ctr" rtl="0">
                         <a:buNone/>
                       </a:pPr>
-                      <a:endParaRPr lang="ja-JP" altLang="en-US" sz="1600" b="0" dirty="0">
-                        <a:latin typeface="游ゴシック" panose="020B0604030504040204" pitchFamily="50" charset="-128"/>
-                        <a:ea typeface="游ゴシック" panose="020B0604030504040204" pitchFamily="50" charset="-128"/>
-                      </a:endParaRPr>
                       <a:r>
                         <a:rPr lang="en-US" altLang="ja-JP" sz="1600" b="0" dirty="0">
                           <a:latin typeface="游ゴシック" panose="020B0604030504040204" pitchFamily="50" charset="-128"/>
@@ -10631,10 +10500,6 @@
                       <a:pPr marL="0" marR="0" lvl="0" indent="0" algn="ctr" rtl="0">
                         <a:buNone/>
                       </a:pPr>
-                      <a:endParaRPr lang="en-US" altLang="ja-JP" sz="1400" dirty="0">
-                        <a:latin typeface="游ゴシック" panose="020B0604030504040204" pitchFamily="50" charset="-128"/>
-                        <a:ea typeface="游ゴシック" panose="020B0604030504040204" pitchFamily="50" charset="-128"/>
-                      </a:endParaRPr>
                       <a:r>
                         <a:rPr lang="ja-JP" altLang="en-US" sz="1100" dirty="0" b="0">
                           <a:latin typeface="游ゴシック" panose="020B0604030504040204" pitchFamily="50" charset="-128"/>
@@ -10647,10 +10512,6 @@
                       <a:pPr marL="0" marR="0" lvl="0" indent="0" algn="ctr" rtl="0">
                         <a:buNone/>
                       </a:pPr>
-                      <a:endParaRPr lang="en-US" altLang="ja-JP" sz="1400" dirty="0">
-                        <a:latin typeface="游ゴシック" panose="020B0604030504040204" pitchFamily="50" charset="-128"/>
-                        <a:ea typeface="游ゴシック" panose="020B0604030504040204" pitchFamily="50" charset="-128"/>
-                      </a:endParaRPr>
                       <a:r>
                         <a:rPr lang="ja-JP" altLang="en-US" sz="1100" dirty="0" b="0">
                           <a:latin typeface="游ゴシック" panose="020B0604030504040204" pitchFamily="50" charset="-128"/>
@@ -10708,10 +10569,6 @@
                       <a:pPr marL="0" marR="0" lvl="0" indent="0" algn="ctr" rtl="0">
                         <a:buNone/>
                       </a:pPr>
-                      <a:endParaRPr lang="ja-JP" altLang="en-US" sz="1600" b="1" dirty="0">
-                        <a:latin typeface="游ゴシック" panose="020B0604030504040204" pitchFamily="50" charset="-128"/>
-                        <a:ea typeface="游ゴシック" panose="020B0604030504040204" pitchFamily="50" charset="-128"/>
-                      </a:endParaRPr>
                       <a:r>
                         <a:rPr lang="en-US" altLang="ja-JP" sz="1100" b="0" dirty="0">
                           <a:solidFill>
@@ -10727,10 +10584,6 @@
                       <a:pPr marL="0" marR="0" lvl="0" indent="0" algn="ctr" rtl="0">
                         <a:buNone/>
                       </a:pPr>
-                      <a:endParaRPr lang="ja-JP" altLang="en-US" sz="1600" b="1" dirty="0">
-                        <a:latin typeface="游ゴシック" panose="020B0604030504040204" pitchFamily="50" charset="-128"/>
-                        <a:ea typeface="游ゴシック" panose="020B0604030504040204" pitchFamily="50" charset="-128"/>
-                      </a:endParaRPr>
                       <a:r>
                         <a:rPr lang="en-US" altLang="ja-JP" sz="1100" b="0" dirty="0">
                           <a:solidFill>
@@ -11169,13 +11022,6 @@
                       <a:pPr marL="0" marR="0" lvl="0" indent="0" algn="ctr" rtl="0">
                         <a:buNone/>
                       </a:pPr>
-                      <a:endParaRPr lang="en-US" sz="1500" b="1" dirty="0">
-                        <a:solidFill>
-                          <a:schemeClr val="lt1"/>
-                        </a:solidFill>
-                        <a:latin typeface="游ゴシック" panose="020B0604030504040204" pitchFamily="50" charset="-128"/>
-                        <a:ea typeface="游ゴシック" panose="020B0604030504040204" pitchFamily="50" charset="-128"/>
-                      </a:endParaRPr>
                       <a:r>
                         <a:rPr lang="en-US" altLang="ja-JP" sz="1500" b="1" dirty="0">
                           <a:solidFill>
@@ -11242,10 +11088,6 @@
                       <a:pPr marL="0" marR="0" lvl="0" indent="0" algn="ctr" rtl="0">
                         <a:buNone/>
                       </a:pPr>
-                      <a:endParaRPr lang="ja-JP" altLang="en-US" sz="1500" dirty="0">
-                        <a:latin typeface="游ゴシック" panose="020B0604030504040204" pitchFamily="50" charset="-128"/>
-                        <a:ea typeface="游ゴシック" panose="020B0604030504040204" pitchFamily="50" charset="-128"/>
-                      </a:endParaRPr>
                       <a:r>
                         <a:rPr lang="ja-JP" altLang="en-US" sz="1500" b="1" dirty="0">
                           <a:solidFill>
@@ -11310,10 +11152,6 @@
                       <a:pPr marL="0" marR="0" lvl="0" indent="0" algn="ctr" rtl="0">
                         <a:buNone/>
                       </a:pPr>
-                      <a:endParaRPr lang="ja-JP" altLang="en-US" sz="1500" dirty="0">
-                        <a:latin typeface="游ゴシック" panose="020B0604030504040204" pitchFamily="50" charset="-128"/>
-                        <a:ea typeface="游ゴシック" panose="020B0604030504040204" pitchFamily="50" charset="-128"/>
-                      </a:endParaRPr>
                       <a:r>
                         <a:rPr lang="ja-JP" altLang="en-US" sz="1500" b="1" dirty="0">
                           <a:solidFill>
@@ -11378,10 +11216,6 @@
                       <a:pPr marL="0" marR="0" lvl="0" indent="0" algn="ctr" rtl="0">
                         <a:buNone/>
                       </a:pPr>
-                      <a:endParaRPr lang="ja-JP" altLang="en-US" sz="1500" dirty="0">
-                        <a:latin typeface="游ゴシック" panose="020B0604030504040204" pitchFamily="50" charset="-128"/>
-                        <a:ea typeface="游ゴシック" panose="020B0604030504040204" pitchFamily="50" charset="-128"/>
-                      </a:endParaRPr>
                       <a:r>
                         <a:rPr lang="ja-JP" altLang="en-US" sz="1500" b="1" dirty="0">
                           <a:solidFill>
@@ -11446,10 +11280,6 @@
                       <a:pPr marL="0" marR="0" lvl="0" indent="0" algn="ctr" rtl="0">
                         <a:buNone/>
                       </a:pPr>
-                      <a:endParaRPr lang="ja-JP" altLang="en-US" sz="1500" dirty="0">
-                        <a:latin typeface="游ゴシック" panose="020B0604030504040204" pitchFamily="50" charset="-128"/>
-                        <a:ea typeface="游ゴシック" panose="020B0604030504040204" pitchFamily="50" charset="-128"/>
-                      </a:endParaRPr>
                       <a:r>
                         <a:rPr lang="ja-JP" altLang="en-US" sz="1500" b="1" dirty="0">
                           <a:solidFill>
@@ -11523,10 +11353,6 @@
                       <a:pPr marL="0" marR="0" lvl="0" indent="0" algn="ctr" rtl="0">
                         <a:buNone/>
                       </a:pPr>
-                      <a:endParaRPr lang="ja-JP" altLang="en-US" sz="1600" b="0" dirty="0">
-                        <a:latin typeface="游ゴシック" panose="020B0604030504040204" pitchFamily="50" charset="-128"/>
-                        <a:ea typeface="游ゴシック" panose="020B0604030504040204" pitchFamily="50" charset="-128"/>
-                      </a:endParaRPr>
                       <a:r>
                         <a:rPr lang="en-US" altLang="ja-JP" sz="1600" b="0" dirty="0">
                           <a:latin typeface="游ゴシック" panose="020B0604030504040204" pitchFamily="50" charset="-128"/>
@@ -11657,10 +11483,6 @@
                         <a:buFont typeface="游ゴシック"/>
                         <a:buNone/>
                       </a:pPr>
-                      <a:endParaRPr lang="en-US" altLang="ja-JP" sz="1400" dirty="0">
-                        <a:latin typeface="游ゴシック" panose="020B0604030504040204" pitchFamily="50" charset="-128"/>
-                        <a:ea typeface="游ゴシック" panose="020B0604030504040204" pitchFamily="50" charset="-128"/>
-                      </a:endParaRPr>
                       <a:r>
                         <a:rPr lang="ja-JP" altLang="en-US" sz="1100" dirty="0" b="0">
                           <a:latin typeface="游ゴシック" panose="020B0604030504040204" pitchFamily="50" charset="-128"/>
@@ -11718,13 +11540,6 @@
                       <a:pPr marL="0" marR="0" lvl="0" indent="0" algn="ctr" rtl="0">
                         <a:buNone/>
                       </a:pPr>
-                      <a:endParaRPr lang="en-US" altLang="ja-JP" sz="1600" b="1" dirty="0">
-                        <a:solidFill>
-                          <a:schemeClr val="dk1"/>
-                        </a:solidFill>
-                        <a:latin typeface="游ゴシック" panose="020B0604030504040204" pitchFamily="50" charset="-128"/>
-                        <a:ea typeface="游ゴシック" panose="020B0604030504040204" pitchFamily="50" charset="-128"/>
-                      </a:endParaRPr>
                       <a:r>
                         <a:rPr lang="en-US" altLang="ja-JP" sz="1100" b="0" dirty="0">
                           <a:solidFill>
@@ -11740,13 +11555,6 @@
                       <a:pPr marL="0" marR="0" lvl="0" indent="0" algn="ctr" rtl="0">
                         <a:buNone/>
                       </a:pPr>
-                      <a:endParaRPr lang="en-US" altLang="ja-JP" sz="1600" b="1" dirty="0">
-                        <a:solidFill>
-                          <a:schemeClr val="dk1"/>
-                        </a:solidFill>
-                        <a:latin typeface="游ゴシック" panose="020B0604030504040204" pitchFamily="50" charset="-128"/>
-                        <a:ea typeface="游ゴシック" panose="020B0604030504040204" pitchFamily="50" charset="-128"/>
-                      </a:endParaRPr>
                       <a:r>
                         <a:rPr lang="en-US" altLang="ja-JP" sz="1100" b="0" dirty="0">
                           <a:solidFill>
@@ -11762,13 +11570,6 @@
                       <a:pPr marL="0" marR="0" lvl="0" indent="0" algn="ctr" rtl="0">
                         <a:buNone/>
                       </a:pPr>
-                      <a:endParaRPr lang="en-US" altLang="ja-JP" sz="1600" b="1" dirty="0">
-                        <a:solidFill>
-                          <a:schemeClr val="dk1"/>
-                        </a:solidFill>
-                        <a:latin typeface="游ゴシック" panose="020B0604030504040204" pitchFamily="50" charset="-128"/>
-                        <a:ea typeface="游ゴシック" panose="020B0604030504040204" pitchFamily="50" charset="-128"/>
-                      </a:endParaRPr>
                       <a:r>
                         <a:rPr lang="en-US" altLang="ja-JP" sz="1100" b="0" dirty="0">
                           <a:solidFill>
@@ -11837,15 +11638,6 @@
                         <a:buFont typeface="游ゴシック"/>
                         <a:buNone/>
                       </a:pPr>
-                      <a:endParaRPr lang="ja-JP" altLang="en-US" sz="1600" b="1" dirty="0">
-                        <a:solidFill>
-                          <a:schemeClr val="dk1"/>
-                        </a:solidFill>
-                        <a:latin typeface="游ゴシック" panose="020B0604030504040204" pitchFamily="50" charset="-128"/>
-                        <a:ea typeface="游ゴシック" panose="020B0604030504040204" pitchFamily="50" charset="-128"/>
-                        <a:cs typeface="游ゴシック"/>
-                        <a:sym typeface="游ゴシック"/>
-                      </a:endParaRPr>
                       <a:r>
                         <a:rPr lang="ja-JP" altLang="en-US" sz="1100" b="0" dirty="0">
                           <a:solidFill>
@@ -11913,10 +11705,6 @@
                       <a:pPr marL="0" marR="0" lvl="0" indent="0" algn="ctr" rtl="0">
                         <a:buNone/>
                       </a:pPr>
-                      <a:endParaRPr lang="ja-JP" altLang="en-US" sz="1600" b="0" dirty="0">
-                        <a:latin typeface="游ゴシック" panose="020B0604030504040204" pitchFamily="50" charset="-128"/>
-                        <a:ea typeface="游ゴシック" panose="020B0604030504040204" pitchFamily="50" charset="-128"/>
-                      </a:endParaRPr>
                       <a:r>
                         <a:rPr lang="en-US" altLang="ja-JP" sz="1600" b="0" dirty="0">
                           <a:latin typeface="游ゴシック" panose="020B0604030504040204" pitchFamily="50" charset="-128"/>
@@ -12104,13 +11892,6 @@
                       <a:pPr marL="0" marR="0" lvl="0" indent="0" algn="ctr" rtl="0">
                         <a:buNone/>
                       </a:pPr>
-                      <a:endParaRPr lang="en-US" altLang="ja-JP" sz="1600" b="1" dirty="0">
-                        <a:solidFill>
-                          <a:schemeClr val="dk1"/>
-                        </a:solidFill>
-                        <a:latin typeface="游ゴシック" panose="020B0604030504040204" pitchFamily="50" charset="-128"/>
-                        <a:ea typeface="游ゴシック" panose="020B0604030504040204" pitchFamily="50" charset="-128"/>
-                      </a:endParaRPr>
                       <a:r>
                         <a:rPr lang="en-US" altLang="ja-JP" sz="1100" b="0" dirty="0">
                           <a:solidFill>
@@ -12126,13 +11907,6 @@
                       <a:pPr marL="0" marR="0" lvl="0" indent="0" algn="ctr" rtl="0">
                         <a:buNone/>
                       </a:pPr>
-                      <a:endParaRPr lang="en-US" altLang="ja-JP" sz="1600" b="1" dirty="0">
-                        <a:solidFill>
-                          <a:schemeClr val="dk1"/>
-                        </a:solidFill>
-                        <a:latin typeface="游ゴシック" panose="020B0604030504040204" pitchFamily="50" charset="-128"/>
-                        <a:ea typeface="游ゴシック" panose="020B0604030504040204" pitchFamily="50" charset="-128"/>
-                      </a:endParaRPr>
                       <a:r>
                         <a:rPr lang="en-US" altLang="ja-JP" sz="1100" b="0" dirty="0">
                           <a:solidFill>
@@ -12198,10 +11972,6 @@
                         <a:buFont typeface="游ゴシック"/>
                         <a:buNone/>
                       </a:pPr>
-                      <a:endParaRPr lang="ja-JP" altLang="en-US" sz="1600" b="1" dirty="0">
-                        <a:latin typeface="游ゴシック" panose="020B0604030504040204" pitchFamily="50" charset="-128"/>
-                        <a:ea typeface="游ゴシック" panose="020B0604030504040204" pitchFamily="50" charset="-128"/>
-                      </a:endParaRPr>
                       <a:r>
                         <a:rPr lang="ja-JP" altLang="en-US" sz="1100" b="0" dirty="0">
                           <a:solidFill>
@@ -12269,10 +12039,6 @@
                       <a:pPr marL="0" marR="0" lvl="0" indent="0" algn="ctr" rtl="0">
                         <a:buNone/>
                       </a:pPr>
-                      <a:endParaRPr lang="ja-JP" altLang="en-US" sz="1600" b="0" dirty="0">
-                        <a:latin typeface="游ゴシック" panose="020B0604030504040204" pitchFamily="50" charset="-128"/>
-                        <a:ea typeface="游ゴシック" panose="020B0604030504040204" pitchFamily="50" charset="-128"/>
-                      </a:endParaRPr>
                       <a:r>
                         <a:rPr lang="en-US" altLang="ja-JP" sz="1600" b="0" dirty="0">
                           <a:latin typeface="游ゴシック" panose="020B0604030504040204" pitchFamily="50" charset="-128"/>
@@ -12484,13 +12250,6 @@
                       <a:pPr marL="0" marR="0" lvl="0" indent="0" algn="ctr" rtl="0">
                         <a:buNone/>
                       </a:pPr>
-                      <a:endParaRPr lang="en-US" altLang="ja-JP" sz="1600" b="1" dirty="0">
-                        <a:solidFill>
-                          <a:schemeClr val="dk1"/>
-                        </a:solidFill>
-                        <a:latin typeface="游ゴシック" panose="020B0604030504040204" pitchFamily="50" charset="-128"/>
-                        <a:ea typeface="游ゴシック" panose="020B0604030504040204" pitchFamily="50" charset="-128"/>
-                      </a:endParaRPr>
                       <a:r>
                         <a:rPr lang="en-US" altLang="ja-JP" sz="1100" b="0" dirty="0">
                           <a:solidFill>
@@ -12506,13 +12265,6 @@
                       <a:pPr marL="0" marR="0" lvl="0" indent="0" algn="ctr" rtl="0">
                         <a:buNone/>
                       </a:pPr>
-                      <a:endParaRPr lang="en-US" altLang="ja-JP" sz="1600" b="1" dirty="0">
-                        <a:solidFill>
-                          <a:schemeClr val="dk1"/>
-                        </a:solidFill>
-                        <a:latin typeface="游ゴシック" panose="020B0604030504040204" pitchFamily="50" charset="-128"/>
-                        <a:ea typeface="游ゴシック" panose="020B0604030504040204" pitchFamily="50" charset="-128"/>
-                      </a:endParaRPr>
                       <a:r>
                         <a:rPr lang="en-US" altLang="ja-JP" sz="1100" b="0" dirty="0">
                           <a:solidFill>
@@ -12573,10 +12325,6 @@
                       <a:pPr marL="0" marR="0" lvl="0" indent="0" algn="ctr" rtl="0">
                         <a:buNone/>
                       </a:pPr>
-                      <a:endParaRPr lang="ja-JP" altLang="en-US" sz="1600" b="1">
-                        <a:latin typeface="游ゴシック" panose="020B0604030504040204" pitchFamily="50" charset="-128"/>
-                        <a:ea typeface="游ゴシック" panose="020B0604030504040204" pitchFamily="50" charset="-128"/>
-                      </a:endParaRPr>
                       <a:r>
                         <a:rPr lang="ja-JP" altLang="en-US" sz="1100" b="0" dirty="0">
                           <a:solidFill>
@@ -12649,10 +12397,6 @@
                         <a:buFont typeface="游ゴシック"/>
                         <a:buNone/>
                       </a:pPr>
-                      <a:endParaRPr lang="ja-JP" altLang="en-US" sz="1600" b="0" dirty="0">
-                        <a:latin typeface="游ゴシック" panose="020B0604030504040204" pitchFamily="50" charset="-128"/>
-                        <a:ea typeface="游ゴシック" panose="020B0604030504040204" pitchFamily="50" charset="-128"/>
-                      </a:endParaRPr>
                       <a:r>
                         <a:rPr lang="en-US" altLang="ja-JP" sz="1600" b="0" dirty="0">
                           <a:latin typeface="游ゴシック" panose="020B0604030504040204" pitchFamily="50" charset="-128"/>
@@ -12824,10 +12568,6 @@
                       <a:pPr marL="0" marR="0" lvl="0" indent="0" algn="ctr" rtl="0">
                         <a:buNone/>
                       </a:pPr>
-                      <a:endParaRPr lang="en-US" altLang="ja-JP" sz="1600" b="1" dirty="0">
-                        <a:latin typeface="游ゴシック" panose="020B0604030504040204" pitchFamily="50" charset="-128"/>
-                        <a:ea typeface="游ゴシック" panose="020B0604030504040204" pitchFamily="50" charset="-128"/>
-                      </a:endParaRPr>
                       <a:r>
                         <a:rPr lang="en-US" altLang="ja-JP" sz="1100" b="0" dirty="0">
                           <a:latin typeface="游ゴシック" panose="020B0604030504040204" pitchFamily="50" charset="-128"/>
@@ -12840,10 +12580,6 @@
                       <a:pPr marL="0" marR="0" lvl="0" indent="0" algn="ctr" rtl="0">
                         <a:buNone/>
                       </a:pPr>
-                      <a:endParaRPr lang="en-US" altLang="ja-JP" sz="1600" b="1" dirty="0">
-                        <a:latin typeface="游ゴシック" panose="020B0604030504040204" pitchFamily="50" charset="-128"/>
-                        <a:ea typeface="游ゴシック" panose="020B0604030504040204" pitchFamily="50" charset="-128"/>
-                      </a:endParaRPr>
                       <a:r>
                         <a:rPr lang="en-US" altLang="ja-JP" sz="1100" b="0" dirty="0">
                           <a:latin typeface="游ゴシック" panose="020B0604030504040204" pitchFamily="50" charset="-128"/>
@@ -12901,10 +12637,6 @@
                       <a:pPr marL="0" marR="0" lvl="0" indent="0" algn="ctr" rtl="0">
                         <a:buNone/>
                       </a:pPr>
-                      <a:endParaRPr lang="ja-JP" altLang="en-US" sz="1600" b="1" dirty="0">
-                        <a:latin typeface="游ゴシック" panose="020B0604030504040204" pitchFamily="50" charset="-128"/>
-                        <a:ea typeface="游ゴシック" panose="020B0604030504040204" pitchFamily="50" charset="-128"/>
-                      </a:endParaRPr>
                       <a:r>
                         <a:rPr lang="ja-JP" altLang="en-US" sz="1100" b="0" dirty="0">
                           <a:solidFill>
@@ -12977,10 +12709,6 @@
                         <a:buFont typeface="游ゴシック"/>
                         <a:buNone/>
                       </a:pPr>
-                      <a:endParaRPr lang="ja-JP" altLang="en-US" sz="1600" b="0" dirty="0">
-                        <a:latin typeface="游ゴシック" panose="020B0604030504040204" pitchFamily="50" charset="-128"/>
-                        <a:ea typeface="游ゴシック" panose="020B0604030504040204" pitchFamily="50" charset="-128"/>
-                      </a:endParaRPr>
                       <a:r>
                         <a:rPr lang="en-US" altLang="ja-JP" sz="1600" b="0" dirty="0">
                           <a:latin typeface="游ゴシック" panose="020B0604030504040204" pitchFamily="50" charset="-128"/>
@@ -13164,10 +12892,6 @@
                       <a:pPr marL="0" marR="0" lvl="0" indent="0" algn="ctr" rtl="0">
                         <a:buNone/>
                       </a:pPr>
-                      <a:endParaRPr lang="en-US" altLang="ja-JP" sz="1600" b="1" dirty="0">
-                        <a:latin typeface="游ゴシック" panose="020B0604030504040204" pitchFamily="50" charset="-128"/>
-                        <a:ea typeface="游ゴシック" panose="020B0604030504040204" pitchFamily="50" charset="-128"/>
-                      </a:endParaRPr>
                       <a:r>
                         <a:rPr lang="en-US" altLang="ja-JP" sz="1100" b="0" dirty="0">
                           <a:latin typeface="游ゴシック" panose="020B0604030504040204" pitchFamily="50" charset="-128"/>
@@ -13180,10 +12904,6 @@
                       <a:pPr marL="0" marR="0" lvl="0" indent="0" algn="ctr" rtl="0">
                         <a:buNone/>
                       </a:pPr>
-                      <a:endParaRPr lang="en-US" altLang="ja-JP" sz="1600" b="1" dirty="0">
-                        <a:latin typeface="游ゴシック" panose="020B0604030504040204" pitchFamily="50" charset="-128"/>
-                        <a:ea typeface="游ゴシック" panose="020B0604030504040204" pitchFamily="50" charset="-128"/>
-                      </a:endParaRPr>
                       <a:r>
                         <a:rPr lang="en-US" altLang="ja-JP" sz="1100" b="0" dirty="0">
                           <a:latin typeface="游ゴシック" panose="020B0604030504040204" pitchFamily="50" charset="-128"/>
@@ -13241,10 +12961,6 @@
                       <a:pPr marL="0" marR="0" lvl="0" indent="0" algn="ctr" rtl="0">
                         <a:buNone/>
                       </a:pPr>
-                      <a:endParaRPr lang="ja-JP" altLang="en-US" sz="1600" b="1" dirty="0">
-                        <a:latin typeface="游ゴシック" panose="020B0604030504040204" pitchFamily="50" charset="-128"/>
-                        <a:ea typeface="游ゴシック" panose="020B0604030504040204" pitchFamily="50" charset="-128"/>
-                      </a:endParaRPr>
                       <a:r>
                         <a:rPr lang="ja-JP" altLang="en-US" sz="1100" b="0" dirty="0">
                           <a:solidFill>
@@ -13312,10 +13028,6 @@
                       <a:pPr marL="0" marR="0" lvl="0" indent="0" algn="ctr" rtl="0">
                         <a:buNone/>
                       </a:pPr>
-                      <a:endParaRPr lang="ja-JP" altLang="en-US" sz="1600" b="0" dirty="0">
-                        <a:latin typeface="游ゴシック" panose="020B0604030504040204" pitchFamily="50" charset="-128"/>
-                        <a:ea typeface="游ゴシック" panose="020B0604030504040204" pitchFamily="50" charset="-128"/>
-                      </a:endParaRPr>
                       <a:r>
                         <a:rPr lang="en-US" altLang="ja-JP" sz="1600" b="0" dirty="0">
                           <a:latin typeface="游ゴシック" panose="020B0604030504040204" pitchFamily="50" charset="-128"/>
@@ -13430,10 +13142,6 @@
                       <a:pPr marL="0" marR="0" lvl="0" indent="0" algn="ctr" rtl="0">
                         <a:buNone/>
                       </a:pPr>
-                      <a:endParaRPr lang="en-US" altLang="ja-JP" sz="1400" dirty="0">
-                        <a:latin typeface="游ゴシック" panose="020B0604030504040204" pitchFamily="50" charset="-128"/>
-                        <a:ea typeface="游ゴシック" panose="020B0604030504040204" pitchFamily="50" charset="-128"/>
-                      </a:endParaRPr>
                       <a:r>
                         <a:rPr lang="ja-JP" altLang="en-US" sz="1100" dirty="0" b="0">
                           <a:latin typeface="游ゴシック" panose="020B0604030504040204" pitchFamily="50" charset="-128"/>
@@ -13446,10 +13154,6 @@
                       <a:pPr marL="0" marR="0" lvl="0" indent="0" algn="ctr" rtl="0">
                         <a:buNone/>
                       </a:pPr>
-                      <a:endParaRPr lang="en-US" altLang="ja-JP" sz="1400" dirty="0">
-                        <a:latin typeface="游ゴシック" panose="020B0604030504040204" pitchFamily="50" charset="-128"/>
-                        <a:ea typeface="游ゴシック" panose="020B0604030504040204" pitchFamily="50" charset="-128"/>
-                      </a:endParaRPr>
                       <a:r>
                         <a:rPr lang="ja-JP" altLang="en-US" sz="1100" dirty="0" b="0">
                           <a:latin typeface="游ゴシック" panose="020B0604030504040204" pitchFamily="50" charset="-128"/>
@@ -13507,10 +13211,6 @@
                       <a:pPr marL="0" marR="0" lvl="0" indent="0" algn="ctr" rtl="0">
                         <a:buNone/>
                       </a:pPr>
-                      <a:endParaRPr lang="en-US" altLang="ja-JP" sz="1600" b="1" dirty="0">
-                        <a:latin typeface="游ゴシック" panose="020B0604030504040204" pitchFamily="50" charset="-128"/>
-                        <a:ea typeface="游ゴシック" panose="020B0604030504040204" pitchFamily="50" charset="-128"/>
-                      </a:endParaRPr>
                       <a:r>
                         <a:rPr lang="en-US" altLang="ja-JP" sz="1100" b="0" dirty="0">
                           <a:latin typeface="游ゴシック" panose="020B0604030504040204" pitchFamily="50" charset="-128"/>
@@ -13523,10 +13223,6 @@
                       <a:pPr marL="0" marR="0" lvl="0" indent="0" algn="ctr" rtl="0">
                         <a:buNone/>
                       </a:pPr>
-                      <a:endParaRPr lang="en-US" altLang="ja-JP" sz="1600" b="1" dirty="0">
-                        <a:latin typeface="游ゴシック" panose="020B0604030504040204" pitchFamily="50" charset="-128"/>
-                        <a:ea typeface="游ゴシック" panose="020B0604030504040204" pitchFamily="50" charset="-128"/>
-                      </a:endParaRPr>
                       <a:r>
                         <a:rPr lang="en-US" altLang="ja-JP" sz="1100" b="0" dirty="0">
                           <a:latin typeface="游ゴシック" panose="020B0604030504040204" pitchFamily="50" charset="-128"/>
@@ -13660,10 +13356,6 @@
                       <a:pPr marL="0" marR="0" lvl="0" indent="0" algn="ctr" rtl="0">
                         <a:buNone/>
                       </a:pPr>
-                      <a:endParaRPr lang="ja-JP" altLang="en-US" sz="1600" b="0" dirty="0">
-                        <a:latin typeface="游ゴシック" panose="020B0604030504040204" pitchFamily="50" charset="-128"/>
-                        <a:ea typeface="游ゴシック" panose="020B0604030504040204" pitchFamily="50" charset="-128"/>
-                      </a:endParaRPr>
                       <a:r>
                         <a:rPr lang="en-US" altLang="ja-JP" sz="1600" b="0" dirty="0">
                           <a:latin typeface="游ゴシック" panose="020B0604030504040204" pitchFamily="50" charset="-128"/>
@@ -13856,10 +13548,6 @@
                       <a:pPr marL="0" marR="0" lvl="0" indent="0" algn="ctr" rtl="0">
                         <a:buNone/>
                       </a:pPr>
-                      <a:endParaRPr lang="en-US" altLang="ja-JP" sz="1600" b="1" dirty="0">
-                        <a:latin typeface="游ゴシック" panose="020B0604030504040204" pitchFamily="50" charset="-128"/>
-                        <a:ea typeface="游ゴシック" panose="020B0604030504040204" pitchFamily="50" charset="-128"/>
-                      </a:endParaRPr>
                       <a:r>
                         <a:rPr lang="en-US" altLang="ja-JP" sz="1100" b="0" dirty="0">
                           <a:latin typeface="游ゴシック" panose="020B0604030504040204" pitchFamily="50" charset="-128"/>
@@ -13872,10 +13560,6 @@
                       <a:pPr marL="0" marR="0" lvl="0" indent="0" algn="ctr" rtl="0">
                         <a:buNone/>
                       </a:pPr>
-                      <a:endParaRPr lang="en-US" altLang="ja-JP" sz="1600" b="1" dirty="0">
-                        <a:latin typeface="游ゴシック" panose="020B0604030504040204" pitchFamily="50" charset="-128"/>
-                        <a:ea typeface="游ゴシック" panose="020B0604030504040204" pitchFamily="50" charset="-128"/>
-                      </a:endParaRPr>
                       <a:r>
                         <a:rPr lang="en-US" altLang="ja-JP" sz="1100" b="0" dirty="0">
                           <a:latin typeface="游ゴシック" panose="020B0604030504040204" pitchFamily="50" charset="-128"/>
@@ -13941,15 +13625,6 @@
                         <a:buFont typeface="游ゴシック"/>
                         <a:buNone/>
                       </a:pPr>
-                      <a:endParaRPr lang="ja-JP" altLang="en-US" sz="1600" b="1" dirty="0">
-                        <a:solidFill>
-                          <a:schemeClr val="dk1"/>
-                        </a:solidFill>
-                        <a:latin typeface="游ゴシック" panose="020B0604030504040204" pitchFamily="50" charset="-128"/>
-                        <a:ea typeface="游ゴシック" panose="020B0604030504040204" pitchFamily="50" charset="-128"/>
-                        <a:cs typeface="游ゴシック"/>
-                        <a:sym typeface="游ゴシック"/>
-                      </a:endParaRPr>
                       <a:r>
                         <a:rPr lang="ja-JP" altLang="en-US" sz="1100" b="0" dirty="0">
                           <a:solidFill>
@@ -14257,7 +13932,6 @@
               </a:buClr>
               <a:buSzPts val="900"/>
             </a:pPr>
-            <a:endParaRPr sz="1543" dirty="0"/>
             <a:r>
               <a:rPr lang="en-US" altLang="ja-JP" sz="992" dirty="0">
                 <a:solidFill>
@@ -14274,7 +13948,6 @@
               </a:buClr>
               <a:buSzPts val="900"/>
             </a:pPr>
-            <a:endParaRPr sz="1543" dirty="0"/>
             <a:r>
               <a:rPr lang="en-US" altLang="ja-JP" sz="992" dirty="0">
                 <a:solidFill>
@@ -14611,13 +14284,6 @@
               </a:buClr>
               <a:buSzPts val="1000"/>
             </a:pPr>
-            <a:endParaRPr lang="ja-JP" altLang="en-US" sz="1543">
-              <a:solidFill>
-                <a:schemeClr val="bg1"/>
-              </a:solidFill>
-              <a:latin typeface="游ゴシック" panose="020B0604030504040204" pitchFamily="50" charset="-128"/>
-              <a:ea typeface="游ゴシック" panose="020B0604030504040204" pitchFamily="50" charset="-128"/>
-            </a:endParaRPr>
             <a:r>
               <a:rPr lang="ja-JP" altLang="en-US" sz="1102">
                 <a:solidFill>
@@ -14743,13 +14409,6 @@
                       <a:pPr marL="0" marR="0" lvl="0" indent="0" algn="ctr" rtl="0">
                         <a:buNone/>
                       </a:pPr>
-                      <a:endParaRPr lang="en-US" sz="1400" b="1" u="none" strike="noStrike" cap="none" dirty="0">
-                        <a:solidFill>
-                          <a:schemeClr val="lt1"/>
-                        </a:solidFill>
-                        <a:latin typeface="游ゴシック" panose="020B0604030504040204" pitchFamily="50" charset="-128"/>
-                        <a:ea typeface="游ゴシック" panose="020B0604030504040204" pitchFamily="50" charset="-128"/>
-                      </a:endParaRPr>
                       <a:r>
                         <a:rPr lang="en-US" altLang="ja-JP" sz="1400" b="1" u="none" strike="noStrike" cap="none" dirty="0">
                           <a:solidFill>
@@ -14814,10 +14473,6 @@
                       <a:pPr marL="0" marR="0" lvl="0" indent="0" algn="ctr" rtl="0">
                         <a:buNone/>
                       </a:pPr>
-                      <a:endParaRPr lang="ja-JP" altLang="en-US" sz="1400" b="1" dirty="0">
-                        <a:latin typeface="游ゴシック" panose="020B0604030504040204" pitchFamily="50" charset="-128"/>
-                        <a:ea typeface="游ゴシック" panose="020B0604030504040204" pitchFamily="50" charset="-128"/>
-                      </a:endParaRPr>
                       <a:r>
                         <a:rPr lang="ja-JP" altLang="en-US" sz="1400" b="1" u="none" strike="noStrike" cap="none" dirty="0">
                           <a:solidFill>
@@ -14880,10 +14535,6 @@
                       <a:pPr marL="0" marR="0" lvl="0" indent="0" algn="ctr" rtl="0">
                         <a:buNone/>
                       </a:pPr>
-                      <a:endParaRPr lang="ja-JP" altLang="en-US" sz="1400" b="1" dirty="0">
-                        <a:latin typeface="游ゴシック" panose="020B0604030504040204" pitchFamily="50" charset="-128"/>
-                        <a:ea typeface="游ゴシック" panose="020B0604030504040204" pitchFamily="50" charset="-128"/>
-                      </a:endParaRPr>
                       <a:r>
                         <a:rPr lang="ja-JP" altLang="en-US" sz="1400" b="1" u="none" strike="noStrike" cap="none" dirty="0">
                           <a:solidFill>
@@ -14946,10 +14597,6 @@
                       <a:pPr marL="0" marR="0" lvl="0" indent="0" algn="ctr" rtl="0">
                         <a:buNone/>
                       </a:pPr>
-                      <a:endParaRPr lang="ja-JP" altLang="en-US" sz="1400" b="1" dirty="0">
-                        <a:latin typeface="游ゴシック" panose="020B0604030504040204" pitchFamily="50" charset="-128"/>
-                        <a:ea typeface="游ゴシック" panose="020B0604030504040204" pitchFamily="50" charset="-128"/>
-                      </a:endParaRPr>
                       <a:r>
                         <a:rPr lang="ja-JP" altLang="en-US" sz="1400" b="1" u="none" strike="noStrike" cap="none" dirty="0">
                           <a:solidFill>
@@ -15021,10 +14668,6 @@
                       <a:pPr marL="0" marR="0" lvl="0" indent="0" algn="ctr" rtl="0">
                         <a:buNone/>
                       </a:pPr>
-                      <a:endParaRPr lang="ja-JP" altLang="en-US" sz="1600" b="0" u="none" strike="noStrike" cap="none" dirty="0">
-                        <a:latin typeface="游ゴシック" panose="020B0604030504040204" pitchFamily="50" charset="-128"/>
-                        <a:ea typeface="游ゴシック" panose="020B0604030504040204" pitchFamily="50" charset="-128"/>
-                      </a:endParaRPr>
                       <a:r>
                         <a:rPr lang="en-US" altLang="ja-JP" sz="1600" b="0" u="none" strike="noStrike" cap="none" dirty="0">
                           <a:latin typeface="游ゴシック" panose="020B0604030504040204" pitchFamily="50" charset="-128"/>
@@ -15086,10 +14729,6 @@
                       <a:pPr marL="0" marR="0" lvl="0" indent="0" algn="ctr" rtl="0">
                         <a:buNone/>
                       </a:pPr>
-                      <a:endParaRPr lang="ja-JP" altLang="en-US" sz="1400" dirty="0">
-                        <a:latin typeface="游ゴシック" panose="020B0604030504040204" pitchFamily="50" charset="-128"/>
-                        <a:ea typeface="游ゴシック" panose="020B0604030504040204" pitchFamily="50" charset="-128"/>
-                      </a:endParaRPr>
                       <a:r>
                         <a:rPr lang="ja-JP" altLang="en-US" sz="1300" u="none" strike="noStrike" cap="none" dirty="0" b="0">
                           <a:solidFill>
@@ -15251,10 +14890,6 @@
                         <a:buFont typeface="游ゴシック"/>
                         <a:buNone/>
                       </a:pPr>
-                      <a:endParaRPr lang="ja-JP" altLang="en-US" sz="1400" b="0" dirty="0">
-                        <a:latin typeface="游ゴシック" panose="020B0604030504040204" pitchFamily="50" charset="-128"/>
-                        <a:ea typeface="游ゴシック" panose="020B0604030504040204" pitchFamily="50" charset="-128"/>
-                      </a:endParaRPr>
                       <a:r>
                         <a:rPr lang="ja-JP" altLang="en-US" sz="1500" b="0" i="0" u="none" strike="noStrike" cap="none" dirty="0">
                           <a:solidFill>
@@ -15328,10 +14963,6 @@
                       <a:pPr marL="0" marR="0" lvl="0" indent="0" algn="ctr" rtl="0">
                         <a:buNone/>
                       </a:pPr>
-                      <a:endParaRPr lang="ja-JP" altLang="en-US" sz="1600" b="0" u="none" strike="noStrike" cap="none" dirty="0">
-                        <a:latin typeface="游ゴシック" panose="020B0604030504040204" pitchFamily="50" charset="-128"/>
-                        <a:ea typeface="游ゴシック" panose="020B0604030504040204" pitchFamily="50" charset="-128"/>
-                      </a:endParaRPr>
                       <a:r>
                         <a:rPr lang="en-US" altLang="ja-JP" sz="1600" b="0" u="none" strike="noStrike" cap="none" dirty="0">
                           <a:latin typeface="游ゴシック" panose="020B0604030504040204" pitchFamily="50" charset="-128"/>
@@ -15393,10 +15024,6 @@
                       <a:pPr marL="0" marR="0" lvl="0" indent="0" algn="ctr" rtl="0">
                         <a:buNone/>
                       </a:pPr>
-                      <a:endParaRPr lang="ja-JP" altLang="en-US" sz="1400">
-                        <a:latin typeface="游ゴシック" panose="020B0604030504040204" pitchFamily="50" charset="-128"/>
-                        <a:ea typeface="游ゴシック" panose="020B0604030504040204" pitchFamily="50" charset="-128"/>
-                      </a:endParaRPr>
                       <a:r>
                         <a:rPr lang="ja-JP" altLang="en-US" sz="1300" u="none" strike="noStrike" cap="none" b="0">
                           <a:solidFill>
@@ -15466,10 +15093,6 @@
                         <a:buFont typeface="游ゴシック"/>
                         <a:buNone/>
                       </a:pPr>
-                      <a:endParaRPr lang="ja-JP" altLang="en-US" sz="1400" dirty="0">
-                        <a:latin typeface="游ゴシック" panose="020B0604030504040204" pitchFamily="50" charset="-128"/>
-                        <a:ea typeface="游ゴシック" panose="020B0604030504040204" pitchFamily="50" charset="-128"/>
-                      </a:endParaRPr>
                       <a:r>
                         <a:rPr lang="en-US" altLang="ja-JP" sz="1100" u="none" strike="noStrike" cap="none" dirty="0" b="0">
                           <a:solidFill>
@@ -15490,10 +15113,6 @@
                         <a:buFont typeface="游ゴシック"/>
                         <a:buNone/>
                       </a:pPr>
-                      <a:endParaRPr lang="ja-JP" altLang="en-US" sz="1400" dirty="0">
-                        <a:latin typeface="游ゴシック" panose="020B0604030504040204" pitchFamily="50" charset="-128"/>
-                        <a:ea typeface="游ゴシック" panose="020B0604030504040204" pitchFamily="50" charset="-128"/>
-                      </a:endParaRPr>
                       <a:r>
                         <a:rPr lang="en-US" altLang="ja-JP" sz="1100" u="none" strike="noStrike" cap="none" dirty="0" b="0">
                           <a:solidFill>
@@ -15639,10 +15258,6 @@
                       <a:pPr marL="0" marR="0" lvl="0" indent="0" algn="ctr" rtl="0">
                         <a:buNone/>
                       </a:pPr>
-                      <a:endParaRPr lang="ja-JP" altLang="en-US" sz="1600" b="0" u="none" strike="noStrike" cap="none" dirty="0">
-                        <a:latin typeface="游ゴシック" panose="020B0604030504040204" pitchFamily="50" charset="-128"/>
-                        <a:ea typeface="游ゴシック" panose="020B0604030504040204" pitchFamily="50" charset="-128"/>
-                      </a:endParaRPr>
                       <a:r>
                         <a:rPr lang="en-US" altLang="ja-JP" sz="1600" b="0" u="none" strike="noStrike" cap="none" dirty="0">
                           <a:latin typeface="游ゴシック" panose="020B0604030504040204" pitchFamily="50" charset="-128"/>
@@ -15780,10 +15395,6 @@
                         <a:buFont typeface="游ゴシック"/>
                         <a:buNone/>
                       </a:pPr>
-                      <a:endParaRPr lang="en-US" altLang="ja-JP" sz="1100" u="none" strike="noStrike" cap="none" dirty="0">
-                        <a:latin typeface="游ゴシック" panose="020B0604030504040204" pitchFamily="50" charset="-128"/>
-                        <a:ea typeface="游ゴシック" panose="020B0604030504040204" pitchFamily="50" charset="-128"/>
-                      </a:endParaRPr>
                       <a:r>
                         <a:rPr lang="ja-JP" altLang="en-US" sz="1100" b="0" u="none" strike="noStrike" cap="none" dirty="0">
                           <a:solidFill>
@@ -15804,10 +15415,6 @@
                         <a:buFont typeface="游ゴシック"/>
                         <a:buNone/>
                       </a:pPr>
-                      <a:endParaRPr lang="en-US" altLang="ja-JP" sz="1100" u="none" strike="noStrike" cap="none" dirty="0">
-                        <a:latin typeface="游ゴシック" panose="020B0604030504040204" pitchFamily="50" charset="-128"/>
-                        <a:ea typeface="游ゴシック" panose="020B0604030504040204" pitchFamily="50" charset="-128"/>
-                      </a:endParaRPr>
                       <a:r>
                         <a:rPr lang="ja-JP" altLang="en-US" sz="1100" b="0" u="none" strike="noStrike" cap="none" dirty="0">
                           <a:solidFill>
@@ -15828,10 +15435,6 @@
                         <a:buFont typeface="游ゴシック"/>
                         <a:buNone/>
                       </a:pPr>
-                      <a:endParaRPr lang="en-US" altLang="ja-JP" sz="1100" u="none" strike="noStrike" cap="none" dirty="0">
-                        <a:latin typeface="游ゴシック" panose="020B0604030504040204" pitchFamily="50" charset="-128"/>
-                        <a:ea typeface="游ゴシック" panose="020B0604030504040204" pitchFamily="50" charset="-128"/>
-                      </a:endParaRPr>
                       <a:r>
                         <a:rPr lang="ja-JP" altLang="en-US" sz="1100" b="0" u="none" strike="noStrike" cap="none" dirty="0">
                           <a:solidFill>
@@ -15902,21 +15505,6 @@
                         <a:tabLst/>
                         <a:defRPr/>
                       </a:pPr>
-                      <a:endParaRPr kumimoji="0" lang="ja-JP" altLang="en-US" sz="1400" b="1" i="0" u="none" strike="noStrike" kern="0" cap="none" spc="0" normalizeH="0" baseline="0" noProof="0" dirty="0">
-                        <a:ln>
-                          <a:noFill/>
-                        </a:ln>
-                        <a:solidFill>
-                          <a:srgbClr val="000000"/>
-                        </a:solidFill>
-                        <a:effectLst/>
-                        <a:uLnTx/>
-                        <a:uFillTx/>
-                        <a:latin typeface="游ゴシック" panose="020B0604030504040204" pitchFamily="50" charset="-128"/>
-                        <a:ea typeface="游ゴシック" panose="020B0604030504040204" pitchFamily="50" charset="-128"/>
-                        <a:cs typeface="+mn-cs"/>
-                        <a:sym typeface="Arial"/>
-                      </a:endParaRPr>
                       <a:r>
                         <a:rPr kumimoji="0" lang="ja-JP" altLang="en-US" sz="1500" b="1" i="0" u="none" strike="noStrike" kern="0" cap="none" spc="0" normalizeH="0" baseline="0" noProof="0">
                           <a:ln>
@@ -15992,10 +15580,6 @@
                       <a:pPr marL="0" marR="0" lvl="0" indent="0" algn="ctr" rtl="0">
                         <a:buNone/>
                       </a:pPr>
-                      <a:endParaRPr lang="ja-JP" altLang="en-US" sz="1600" b="0" u="none" strike="noStrike" cap="none" dirty="0">
-                        <a:latin typeface="游ゴシック" panose="020B0604030504040204" pitchFamily="50" charset="-128"/>
-                        <a:ea typeface="游ゴシック" panose="020B0604030504040204" pitchFamily="50" charset="-128"/>
-                      </a:endParaRPr>
                       <a:r>
                         <a:rPr lang="en-US" altLang="ja-JP" sz="1600" b="0" u="none" strike="noStrike" cap="none" dirty="0">
                           <a:latin typeface="游ゴシック" panose="020B0604030504040204" pitchFamily="50" charset="-128"/>
@@ -16053,10 +15637,6 @@
                       <a:pPr marL="0" marR="0" lvl="0" indent="0" algn="ctr" rtl="0">
                         <a:buNone/>
                       </a:pPr>
-                      <a:endParaRPr lang="ja-JP" altLang="en-US" sz="1400" dirty="0">
-                        <a:latin typeface="游ゴシック" panose="020B0604030504040204" pitchFamily="50" charset="-128"/>
-                        <a:ea typeface="游ゴシック" panose="020B0604030504040204" pitchFamily="50" charset="-128"/>
-                      </a:endParaRPr>
                       <a:r>
                         <a:rPr lang="ja-JP" altLang="en-US" sz="1300" u="none" strike="noStrike" cap="none" dirty="0" b="0">
                           <a:solidFill>
@@ -16125,15 +15705,6 @@
                         <a:buFont typeface="游ゴシック"/>
                         <a:buNone/>
                       </a:pPr>
-                      <a:endParaRPr lang="en-US" altLang="ja-JP" sz="1400" b="1" u="none" strike="noStrike" cap="none" dirty="0">
-                        <a:solidFill>
-                          <a:schemeClr val="dk1"/>
-                        </a:solidFill>
-                        <a:latin typeface="游ゴシック" panose="020B0604030504040204" pitchFamily="50" charset="-128"/>
-                        <a:ea typeface="游ゴシック" panose="020B0604030504040204" pitchFamily="50" charset="-128"/>
-                        <a:cs typeface="游ゴシック"/>
-                        <a:sym typeface="游ゴシック"/>
-                      </a:endParaRPr>
                       <a:r>
                         <a:rPr lang="ja-JP" altLang="en-US" sz="1100" u="none" strike="noStrike" cap="none" dirty="0" b="0">
                           <a:solidFill>
@@ -16159,15 +15730,6 @@
                         <a:buFont typeface="游ゴシック"/>
                         <a:buNone/>
                       </a:pPr>
-                      <a:endParaRPr lang="en-US" altLang="ja-JP" sz="1400" b="1" u="none" strike="noStrike" cap="none" dirty="0">
-                        <a:solidFill>
-                          <a:schemeClr val="dk1"/>
-                        </a:solidFill>
-                        <a:latin typeface="游ゴシック" panose="020B0604030504040204" pitchFamily="50" charset="-128"/>
-                        <a:ea typeface="游ゴシック" panose="020B0604030504040204" pitchFamily="50" charset="-128"/>
-                        <a:cs typeface="游ゴシック"/>
-                        <a:sym typeface="游ゴシック"/>
-                      </a:endParaRPr>
                       <a:r>
                         <a:rPr lang="ja-JP" altLang="en-US" sz="1100" u="none" strike="noStrike" cap="none" dirty="0" b="0">
                           <a:solidFill>
@@ -16193,15 +15755,6 @@
                         <a:buFont typeface="游ゴシック"/>
                         <a:buNone/>
                       </a:pPr>
-                      <a:endParaRPr lang="en-US" altLang="ja-JP" sz="1400" b="1" u="none" strike="noStrike" cap="none" dirty="0">
-                        <a:solidFill>
-                          <a:schemeClr val="dk1"/>
-                        </a:solidFill>
-                        <a:latin typeface="游ゴシック" panose="020B0604030504040204" pitchFamily="50" charset="-128"/>
-                        <a:ea typeface="游ゴシック" panose="020B0604030504040204" pitchFamily="50" charset="-128"/>
-                        <a:cs typeface="游ゴシック"/>
-                        <a:sym typeface="游ゴシック"/>
-                      </a:endParaRPr>
                       <a:r>
                         <a:rPr lang="ja-JP" altLang="en-US" sz="1100" u="none" strike="noStrike" cap="none" dirty="0" b="0">
                           <a:solidFill>
@@ -16274,21 +15827,6 @@
                         <a:tabLst/>
                         <a:defRPr/>
                       </a:pPr>
-                      <a:endParaRPr kumimoji="0" lang="ja-JP" altLang="en-US" sz="1400" b="1" i="0" u="none" strike="noStrike" kern="0" cap="none" spc="0" normalizeH="0" baseline="0" noProof="0" dirty="0">
-                        <a:ln>
-                          <a:noFill/>
-                        </a:ln>
-                        <a:solidFill>
-                          <a:srgbClr val="000000"/>
-                        </a:solidFill>
-                        <a:effectLst/>
-                        <a:uLnTx/>
-                        <a:uFillTx/>
-                        <a:latin typeface="游ゴシック" panose="020B0604030504040204" pitchFamily="50" charset="-128"/>
-                        <a:ea typeface="游ゴシック" panose="020B0604030504040204" pitchFamily="50" charset="-128"/>
-                        <a:cs typeface="+mn-cs"/>
-                        <a:sym typeface="Arial"/>
-                      </a:endParaRPr>
                       <a:r>
                         <a:rPr kumimoji="0" lang="ja-JP" altLang="en-US" sz="1500" b="1" i="0" u="none" strike="noStrike" kern="0" cap="none" spc="0" normalizeH="0" baseline="0" noProof="0">
                           <a:ln>
@@ -16364,10 +15902,6 @@
                       <a:pPr marL="0" marR="0" lvl="0" indent="0" algn="ctr" rtl="0">
                         <a:buNone/>
                       </a:pPr>
-                      <a:endParaRPr lang="ja-JP" altLang="en-US" sz="1600" b="0" u="none" strike="noStrike" cap="none" dirty="0">
-                        <a:latin typeface="游ゴシック" panose="020B0604030504040204" pitchFamily="50" charset="-128"/>
-                        <a:ea typeface="游ゴシック" panose="020B0604030504040204" pitchFamily="50" charset="-128"/>
-                      </a:endParaRPr>
                       <a:r>
                         <a:rPr lang="en-US" altLang="ja-JP" sz="1600" b="0" u="none" strike="noStrike" cap="none" dirty="0">
                           <a:latin typeface="游ゴシック" panose="020B0604030504040204" pitchFamily="50" charset="-128"/>
@@ -16425,13 +15959,6 @@
                       <a:pPr marL="0" marR="0" lvl="0" indent="0" algn="ctr" rtl="0">
                         <a:buNone/>
                       </a:pPr>
-                      <a:endParaRPr lang="en-US" altLang="ja-JP" sz="1600" u="none" strike="noStrike" cap="none" dirty="0">
-                        <a:solidFill>
-                          <a:schemeClr val="dk1"/>
-                        </a:solidFill>
-                        <a:latin typeface="游ゴシック" panose="020B0604030504040204" pitchFamily="50" charset="-128"/>
-                        <a:ea typeface="游ゴシック" panose="020B0604030504040204" pitchFamily="50" charset="-128"/>
-                      </a:endParaRPr>
                       <a:r>
                         <a:rPr lang="ja-JP" altLang="en-US" sz="1300" u="none" strike="noStrike" cap="none" dirty="0" b="0">
                           <a:solidFill>
@@ -16500,10 +16027,6 @@
                         <a:buFont typeface="游ゴシック"/>
                         <a:buNone/>
                       </a:pPr>
-                      <a:endParaRPr lang="en-US" altLang="ja-JP" sz="1400" dirty="0">
-                        <a:latin typeface="游ゴシック" panose="020B0604030504040204" pitchFamily="50" charset="-128"/>
-                        <a:ea typeface="游ゴシック" panose="020B0604030504040204" pitchFamily="50" charset="-128"/>
-                      </a:endParaRPr>
                       <a:r>
                         <a:rPr lang="ja-JP" altLang="en-US" sz="1100" dirty="0" b="0">
                           <a:latin typeface="游ゴシック" panose="020B0604030504040204" pitchFamily="50" charset="-128"/>
@@ -16524,10 +16047,6 @@
                         <a:buFont typeface="游ゴシック"/>
                         <a:buNone/>
                       </a:pPr>
-                      <a:endParaRPr lang="en-US" altLang="ja-JP" sz="1400" dirty="0">
-                        <a:latin typeface="游ゴシック" panose="020B0604030504040204" pitchFamily="50" charset="-128"/>
-                        <a:ea typeface="游ゴシック" panose="020B0604030504040204" pitchFamily="50" charset="-128"/>
-                      </a:endParaRPr>
                       <a:r>
                         <a:rPr lang="ja-JP" altLang="en-US" sz="1100" dirty="0" b="0">
                           <a:latin typeface="游ゴシック" panose="020B0604030504040204" pitchFamily="50" charset="-128"/>
@@ -16595,21 +16114,6 @@
                         <a:tabLst/>
                         <a:defRPr/>
                       </a:pPr>
-                      <a:endParaRPr kumimoji="0" lang="ja-JP" altLang="en-US" sz="1400" b="1" i="0" u="none" strike="noStrike" kern="0" cap="none" spc="0" normalizeH="0" baseline="0" noProof="0" dirty="0">
-                        <a:ln>
-                          <a:noFill/>
-                        </a:ln>
-                        <a:solidFill>
-                          <a:srgbClr val="000000"/>
-                        </a:solidFill>
-                        <a:effectLst/>
-                        <a:uLnTx/>
-                        <a:uFillTx/>
-                        <a:latin typeface="游ゴシック" panose="020B0604030504040204" pitchFamily="50" charset="-128"/>
-                        <a:ea typeface="游ゴシック" panose="020B0604030504040204" pitchFamily="50" charset="-128"/>
-                        <a:cs typeface="+mn-cs"/>
-                        <a:sym typeface="Arial"/>
-                      </a:endParaRPr>
                       <a:r>
                         <a:rPr kumimoji="0" lang="ja-JP" altLang="en-US" sz="1500" b="1" i="0" u="none" strike="noStrike" kern="0" cap="none" spc="0" normalizeH="0" baseline="0" noProof="0">
                           <a:ln>
@@ -16685,10 +16189,6 @@
                       <a:pPr marL="0" marR="0" lvl="0" indent="0" algn="ctr" rtl="0">
                         <a:buNone/>
                       </a:pPr>
-                      <a:endParaRPr lang="ja-JP" altLang="en-US" sz="1600" b="0" u="none" strike="noStrike" cap="none" dirty="0">
-                        <a:latin typeface="游ゴシック" panose="020B0604030504040204" pitchFamily="50" charset="-128"/>
-                        <a:ea typeface="游ゴシック" panose="020B0604030504040204" pitchFamily="50" charset="-128"/>
-                      </a:endParaRPr>
                       <a:r>
                         <a:rPr lang="en-US" altLang="ja-JP" sz="1600" b="0" u="none" strike="noStrike" cap="none" dirty="0">
                           <a:latin typeface="游ゴシック" panose="020B0604030504040204" pitchFamily="50" charset="-128"/>
@@ -16837,15 +16337,6 @@
                       <a:pPr marL="0" marR="0" lvl="0" indent="0" algn="l" rtl="0">
                         <a:buNone/>
                       </a:pPr>
-                      <a:endParaRPr lang="en-US" altLang="ja-JP" sz="1400" u="none" strike="noStrike" cap="none" dirty="0">
-                        <a:solidFill>
-                          <a:schemeClr val="dk1"/>
-                        </a:solidFill>
-                        <a:latin typeface="游ゴシック" panose="020B0604030504040204" pitchFamily="50" charset="-128"/>
-                        <a:ea typeface="游ゴシック" panose="020B0604030504040204" pitchFamily="50" charset="-128"/>
-                        <a:cs typeface="游ゴシック"/>
-                        <a:sym typeface="游ゴシック"/>
-                      </a:endParaRPr>
                       <a:r>
                         <a:rPr lang="ja-JP" altLang="en-US" sz="1100" u="none" strike="noStrike" cap="none" dirty="0" b="0">
                           <a:solidFill>
@@ -16863,15 +16354,6 @@
                       <a:pPr marL="0" marR="0" lvl="0" indent="0" algn="l" rtl="0">
                         <a:buNone/>
                       </a:pPr>
-                      <a:endParaRPr lang="en-US" altLang="ja-JP" sz="1400" u="none" strike="noStrike" cap="none" dirty="0">
-                        <a:solidFill>
-                          <a:schemeClr val="dk1"/>
-                        </a:solidFill>
-                        <a:latin typeface="游ゴシック" panose="020B0604030504040204" pitchFamily="50" charset="-128"/>
-                        <a:ea typeface="游ゴシック" panose="020B0604030504040204" pitchFamily="50" charset="-128"/>
-                        <a:cs typeface="游ゴシック"/>
-                        <a:sym typeface="游ゴシック"/>
-                      </a:endParaRPr>
                       <a:r>
                         <a:rPr lang="ja-JP" altLang="en-US" sz="1100" u="none" strike="noStrike" cap="none" dirty="0" b="0">
                           <a:solidFill>
@@ -16944,21 +16426,6 @@
                         <a:tabLst/>
                         <a:defRPr/>
                       </a:pPr>
-                      <a:endParaRPr kumimoji="0" lang="ja-JP" altLang="en-US" sz="1400" b="1" i="0" u="none" strike="noStrike" kern="0" cap="none" spc="0" normalizeH="0" baseline="0" noProof="0" dirty="0">
-                        <a:ln>
-                          <a:noFill/>
-                        </a:ln>
-                        <a:solidFill>
-                          <a:srgbClr val="000000"/>
-                        </a:solidFill>
-                        <a:effectLst/>
-                        <a:uLnTx/>
-                        <a:uFillTx/>
-                        <a:latin typeface="游ゴシック" panose="020B0604030504040204" pitchFamily="50" charset="-128"/>
-                        <a:ea typeface="游ゴシック" panose="020B0604030504040204" pitchFamily="50" charset="-128"/>
-                        <a:cs typeface="+mn-cs"/>
-                        <a:sym typeface="Arial"/>
-                      </a:endParaRPr>
                       <a:r>
                         <a:rPr kumimoji="0" lang="ja-JP" altLang="en-US" sz="1500" b="1" i="0" u="none" strike="noStrike" kern="0" cap="none" spc="0" normalizeH="0" baseline="0" noProof="0">
                           <a:ln>
@@ -17034,10 +16501,6 @@
                       <a:pPr marL="0" marR="0" lvl="0" indent="0" algn="ctr" rtl="0">
                         <a:buNone/>
                       </a:pPr>
-                      <a:endParaRPr lang="ja-JP" altLang="en-US" sz="1600" b="0" dirty="0">
-                        <a:latin typeface="游ゴシック" panose="020B0604030504040204" pitchFamily="50" charset="-128"/>
-                        <a:ea typeface="游ゴシック" panose="020B0604030504040204" pitchFamily="50" charset="-128"/>
-                      </a:endParaRPr>
                       <a:r>
                         <a:rPr lang="en-US" altLang="ja-JP" sz="1600" b="0" dirty="0">
                           <a:latin typeface="游ゴシック" panose="020B0604030504040204" pitchFamily="50" charset="-128"/>
@@ -17103,13 +16566,6 @@
                         <a:buFont typeface="游ゴシック"/>
                         <a:buNone/>
                       </a:pPr>
-                      <a:endParaRPr lang="en-US" altLang="ja-JP" sz="1600" dirty="0">
-                        <a:solidFill>
-                          <a:schemeClr val="dk1"/>
-                        </a:solidFill>
-                        <a:latin typeface="游ゴシック" panose="020B0604030504040204" pitchFamily="50" charset="-128"/>
-                        <a:ea typeface="游ゴシック" panose="020B0604030504040204" pitchFamily="50" charset="-128"/>
-                      </a:endParaRPr>
                       <a:r>
                         <a:rPr lang="ja-JP" altLang="en-US" sz="1300" dirty="0" b="0">
                           <a:solidFill>
@@ -17178,10 +16634,6 @@
                         <a:buFont typeface="游ゴシック"/>
                         <a:buNone/>
                       </a:pPr>
-                      <a:endParaRPr lang="ja-JP" altLang="en-US" sz="1400" dirty="0">
-                        <a:latin typeface="游ゴシック" panose="020B0604030504040204" pitchFamily="50" charset="-128"/>
-                        <a:ea typeface="游ゴシック" panose="020B0604030504040204" pitchFamily="50" charset="-128"/>
-                      </a:endParaRPr>
                       <a:r>
                         <a:rPr lang="ja-JP" altLang="en-US" sz="1100" dirty="0" b="0">
                           <a:solidFill>
@@ -17254,21 +16706,6 @@
                         <a:tabLst/>
                         <a:defRPr/>
                       </a:pPr>
-                      <a:endParaRPr kumimoji="0" lang="ja-JP" altLang="en-US" sz="1400" b="1" i="0" u="none" strike="noStrike" kern="0" cap="none" spc="0" normalizeH="0" baseline="0" noProof="0" dirty="0">
-                        <a:ln>
-                          <a:noFill/>
-                        </a:ln>
-                        <a:solidFill>
-                          <a:srgbClr val="000000"/>
-                        </a:solidFill>
-                        <a:effectLst/>
-                        <a:uLnTx/>
-                        <a:uFillTx/>
-                        <a:latin typeface="游ゴシック" panose="020B0604030504040204" pitchFamily="50" charset="-128"/>
-                        <a:ea typeface="游ゴシック" panose="020B0604030504040204" pitchFamily="50" charset="-128"/>
-                        <a:cs typeface="+mn-cs"/>
-                        <a:sym typeface="Arial"/>
-                      </a:endParaRPr>
                       <a:r>
                         <a:rPr kumimoji="0" lang="ja-JP" altLang="en-US" sz="1500" b="0" i="0" u="none" strike="noStrike" kern="0" cap="none" spc="0" normalizeH="0" baseline="0" noProof="0" dirty="0">
                           <a:ln>
@@ -17366,7 +16803,6 @@
           </a:bodyPr>
           <a:lstStyle/>
           <a:p>
-            <a:endParaRPr sz="1543" dirty="0"/>
             <a:r>
               <a:rPr lang="en-US" altLang="ja-JP" sz="900" dirty="0">
                 <a:solidFill>
@@ -17377,7 +16813,6 @@
             </a:r>
           </a:p>
           <a:p>
-            <a:endParaRPr sz="1543" dirty="0"/>
             <a:r>
               <a:rPr lang="en-US" altLang="ja-JP" sz="900" dirty="0">
                 <a:solidFill>
@@ -17388,7 +16823,6 @@
             </a:r>
           </a:p>
           <a:p>
-            <a:endParaRPr sz="1543" dirty="0"/>
             <a:r>
               <a:rPr lang="en-US" altLang="ja-JP" sz="900" dirty="0">
                 <a:solidFill>
@@ -17399,7 +16833,6 @@
             </a:r>
           </a:p>
           <a:p>
-            <a:endParaRPr sz="1543" dirty="0"/>
             <a:r>
               <a:rPr lang="en-US" altLang="ja-JP" sz="900" dirty="0">
                 <a:solidFill>
@@ -17410,7 +16843,6 @@
             </a:r>
           </a:p>
           <a:p>
-            <a:endParaRPr sz="1543" dirty="0"/>
             <a:r>
               <a:rPr lang="en-US" altLang="ja-JP" sz="900" dirty="0">
                 <a:solidFill>
@@ -17522,13 +16954,6 @@
               </a:buClr>
               <a:buSzPts val="1000"/>
             </a:pPr>
-            <a:endParaRPr lang="ja-JP" altLang="en-US" sz="1543">
-              <a:solidFill>
-                <a:schemeClr val="bg1"/>
-              </a:solidFill>
-              <a:latin typeface="游ゴシック" panose="020B0604030504040204" pitchFamily="50" charset="-128"/>
-              <a:ea typeface="游ゴシック" panose="020B0604030504040204" pitchFamily="50" charset="-128"/>
-            </a:endParaRPr>
             <a:r>
               <a:rPr lang="ja-JP" altLang="en-US" sz="1102">
                 <a:solidFill>
@@ -17654,15 +17079,6 @@
                       <a:pPr marL="0" marR="0" lvl="0" indent="0" algn="ctr" rtl="0">
                         <a:buNone/>
                       </a:pPr>
-                      <a:endParaRPr lang="en-US" sz="1400" b="1" dirty="0">
-                        <a:solidFill>
-                          <a:schemeClr val="lt1"/>
-                        </a:solidFill>
-                        <a:latin typeface="游ゴシック" panose="020B0604030504040204" pitchFamily="50" charset="-128"/>
-                        <a:ea typeface="游ゴシック" panose="020B0604030504040204" pitchFamily="50" charset="-128"/>
-                        <a:cs typeface="游ゴシック"/>
-                        <a:sym typeface="游ゴシック"/>
-                      </a:endParaRPr>
                       <a:r>
                         <a:rPr lang="en-US" altLang="ja-JP" sz="1400" b="1" dirty="0">
                           <a:solidFill>
@@ -17731,10 +17147,6 @@
                       <a:pPr marL="0" marR="0" lvl="0" indent="0" algn="ctr" rtl="0">
                         <a:buNone/>
                       </a:pPr>
-                      <a:endParaRPr lang="ja-JP" altLang="en-US" sz="1400" dirty="0">
-                        <a:latin typeface="游ゴシック" panose="020B0604030504040204" pitchFamily="50" charset="-128"/>
-                        <a:ea typeface="游ゴシック" panose="020B0604030504040204" pitchFamily="50" charset="-128"/>
-                      </a:endParaRPr>
                       <a:r>
                         <a:rPr lang="ja-JP" altLang="en-US" sz="1400" b="1" dirty="0">
                           <a:solidFill>
@@ -17801,10 +17213,6 @@
                       <a:pPr marL="0" marR="0" lvl="0" indent="0" algn="ctr" rtl="0">
                         <a:buNone/>
                       </a:pPr>
-                      <a:endParaRPr lang="ja-JP" altLang="en-US" sz="1400" dirty="0">
-                        <a:latin typeface="游ゴシック" panose="020B0604030504040204" pitchFamily="50" charset="-128"/>
-                        <a:ea typeface="游ゴシック" panose="020B0604030504040204" pitchFamily="50" charset="-128"/>
-                      </a:endParaRPr>
                       <a:r>
                         <a:rPr lang="ja-JP" altLang="en-US" sz="1400" b="1" dirty="0">
                           <a:solidFill>
@@ -17871,10 +17279,6 @@
                       <a:pPr marL="0" marR="0" lvl="0" indent="0" algn="ctr" rtl="0">
                         <a:buNone/>
                       </a:pPr>
-                      <a:endParaRPr lang="ja-JP" altLang="en-US" sz="1400" dirty="0">
-                        <a:latin typeface="游ゴシック" panose="020B0604030504040204" pitchFamily="50" charset="-128"/>
-                        <a:ea typeface="游ゴシック" panose="020B0604030504040204" pitchFamily="50" charset="-128"/>
-                      </a:endParaRPr>
                       <a:r>
                         <a:rPr lang="ja-JP" altLang="en-US" sz="1400" b="1" dirty="0">
                           <a:solidFill>
@@ -17950,10 +17354,6 @@
                       <a:pPr marL="0" marR="0" lvl="0" indent="0" algn="ctr" rtl="0">
                         <a:buNone/>
                       </a:pPr>
-                      <a:endParaRPr lang="ja-JP" altLang="en-US" sz="1400" b="0" dirty="0">
-                        <a:latin typeface="游ゴシック" panose="020B0604030504040204" pitchFamily="50" charset="-128"/>
-                        <a:ea typeface="游ゴシック" panose="020B0604030504040204" pitchFamily="50" charset="-128"/>
-                      </a:endParaRPr>
                       <a:r>
                         <a:rPr lang="en-US" altLang="ja-JP" sz="1600" b="0" dirty="0">
                           <a:latin typeface="游ゴシック" panose="020B0604030504040204" pitchFamily="50" charset="-128"/>
@@ -18079,13 +17479,6 @@
                         <a:buFont typeface="游ゴシック"/>
                         <a:buNone/>
                       </a:pPr>
-                      <a:endParaRPr lang="en-US" altLang="ja-JP" sz="1400" dirty="0">
-                        <a:solidFill>
-                          <a:schemeClr val="dk1"/>
-                        </a:solidFill>
-                        <a:latin typeface="游ゴシック" panose="020B0604030504040204" pitchFamily="50" charset="-128"/>
-                        <a:ea typeface="游ゴシック" panose="020B0604030504040204" pitchFamily="50" charset="-128"/>
-                      </a:endParaRPr>
                       <a:r>
                         <a:rPr lang="ja-JP" altLang="en-US" sz="1100" dirty="0" b="0">
                           <a:solidFill>
@@ -18109,13 +17502,6 @@
                         <a:buFont typeface="游ゴシック"/>
                         <a:buNone/>
                       </a:pPr>
-                      <a:endParaRPr lang="en-US" altLang="ja-JP" sz="1400" dirty="0">
-                        <a:solidFill>
-                          <a:schemeClr val="dk1"/>
-                        </a:solidFill>
-                        <a:latin typeface="游ゴシック" panose="020B0604030504040204" pitchFamily="50" charset="-128"/>
-                        <a:ea typeface="游ゴシック" panose="020B0604030504040204" pitchFamily="50" charset="-128"/>
-                      </a:endParaRPr>
                       <a:r>
                         <a:rPr lang="ja-JP" altLang="en-US" sz="1100" dirty="0" b="0">
                           <a:solidFill>
@@ -18184,10 +17570,6 @@
                         <a:buFont typeface="游ゴシック"/>
                         <a:buNone/>
                       </a:pPr>
-                      <a:endParaRPr lang="ja-JP" altLang="en-US" sz="1400" b="1" dirty="0">
-                        <a:latin typeface="游ゴシック" panose="020B0604030504040204" pitchFamily="50" charset="-128"/>
-                        <a:ea typeface="游ゴシック" panose="020B0604030504040204" pitchFamily="50" charset="-128"/>
-                      </a:endParaRPr>
                       <a:r>
                         <a:rPr lang="ja-JP" altLang="en-US" sz="1500" b="1" i="0" u="none" strike="noStrike" cap="none" dirty="0">
                           <a:solidFill>
@@ -18265,10 +17647,6 @@
                         <a:buFont typeface="游ゴシック"/>
                         <a:buNone/>
                       </a:pPr>
-                      <a:endParaRPr lang="ja-JP" altLang="en-US" sz="1600" b="0" dirty="0">
-                        <a:latin typeface="游ゴシック" panose="020B0604030504040204" pitchFamily="50" charset="-128"/>
-                        <a:ea typeface="游ゴシック" panose="020B0604030504040204" pitchFamily="50" charset="-128"/>
-                      </a:endParaRPr>
                       <a:r>
                         <a:rPr lang="en-US" altLang="ja-JP" sz="1600" b="0" dirty="0">
                           <a:latin typeface="游ゴシック" panose="020B0604030504040204" pitchFamily="50" charset="-128"/>
@@ -18391,10 +17769,6 @@
                         <a:buFont typeface="游ゴシック"/>
                         <a:buNone/>
                       </a:pPr>
-                      <a:endParaRPr lang="ja-JP" altLang="en-US" sz="1400" dirty="0">
-                        <a:latin typeface="游ゴシック" panose="020B0604030504040204" pitchFamily="50" charset="-128"/>
-                        <a:ea typeface="游ゴシック" panose="020B0604030504040204" pitchFamily="50" charset="-128"/>
-                      </a:endParaRPr>
                       <a:r>
                         <a:rPr lang="ja-JP" altLang="en-US" sz="1100" dirty="0" b="0">
                           <a:solidFill>
@@ -18463,10 +17837,6 @@
                         <a:buFont typeface="游ゴシック"/>
                         <a:buNone/>
                       </a:pPr>
-                      <a:endParaRPr lang="ja-JP" altLang="en-US" sz="1400" b="1" dirty="0">
-                        <a:latin typeface="游ゴシック" panose="020B0604030504040204" pitchFamily="50" charset="-128"/>
-                        <a:ea typeface="游ゴシック" panose="020B0604030504040204" pitchFamily="50" charset="-128"/>
-                      </a:endParaRPr>
                       <a:r>
                         <a:rPr lang="ja-JP" altLang="en-US" sz="1500" b="1" i="0" u="none" strike="noStrike" cap="none" dirty="0">
                           <a:solidFill>
@@ -18536,10 +17906,6 @@
                       <a:pPr marL="0" marR="0" lvl="0" indent="0" algn="ctr" rtl="0">
                         <a:buNone/>
                       </a:pPr>
-                      <a:endParaRPr lang="ja-JP" altLang="en-US" sz="1600" b="0" dirty="0">
-                        <a:latin typeface="游ゴシック" panose="020B0604030504040204" pitchFamily="50" charset="-128"/>
-                        <a:ea typeface="游ゴシック" panose="020B0604030504040204" pitchFamily="50" charset="-128"/>
-                      </a:endParaRPr>
                       <a:r>
                         <a:rPr lang="en-US" altLang="ja-JP" sz="1600" b="0" dirty="0">
                           <a:latin typeface="游ゴシック" panose="020B0604030504040204" pitchFamily="50" charset="-128"/>
@@ -18597,13 +17963,6 @@
                       <a:pPr marL="0" marR="0" lvl="0" indent="0" algn="ctr" rtl="0">
                         <a:buNone/>
                       </a:pPr>
-                      <a:endParaRPr lang="en-US" altLang="ja-JP" sz="1600" dirty="0">
-                        <a:solidFill>
-                          <a:schemeClr val="dk1"/>
-                        </a:solidFill>
-                        <a:latin typeface="游ゴシック" panose="020B0604030504040204" pitchFamily="50" charset="-128"/>
-                        <a:ea typeface="游ゴシック" panose="020B0604030504040204" pitchFamily="50" charset="-128"/>
-                      </a:endParaRPr>
                       <a:r>
                         <a:rPr lang="ja-JP" altLang="en-US" sz="1300" dirty="0" b="0">
                           <a:solidFill>
@@ -18767,10 +18126,6 @@
                         <a:buFont typeface="游ゴシック"/>
                         <a:buNone/>
                       </a:pPr>
-                      <a:endParaRPr lang="ja-JP" altLang="en-US" sz="1400" b="1" dirty="0">
-                        <a:latin typeface="游ゴシック" panose="020B0604030504040204" pitchFamily="50" charset="-128"/>
-                        <a:ea typeface="游ゴシック" panose="020B0604030504040204" pitchFamily="50" charset="-128"/>
-                      </a:endParaRPr>
                       <a:r>
                         <a:rPr lang="ja-JP" altLang="en-US" sz="1500" b="1" i="0" u="none" strike="noStrike" cap="none" dirty="0">
                           <a:solidFill>
@@ -18840,10 +18195,6 @@
                       <a:pPr marL="0" marR="0" lvl="0" indent="0" algn="ctr" rtl="0">
                         <a:buNone/>
                       </a:pPr>
-                      <a:endParaRPr lang="ja-JP" altLang="en-US" sz="1600" b="0" dirty="0">
-                        <a:latin typeface="游ゴシック" panose="020B0604030504040204" pitchFamily="50" charset="-128"/>
-                        <a:ea typeface="游ゴシック" panose="020B0604030504040204" pitchFamily="50" charset="-128"/>
-                      </a:endParaRPr>
                       <a:r>
                         <a:rPr lang="en-US" altLang="ja-JP" sz="1600" b="0" dirty="0">
                           <a:latin typeface="游ゴシック" panose="020B0604030504040204" pitchFamily="50" charset="-128"/>
@@ -19095,10 +18446,6 @@
                         <a:buFont typeface="游ゴシック"/>
                         <a:buNone/>
                       </a:pPr>
-                      <a:endParaRPr lang="ja-JP" altLang="en-US" sz="1400" b="1" dirty="0">
-                        <a:latin typeface="游ゴシック" panose="020B0604030504040204" pitchFamily="50" charset="-128"/>
-                        <a:ea typeface="游ゴシック" panose="020B0604030504040204" pitchFamily="50" charset="-128"/>
-                      </a:endParaRPr>
                       <a:r>
                         <a:rPr lang="ja-JP" altLang="en-US" sz="1500" b="1" i="0" u="none" strike="noStrike" cap="none" dirty="0">
                           <a:solidFill>
@@ -19168,10 +18515,6 @@
                       <a:pPr marL="0" marR="0" lvl="0" indent="0" algn="ctr" rtl="0">
                         <a:buNone/>
                       </a:pPr>
-                      <a:endParaRPr lang="ja-JP" altLang="en-US" sz="1600" b="0" dirty="0">
-                        <a:latin typeface="游ゴシック" panose="020B0604030504040204" pitchFamily="50" charset="-128"/>
-                        <a:ea typeface="游ゴシック" panose="020B0604030504040204" pitchFamily="50" charset="-128"/>
-                      </a:endParaRPr>
                       <a:r>
                         <a:rPr lang="en-US" altLang="ja-JP" sz="1600" b="0" dirty="0">
                           <a:latin typeface="游ゴシック" panose="020B0604030504040204" pitchFamily="50" charset="-128"/>
@@ -19305,15 +18648,6 @@
                         <a:buFont typeface="Arial" panose="020B0604020202020204" pitchFamily="34" charset="0"/>
                         <a:buNone/>
                       </a:pPr>
-                      <a:endParaRPr lang="en-US" altLang="ja-JP" sz="1400" b="0" i="0" u="none" strike="noStrike" dirty="0">
-                        <a:solidFill>
-                          <a:srgbClr val="3A3A3A"/>
-                        </a:solidFill>
-                        <a:latin typeface="游ゴシック" panose="020B0604030504040204" pitchFamily="50" charset="-128"/>
-                        <a:ea typeface="游ゴシック" panose="020B0604030504040204" pitchFamily="50" charset="-128"/>
-                        <a:cs typeface="游ゴシック"/>
-                        <a:sym typeface="游ゴシック"/>
-                      </a:endParaRPr>
                       <a:r>
                         <a:rPr lang="ja-JP" altLang="en-US" sz="1100" dirty="0" b="0">
                           <a:solidFill>
@@ -19382,10 +18716,6 @@
                         <a:buFont typeface="游ゴシック"/>
                         <a:buNone/>
                       </a:pPr>
-                      <a:endParaRPr lang="ja-JP" altLang="en-US" sz="1400" b="1" dirty="0">
-                        <a:latin typeface="游ゴシック" panose="020B0604030504040204" pitchFamily="50" charset="-128"/>
-                        <a:ea typeface="游ゴシック" panose="020B0604030504040204" pitchFamily="50" charset="-128"/>
-                      </a:endParaRPr>
                       <a:r>
                         <a:rPr lang="ja-JP" altLang="en-US" sz="1500" b="1" i="0" u="none" strike="noStrike" cap="none" dirty="0">
                           <a:solidFill>
@@ -19455,10 +18785,6 @@
                       <a:pPr marL="0" marR="0" lvl="0" indent="0" algn="ctr" rtl="0">
                         <a:buNone/>
                       </a:pPr>
-                      <a:endParaRPr lang="ja-JP" altLang="en-US" sz="1600" b="0" dirty="0">
-                        <a:latin typeface="游ゴシック" panose="020B0604030504040204" pitchFamily="50" charset="-128"/>
-                        <a:ea typeface="游ゴシック" panose="020B0604030504040204" pitchFamily="50" charset="-128"/>
-                      </a:endParaRPr>
                       <a:r>
                         <a:rPr lang="en-US" altLang="ja-JP" sz="1600" b="0" dirty="0">
                           <a:latin typeface="游ゴシック" panose="020B0604030504040204" pitchFamily="50" charset="-128"/>
@@ -19592,13 +18918,6 @@
                         <a:buFont typeface="Arial" panose="020B0604020202020204" pitchFamily="34" charset="0"/>
                         <a:buNone/>
                       </a:pPr>
-                      <a:endParaRPr lang="en-US" altLang="ja-JP" sz="1400" dirty="0">
-                        <a:solidFill>
-                          <a:schemeClr val="dk1"/>
-                        </a:solidFill>
-                        <a:latin typeface="游ゴシック" panose="020B0604030504040204" pitchFamily="50" charset="-128"/>
-                        <a:ea typeface="游ゴシック" panose="020B0604030504040204" pitchFamily="50" charset="-128"/>
-                      </a:endParaRPr>
                       <a:r>
                         <a:rPr lang="en-US" altLang="ja-JP" sz="1100" dirty="0" b="0">
                           <a:solidFill>
@@ -19667,10 +18986,6 @@
                         <a:buFont typeface="游ゴシック"/>
                         <a:buNone/>
                       </a:pPr>
-                      <a:endParaRPr lang="ja-JP" altLang="en-US" sz="1400" b="1" dirty="0">
-                        <a:latin typeface="游ゴシック" panose="020B0604030504040204" pitchFamily="50" charset="-128"/>
-                        <a:ea typeface="游ゴシック" panose="020B0604030504040204" pitchFamily="50" charset="-128"/>
-                      </a:endParaRPr>
                       <a:r>
                         <a:rPr lang="ja-JP" altLang="en-US" sz="1500" b="1" i="0" u="none" strike="noStrike" cap="none" dirty="0">
                           <a:solidFill>
@@ -19748,10 +19063,6 @@
                         <a:buFont typeface="游ゴシック"/>
                         <a:buNone/>
                       </a:pPr>
-                      <a:endParaRPr lang="ja-JP" altLang="en-US" sz="1600" b="0" dirty="0">
-                        <a:latin typeface="游ゴシック" panose="020B0604030504040204" pitchFamily="50" charset="-128"/>
-                        <a:ea typeface="游ゴシック" panose="020B0604030504040204" pitchFamily="50" charset="-128"/>
-                      </a:endParaRPr>
                       <a:r>
                         <a:rPr lang="en-US" altLang="ja-JP" sz="1600" b="0" dirty="0">
                           <a:latin typeface="游ゴシック" panose="020B0604030504040204" pitchFamily="50" charset="-128"/>
@@ -19874,10 +19185,6 @@
                         <a:buFont typeface="游ゴシック"/>
                         <a:buNone/>
                       </a:pPr>
-                      <a:endParaRPr lang="ja-JP" altLang="en-US" sz="1400" dirty="0">
-                        <a:latin typeface="游ゴシック" panose="020B0604030504040204" pitchFamily="50" charset="-128"/>
-                        <a:ea typeface="游ゴシック" panose="020B0604030504040204" pitchFamily="50" charset="-128"/>
-                      </a:endParaRPr>
                       <a:r>
                         <a:rPr lang="ja-JP" altLang="en-US" sz="1100" dirty="0" b="0">
                           <a:solidFill>
@@ -19946,10 +19253,6 @@
                         <a:buFont typeface="游ゴシック"/>
                         <a:buNone/>
                       </a:pPr>
-                      <a:endParaRPr lang="ja-JP" altLang="en-US" sz="1400" b="1" dirty="0">
-                        <a:latin typeface="游ゴシック" panose="020B0604030504040204" pitchFamily="50" charset="-128"/>
-                        <a:ea typeface="游ゴシック" panose="020B0604030504040204" pitchFamily="50" charset="-128"/>
-                      </a:endParaRPr>
                       <a:r>
                         <a:rPr lang="ja-JP" altLang="en-US" sz="1500" b="1" i="0" u="none" strike="noStrike" cap="none" dirty="0">
                           <a:solidFill>
@@ -20041,7 +19344,6 @@
           </a:bodyPr>
           <a:lstStyle/>
           <a:p>
-            <a:endParaRPr sz="1543" dirty="0"/>
             <a:r>
               <a:rPr lang="en-US" altLang="ja-JP" sz="900" dirty="0">
                 <a:solidFill>
@@ -20052,7 +19354,6 @@
             </a:r>
           </a:p>
           <a:p>
-            <a:endParaRPr sz="1543" dirty="0"/>
             <a:r>
               <a:rPr lang="en-US" altLang="ja-JP" sz="900" dirty="0">
                 <a:solidFill>
@@ -20063,7 +19364,6 @@
             </a:r>
           </a:p>
           <a:p>
-            <a:endParaRPr sz="1543" dirty="0"/>
             <a:r>
               <a:rPr lang="en-US" altLang="ja-JP" sz="900" dirty="0">
                 <a:solidFill>
@@ -20074,7 +19374,6 @@
             </a:r>
           </a:p>
           <a:p>
-            <a:endParaRPr sz="1543" dirty="0"/>
             <a:r>
               <a:rPr lang="en-US" altLang="ja-JP" sz="900" dirty="0">
                 <a:solidFill>
@@ -20085,7 +19384,6 @@
             </a:r>
           </a:p>
           <a:p>
-            <a:endParaRPr sz="1543" dirty="0"/>
             <a:r>
               <a:rPr lang="en-US" altLang="ja-JP" sz="900" dirty="0">
                 <a:solidFill>
@@ -20197,13 +19495,6 @@
               </a:buClr>
               <a:buSzPts val="1000"/>
             </a:pPr>
-            <a:endParaRPr lang="ja-JP" altLang="en-US" sz="1543">
-              <a:solidFill>
-                <a:schemeClr val="bg1"/>
-              </a:solidFill>
-              <a:latin typeface="游ゴシック" panose="020B0604030504040204" pitchFamily="50" charset="-128"/>
-              <a:ea typeface="游ゴシック" panose="020B0604030504040204" pitchFamily="50" charset="-128"/>
-            </a:endParaRPr>
             <a:r>
               <a:rPr lang="ja-JP" altLang="en-US" sz="1102">
                 <a:solidFill>
@@ -20329,13 +19620,6 @@
                       <a:pPr marL="0" marR="0" lvl="0" indent="0" algn="ctr" rtl="0">
                         <a:buNone/>
                       </a:pPr>
-                      <a:endParaRPr lang="en-US" sz="1400" b="1" u="none" strike="noStrike" cap="none" dirty="0">
-                        <a:solidFill>
-                          <a:schemeClr val="lt1"/>
-                        </a:solidFill>
-                        <a:latin typeface="游ゴシック" panose="020B0604030504040204" pitchFamily="50" charset="-128"/>
-                        <a:ea typeface="游ゴシック" panose="020B0604030504040204" pitchFamily="50" charset="-128"/>
-                      </a:endParaRPr>
                       <a:r>
                         <a:rPr lang="en-US" altLang="ja-JP" sz="1400" b="1" u="none" strike="noStrike" cap="none" dirty="0">
                           <a:solidFill>
@@ -20400,10 +19684,6 @@
                       <a:pPr marL="0" marR="0" lvl="0" indent="0" algn="ctr" rtl="0">
                         <a:buNone/>
                       </a:pPr>
-                      <a:endParaRPr lang="ja-JP" altLang="en-US" sz="1400" b="1" dirty="0">
-                        <a:latin typeface="游ゴシック" panose="020B0604030504040204" pitchFamily="50" charset="-128"/>
-                        <a:ea typeface="游ゴシック" panose="020B0604030504040204" pitchFamily="50" charset="-128"/>
-                      </a:endParaRPr>
                       <a:r>
                         <a:rPr lang="ja-JP" altLang="en-US" sz="1400" b="1" u="none" strike="noStrike" cap="none" dirty="0">
                           <a:solidFill>
@@ -20466,10 +19746,6 @@
                       <a:pPr marL="0" marR="0" lvl="0" indent="0" algn="ctr" rtl="0">
                         <a:buNone/>
                       </a:pPr>
-                      <a:endParaRPr lang="ja-JP" altLang="en-US" sz="1400" b="1" dirty="0">
-                        <a:latin typeface="游ゴシック" panose="020B0604030504040204" pitchFamily="50" charset="-128"/>
-                        <a:ea typeface="游ゴシック" panose="020B0604030504040204" pitchFamily="50" charset="-128"/>
-                      </a:endParaRPr>
                       <a:r>
                         <a:rPr lang="ja-JP" altLang="en-US" sz="1400" b="1" u="none" strike="noStrike" cap="none" dirty="0">
                           <a:solidFill>
@@ -20532,10 +19808,6 @@
                       <a:pPr marL="0" marR="0" lvl="0" indent="0" algn="ctr" rtl="0">
                         <a:buNone/>
                       </a:pPr>
-                      <a:endParaRPr lang="ja-JP" altLang="en-US" sz="1400" b="1" dirty="0">
-                        <a:latin typeface="游ゴシック" panose="020B0604030504040204" pitchFamily="50" charset="-128"/>
-                        <a:ea typeface="游ゴシック" panose="020B0604030504040204" pitchFamily="50" charset="-128"/>
-                      </a:endParaRPr>
                       <a:r>
                         <a:rPr lang="ja-JP" altLang="en-US" sz="1400" b="1" u="none" strike="noStrike" cap="none" dirty="0">
                           <a:solidFill>
@@ -20607,10 +19879,6 @@
                       <a:pPr marL="0" marR="0" lvl="0" indent="0" algn="ctr" rtl="0">
                         <a:buNone/>
                       </a:pPr>
-                      <a:endParaRPr lang="ja-JP" altLang="en-US" sz="1600" b="0" u="none" strike="noStrike" cap="none" dirty="0">
-                        <a:latin typeface="游ゴシック" panose="020B0604030504040204" pitchFamily="50" charset="-128"/>
-                        <a:ea typeface="游ゴシック" panose="020B0604030504040204" pitchFamily="50" charset="-128"/>
-                      </a:endParaRPr>
                       <a:r>
                         <a:rPr lang="en-US" altLang="ja-JP" sz="1600" b="0" u="none" strike="noStrike" cap="none" dirty="0">
                           <a:latin typeface="游ゴシック" panose="020B0604030504040204" pitchFamily="50" charset="-128"/>
@@ -20672,10 +19940,6 @@
                       <a:pPr marL="0" marR="0" lvl="0" indent="0" algn="ctr" rtl="0">
                         <a:buNone/>
                       </a:pPr>
-                      <a:endParaRPr lang="ja-JP" altLang="en-US" sz="1400" dirty="0">
-                        <a:latin typeface="游ゴシック" panose="020B0604030504040204" pitchFamily="50" charset="-128"/>
-                        <a:ea typeface="游ゴシック" panose="020B0604030504040204" pitchFamily="50" charset="-128"/>
-                      </a:endParaRPr>
                       <a:r>
                         <a:rPr lang="ja-JP" altLang="en-US" sz="1300" u="none" strike="noStrike" cap="none" dirty="0" b="0">
                           <a:solidFill>
@@ -20857,10 +20121,6 @@
                         <a:buFont typeface="游ゴシック"/>
                         <a:buNone/>
                       </a:pPr>
-                      <a:endParaRPr lang="ja-JP" altLang="en-US" sz="1400" b="0" dirty="0">
-                        <a:latin typeface="游ゴシック" panose="020B0604030504040204" pitchFamily="50" charset="-128"/>
-                        <a:ea typeface="游ゴシック" panose="020B0604030504040204" pitchFamily="50" charset="-128"/>
-                      </a:endParaRPr>
                       <a:r>
                         <a:rPr lang="ja-JP" altLang="en-US" sz="1500" b="1" i="0" u="none" strike="noStrike" cap="none" dirty="0">
                           <a:solidFill>
@@ -20934,10 +20194,6 @@
                       <a:pPr marL="0" marR="0" lvl="0" indent="0" algn="ctr" rtl="0">
                         <a:buNone/>
                       </a:pPr>
-                      <a:endParaRPr lang="ja-JP" altLang="en-US" sz="1600" b="0" u="none" strike="noStrike" cap="none" dirty="0">
-                        <a:latin typeface="游ゴシック" panose="020B0604030504040204" pitchFamily="50" charset="-128"/>
-                        <a:ea typeface="游ゴシック" panose="020B0604030504040204" pitchFamily="50" charset="-128"/>
-                      </a:endParaRPr>
                       <a:r>
                         <a:rPr lang="en-US" altLang="ja-JP" sz="1600" b="0" u="none" strike="noStrike" cap="none" dirty="0">
                           <a:latin typeface="游ゴシック" panose="020B0604030504040204" pitchFamily="50" charset="-128"/>
@@ -20999,10 +20255,6 @@
                       <a:pPr marL="0" marR="0" lvl="0" indent="0" algn="ctr" rtl="0">
                         <a:buNone/>
                       </a:pPr>
-                      <a:endParaRPr lang="ja-JP" altLang="en-US" sz="1400">
-                        <a:latin typeface="游ゴシック" panose="020B0604030504040204" pitchFamily="50" charset="-128"/>
-                        <a:ea typeface="游ゴシック" panose="020B0604030504040204" pitchFamily="50" charset="-128"/>
-                      </a:endParaRPr>
                       <a:r>
                         <a:rPr lang="ja-JP" altLang="en-US" sz="1300" u="none" strike="noStrike" cap="none" b="0">
                           <a:solidFill>
@@ -21072,10 +20324,6 @@
                         <a:buFont typeface="游ゴシック"/>
                         <a:buNone/>
                       </a:pPr>
-                      <a:endParaRPr lang="ja-JP" altLang="en-US" sz="1400" dirty="0">
-                        <a:latin typeface="游ゴシック" panose="020B0604030504040204" pitchFamily="50" charset="-128"/>
-                        <a:ea typeface="游ゴシック" panose="020B0604030504040204" pitchFamily="50" charset="-128"/>
-                      </a:endParaRPr>
                       <a:r>
                         <a:rPr lang="en-US" altLang="ja-JP" sz="1100" u="none" strike="noStrike" cap="none" dirty="0" b="0">
                           <a:solidFill>
@@ -21096,10 +20344,6 @@
                         <a:buFont typeface="游ゴシック"/>
                         <a:buNone/>
                       </a:pPr>
-                      <a:endParaRPr lang="ja-JP" altLang="en-US" sz="1400" dirty="0">
-                        <a:latin typeface="游ゴシック" panose="020B0604030504040204" pitchFamily="50" charset="-128"/>
-                        <a:ea typeface="游ゴシック" panose="020B0604030504040204" pitchFamily="50" charset="-128"/>
-                      </a:endParaRPr>
                       <a:r>
                         <a:rPr lang="en-US" altLang="ja-JP" sz="1100" u="none" strike="noStrike" cap="none" dirty="0" b="0">
                           <a:solidFill>
@@ -21245,10 +20489,6 @@
                       <a:pPr marL="0" marR="0" lvl="0" indent="0" algn="ctr" rtl="0">
                         <a:buNone/>
                       </a:pPr>
-                      <a:endParaRPr lang="ja-JP" altLang="en-US" sz="1600" b="0" u="none" strike="noStrike" cap="none" dirty="0">
-                        <a:latin typeface="游ゴシック" panose="020B0604030504040204" pitchFamily="50" charset="-128"/>
-                        <a:ea typeface="游ゴシック" panose="020B0604030504040204" pitchFamily="50" charset="-128"/>
-                      </a:endParaRPr>
                       <a:r>
                         <a:rPr lang="en-US" altLang="ja-JP" sz="1600" b="0" u="none" strike="noStrike" cap="none" dirty="0">
                           <a:latin typeface="游ゴシック" panose="020B0604030504040204" pitchFamily="50" charset="-128"/>
@@ -21371,10 +20611,6 @@
                         <a:buFont typeface="游ゴシック"/>
                         <a:buNone/>
                       </a:pPr>
-                      <a:endParaRPr lang="en-US" altLang="ja-JP" sz="1100" u="none" strike="noStrike" cap="none" dirty="0">
-                        <a:latin typeface="游ゴシック" panose="020B0604030504040204" pitchFamily="50" charset="-128"/>
-                        <a:ea typeface="游ゴシック" panose="020B0604030504040204" pitchFamily="50" charset="-128"/>
-                      </a:endParaRPr>
                       <a:r>
                         <a:rPr lang="ja-JP" altLang="en-US" sz="1100" b="0" u="none" strike="noStrike" cap="none" dirty="0">
                           <a:solidFill>
@@ -21395,10 +20631,6 @@
                         <a:buFont typeface="游ゴシック"/>
                         <a:buNone/>
                       </a:pPr>
-                      <a:endParaRPr lang="en-US" altLang="ja-JP" sz="1100" u="none" strike="noStrike" cap="none" dirty="0">
-                        <a:latin typeface="游ゴシック" panose="020B0604030504040204" pitchFamily="50" charset="-128"/>
-                        <a:ea typeface="游ゴシック" panose="020B0604030504040204" pitchFamily="50" charset="-128"/>
-                      </a:endParaRPr>
                       <a:r>
                         <a:rPr lang="ja-JP" altLang="en-US" sz="1100" b="0" u="none" strike="noStrike" cap="none" dirty="0">
                           <a:solidFill>
@@ -21469,21 +20701,6 @@
                         <a:tabLst/>
                         <a:defRPr/>
                       </a:pPr>
-                      <a:endParaRPr kumimoji="0" lang="ja-JP" altLang="en-US" sz="1400" b="1" i="0" u="none" strike="noStrike" kern="0" cap="none" spc="0" normalizeH="0" baseline="0" noProof="0" dirty="0">
-                        <a:ln>
-                          <a:noFill/>
-                        </a:ln>
-                        <a:solidFill>
-                          <a:srgbClr val="000000"/>
-                        </a:solidFill>
-                        <a:effectLst/>
-                        <a:uLnTx/>
-                        <a:uFillTx/>
-                        <a:latin typeface="游ゴシック" panose="020B0604030504040204" pitchFamily="50" charset="-128"/>
-                        <a:ea typeface="游ゴシック" panose="020B0604030504040204" pitchFamily="50" charset="-128"/>
-                        <a:cs typeface="+mn-cs"/>
-                        <a:sym typeface="Arial"/>
-                      </a:endParaRPr>
                       <a:r>
                         <a:rPr kumimoji="0" lang="ja-JP" altLang="en-US" sz="1500" b="1" i="0" u="none" strike="noStrike" kern="0" cap="none" spc="0" normalizeH="0" baseline="0" noProof="0">
                           <a:ln>
@@ -21559,10 +20776,6 @@
                       <a:pPr marL="0" marR="0" lvl="0" indent="0" algn="ctr" rtl="0">
                         <a:buNone/>
                       </a:pPr>
-                      <a:endParaRPr lang="ja-JP" altLang="en-US" sz="1600" b="0" u="none" strike="noStrike" cap="none" dirty="0">
-                        <a:latin typeface="游ゴシック" panose="020B0604030504040204" pitchFamily="50" charset="-128"/>
-                        <a:ea typeface="游ゴシック" panose="020B0604030504040204" pitchFamily="50" charset="-128"/>
-                      </a:endParaRPr>
                       <a:r>
                         <a:rPr lang="en-US" altLang="ja-JP" sz="1600" b="0" u="none" strike="noStrike" cap="none" dirty="0">
                           <a:latin typeface="游ゴシック" panose="020B0604030504040204" pitchFamily="50" charset="-128"/>
@@ -21620,10 +20833,6 @@
                       <a:pPr marL="0" marR="0" lvl="0" indent="0" algn="ctr" rtl="0">
                         <a:buNone/>
                       </a:pPr>
-                      <a:endParaRPr lang="ja-JP" altLang="en-US" sz="1400" dirty="0">
-                        <a:latin typeface="游ゴシック" panose="020B0604030504040204" pitchFamily="50" charset="-128"/>
-                        <a:ea typeface="游ゴシック" panose="020B0604030504040204" pitchFamily="50" charset="-128"/>
-                      </a:endParaRPr>
                       <a:r>
                         <a:rPr lang="ja-JP" altLang="en-US" sz="1300" u="none" strike="noStrike" cap="none" dirty="0" b="0">
                           <a:solidFill>
@@ -21692,15 +20901,6 @@
                         <a:buFont typeface="游ゴシック"/>
                         <a:buNone/>
                       </a:pPr>
-                      <a:endParaRPr lang="en-US" altLang="ja-JP" sz="1400" b="1" u="none" strike="noStrike" cap="none" dirty="0">
-                        <a:solidFill>
-                          <a:schemeClr val="dk1"/>
-                        </a:solidFill>
-                        <a:latin typeface="游ゴシック" panose="020B0604030504040204" pitchFamily="50" charset="-128"/>
-                        <a:ea typeface="游ゴシック" panose="020B0604030504040204" pitchFamily="50" charset="-128"/>
-                        <a:cs typeface="游ゴシック"/>
-                        <a:sym typeface="游ゴシック"/>
-                      </a:endParaRPr>
                       <a:r>
                         <a:rPr lang="ja-JP" altLang="en-US" sz="1100" u="none" strike="noStrike" cap="none" dirty="0" b="0">
                           <a:solidFill>
@@ -21726,15 +20926,6 @@
                         <a:buFont typeface="游ゴシック"/>
                         <a:buNone/>
                       </a:pPr>
-                      <a:endParaRPr lang="en-US" altLang="ja-JP" sz="1400" b="1" u="none" strike="noStrike" cap="none" dirty="0">
-                        <a:solidFill>
-                          <a:schemeClr val="dk1"/>
-                        </a:solidFill>
-                        <a:latin typeface="游ゴシック" panose="020B0604030504040204" pitchFamily="50" charset="-128"/>
-                        <a:ea typeface="游ゴシック" panose="020B0604030504040204" pitchFamily="50" charset="-128"/>
-                        <a:cs typeface="游ゴシック"/>
-                        <a:sym typeface="游ゴシック"/>
-                      </a:endParaRPr>
                       <a:r>
                         <a:rPr lang="ja-JP" altLang="en-US" sz="1100" u="none" strike="noStrike" cap="none" dirty="0" b="0">
                           <a:solidFill>
@@ -21807,21 +20998,6 @@
                         <a:tabLst/>
                         <a:defRPr/>
                       </a:pPr>
-                      <a:endParaRPr kumimoji="0" lang="ja-JP" altLang="en-US" sz="1400" b="1" i="0" u="none" strike="noStrike" kern="0" cap="none" spc="0" normalizeH="0" baseline="0" noProof="0" dirty="0">
-                        <a:ln>
-                          <a:noFill/>
-                        </a:ln>
-                        <a:solidFill>
-                          <a:srgbClr val="000000"/>
-                        </a:solidFill>
-                        <a:effectLst/>
-                        <a:uLnTx/>
-                        <a:uFillTx/>
-                        <a:latin typeface="游ゴシック" panose="020B0604030504040204" pitchFamily="50" charset="-128"/>
-                        <a:ea typeface="游ゴシック" panose="020B0604030504040204" pitchFamily="50" charset="-128"/>
-                        <a:cs typeface="+mn-cs"/>
-                        <a:sym typeface="Arial"/>
-                      </a:endParaRPr>
                       <a:r>
                         <a:rPr kumimoji="0" lang="ja-JP" altLang="en-US" sz="1500" b="1" i="0" u="none" strike="noStrike" kern="0" cap="none" spc="0" normalizeH="0" baseline="0" noProof="0">
                           <a:ln>
@@ -21897,10 +21073,6 @@
                       <a:pPr marL="0" marR="0" lvl="0" indent="0" algn="ctr" rtl="0">
                         <a:buNone/>
                       </a:pPr>
-                      <a:endParaRPr lang="ja-JP" altLang="en-US" sz="1600" b="0" u="none" strike="noStrike" cap="none" dirty="0">
-                        <a:latin typeface="游ゴシック" panose="020B0604030504040204" pitchFamily="50" charset="-128"/>
-                        <a:ea typeface="游ゴシック" panose="020B0604030504040204" pitchFamily="50" charset="-128"/>
-                      </a:endParaRPr>
                       <a:r>
                         <a:rPr lang="en-US" altLang="ja-JP" sz="1600" b="0" u="none" strike="noStrike" cap="none" dirty="0">
                           <a:latin typeface="游ゴシック" panose="020B0604030504040204" pitchFamily="50" charset="-128"/>
@@ -21958,13 +21130,6 @@
                       <a:pPr marL="0" marR="0" lvl="0" indent="0" algn="ctr" rtl="0">
                         <a:buNone/>
                       </a:pPr>
-                      <a:endParaRPr lang="en-US" altLang="ja-JP" sz="1600" u="none" strike="noStrike" cap="none" dirty="0">
-                        <a:solidFill>
-                          <a:schemeClr val="dk1"/>
-                        </a:solidFill>
-                        <a:latin typeface="游ゴシック" panose="020B0604030504040204" pitchFamily="50" charset="-128"/>
-                        <a:ea typeface="游ゴシック" panose="020B0604030504040204" pitchFamily="50" charset="-128"/>
-                      </a:endParaRPr>
                       <a:r>
                         <a:rPr lang="ja-JP" altLang="en-US" sz="1300" u="none" strike="noStrike" cap="none" dirty="0" b="0">
                           <a:solidFill>
@@ -22033,10 +21198,6 @@
                         <a:buFont typeface="游ゴシック"/>
                         <a:buNone/>
                       </a:pPr>
-                      <a:endParaRPr lang="en-US" altLang="ja-JP" sz="1400" dirty="0">
-                        <a:latin typeface="游ゴシック" panose="020B0604030504040204" pitchFamily="50" charset="-128"/>
-                        <a:ea typeface="游ゴシック" panose="020B0604030504040204" pitchFamily="50" charset="-128"/>
-                      </a:endParaRPr>
                       <a:r>
                         <a:rPr lang="ja-JP" altLang="en-US" sz="1100" dirty="0" b="0">
                           <a:latin typeface="游ゴシック" panose="020B0604030504040204" pitchFamily="50" charset="-128"/>
@@ -22104,21 +21265,6 @@
                         <a:tabLst/>
                         <a:defRPr/>
                       </a:pPr>
-                      <a:endParaRPr kumimoji="0" lang="ja-JP" altLang="en-US" sz="1400" b="1" i="0" u="none" strike="noStrike" kern="0" cap="none" spc="0" normalizeH="0" baseline="0" noProof="0" dirty="0">
-                        <a:ln>
-                          <a:noFill/>
-                        </a:ln>
-                        <a:solidFill>
-                          <a:srgbClr val="000000"/>
-                        </a:solidFill>
-                        <a:effectLst/>
-                        <a:uLnTx/>
-                        <a:uFillTx/>
-                        <a:latin typeface="游ゴシック" panose="020B0604030504040204" pitchFamily="50" charset="-128"/>
-                        <a:ea typeface="游ゴシック" panose="020B0604030504040204" pitchFamily="50" charset="-128"/>
-                        <a:cs typeface="+mn-cs"/>
-                        <a:sym typeface="Arial"/>
-                      </a:endParaRPr>
                       <a:r>
                         <a:rPr kumimoji="0" lang="ja-JP" altLang="en-US" sz="1500" b="1" i="0" u="none" strike="noStrike" kern="0" cap="none" spc="0" normalizeH="0" baseline="0" noProof="0">
                           <a:ln>
@@ -22194,10 +21340,6 @@
                       <a:pPr marL="0" marR="0" lvl="0" indent="0" algn="ctr" rtl="0">
                         <a:buNone/>
                       </a:pPr>
-                      <a:endParaRPr lang="ja-JP" altLang="en-US" sz="1600" b="0" u="none" strike="noStrike" cap="none" dirty="0">
-                        <a:latin typeface="游ゴシック" panose="020B0604030504040204" pitchFamily="50" charset="-128"/>
-                        <a:ea typeface="游ゴシック" panose="020B0604030504040204" pitchFamily="50" charset="-128"/>
-                      </a:endParaRPr>
                       <a:r>
                         <a:rPr lang="en-US" altLang="ja-JP" sz="1600" b="0" u="none" strike="noStrike" cap="none" dirty="0">
                           <a:latin typeface="游ゴシック" panose="020B0604030504040204" pitchFamily="50" charset="-128"/>
@@ -22323,15 +21465,6 @@
                       <a:pPr marL="0" marR="0" lvl="0" indent="0" algn="l" rtl="0">
                         <a:buNone/>
                       </a:pPr>
-                      <a:endParaRPr lang="en-US" altLang="ja-JP" sz="1400" u="none" strike="noStrike" cap="none" dirty="0">
-                        <a:solidFill>
-                          <a:schemeClr val="dk1"/>
-                        </a:solidFill>
-                        <a:latin typeface="游ゴシック" panose="020B0604030504040204" pitchFamily="50" charset="-128"/>
-                        <a:ea typeface="游ゴシック" panose="020B0604030504040204" pitchFamily="50" charset="-128"/>
-                        <a:cs typeface="游ゴシック"/>
-                        <a:sym typeface="游ゴシック"/>
-                      </a:endParaRPr>
                       <a:r>
                         <a:rPr lang="ja-JP" altLang="en-US" sz="1100" u="none" strike="noStrike" cap="none" dirty="0" b="0">
                           <a:solidFill>
@@ -22349,15 +21482,6 @@
                       <a:pPr marL="0" marR="0" lvl="0" indent="0" algn="l" rtl="0">
                         <a:buNone/>
                       </a:pPr>
-                      <a:endParaRPr lang="en-US" altLang="ja-JP" sz="1400" u="none" strike="noStrike" cap="none" dirty="0">
-                        <a:solidFill>
-                          <a:schemeClr val="dk1"/>
-                        </a:solidFill>
-                        <a:latin typeface="游ゴシック" panose="020B0604030504040204" pitchFamily="50" charset="-128"/>
-                        <a:ea typeface="游ゴシック" panose="020B0604030504040204" pitchFamily="50" charset="-128"/>
-                        <a:cs typeface="游ゴシック"/>
-                        <a:sym typeface="游ゴシック"/>
-                      </a:endParaRPr>
                       <a:r>
                         <a:rPr lang="ja-JP" altLang="en-US" sz="1100" u="none" strike="noStrike" cap="none" dirty="0" b="0">
                           <a:solidFill>
@@ -22430,21 +21554,6 @@
                         <a:tabLst/>
                         <a:defRPr/>
                       </a:pPr>
-                      <a:endParaRPr kumimoji="0" lang="ja-JP" altLang="en-US" sz="1400" b="1" i="0" u="none" strike="noStrike" kern="0" cap="none" spc="0" normalizeH="0" baseline="0" noProof="0" dirty="0">
-                        <a:ln>
-                          <a:noFill/>
-                        </a:ln>
-                        <a:solidFill>
-                          <a:srgbClr val="000000"/>
-                        </a:solidFill>
-                        <a:effectLst/>
-                        <a:uLnTx/>
-                        <a:uFillTx/>
-                        <a:latin typeface="游ゴシック" panose="020B0604030504040204" pitchFamily="50" charset="-128"/>
-                        <a:ea typeface="游ゴシック" panose="020B0604030504040204" pitchFamily="50" charset="-128"/>
-                        <a:cs typeface="+mn-cs"/>
-                        <a:sym typeface="Arial"/>
-                      </a:endParaRPr>
                       <a:r>
                         <a:rPr kumimoji="0" lang="ja-JP" altLang="en-US" sz="1500" b="1" i="0" u="none" strike="noStrike" kern="0" cap="none" spc="0" normalizeH="0" baseline="0" noProof="0">
                           <a:ln>
@@ -22520,10 +21629,6 @@
                       <a:pPr marL="0" marR="0" lvl="0" indent="0" algn="ctr" rtl="0">
                         <a:buNone/>
                       </a:pPr>
-                      <a:endParaRPr lang="ja-JP" altLang="en-US" sz="1600" b="0" dirty="0">
-                        <a:latin typeface="游ゴシック" panose="020B0604030504040204" pitchFamily="50" charset="-128"/>
-                        <a:ea typeface="游ゴシック" panose="020B0604030504040204" pitchFamily="50" charset="-128"/>
-                      </a:endParaRPr>
                       <a:r>
                         <a:rPr lang="en-US" altLang="ja-JP" sz="1600" b="0" dirty="0">
                           <a:latin typeface="游ゴシック" panose="020B0604030504040204" pitchFamily="50" charset="-128"/>
@@ -22589,13 +21694,6 @@
                         <a:buFont typeface="游ゴシック"/>
                         <a:buNone/>
                       </a:pPr>
-                      <a:endParaRPr lang="en-US" altLang="ja-JP" sz="1600" dirty="0">
-                        <a:solidFill>
-                          <a:schemeClr val="dk1"/>
-                        </a:solidFill>
-                        <a:latin typeface="游ゴシック" panose="020B0604030504040204" pitchFamily="50" charset="-128"/>
-                        <a:ea typeface="游ゴシック" panose="020B0604030504040204" pitchFamily="50" charset="-128"/>
-                      </a:endParaRPr>
                       <a:r>
                         <a:rPr lang="ja-JP" altLang="en-US" sz="1300" dirty="0" b="0">
                           <a:solidFill>
@@ -22664,10 +21762,6 @@
                         <a:buFont typeface="游ゴシック"/>
                         <a:buNone/>
                       </a:pPr>
-                      <a:endParaRPr lang="ja-JP" altLang="en-US" sz="1400" dirty="0">
-                        <a:latin typeface="游ゴシック" panose="020B0604030504040204" pitchFamily="50" charset="-128"/>
-                        <a:ea typeface="游ゴシック" panose="020B0604030504040204" pitchFamily="50" charset="-128"/>
-                      </a:endParaRPr>
                       <a:r>
                         <a:rPr lang="ja-JP" altLang="en-US" sz="1100" dirty="0" b="0">
                           <a:solidFill>
@@ -22740,21 +21834,6 @@
                         <a:tabLst/>
                         <a:defRPr/>
                       </a:pPr>
-                      <a:endParaRPr kumimoji="0" lang="ja-JP" altLang="en-US" sz="1400" b="1" i="0" u="none" strike="noStrike" kern="0" cap="none" spc="0" normalizeH="0" baseline="0" noProof="0" dirty="0">
-                        <a:ln>
-                          <a:noFill/>
-                        </a:ln>
-                        <a:solidFill>
-                          <a:srgbClr val="000000"/>
-                        </a:solidFill>
-                        <a:effectLst/>
-                        <a:uLnTx/>
-                        <a:uFillTx/>
-                        <a:latin typeface="游ゴシック" panose="020B0604030504040204" pitchFamily="50" charset="-128"/>
-                        <a:ea typeface="游ゴシック" panose="020B0604030504040204" pitchFamily="50" charset="-128"/>
-                        <a:cs typeface="+mn-cs"/>
-                        <a:sym typeface="Arial"/>
-                      </a:endParaRPr>
                       <a:r>
                         <a:rPr kumimoji="0" lang="ja-JP" altLang="en-US" sz="1500" b="1" i="0" u="none" strike="noStrike" kern="0" cap="none" spc="0" normalizeH="0" baseline="0" noProof="0" dirty="0">
                           <a:ln>
@@ -22852,7 +21931,6 @@
           </a:bodyPr>
           <a:lstStyle/>
           <a:p>
-            <a:endParaRPr sz="1543" dirty="0"/>
             <a:r>
               <a:rPr lang="en-US" altLang="ja-JP" sz="900" dirty="0">
                 <a:solidFill>
@@ -22863,7 +21941,6 @@
             </a:r>
           </a:p>
           <a:p>
-            <a:endParaRPr sz="1543" dirty="0"/>
             <a:r>
               <a:rPr lang="en-US" altLang="ja-JP" sz="900" dirty="0">
                 <a:solidFill>
@@ -22874,7 +21951,6 @@
             </a:r>
           </a:p>
           <a:p>
-            <a:endParaRPr sz="1543" dirty="0"/>
             <a:r>
               <a:rPr lang="en-US" altLang="ja-JP" sz="900" dirty="0">
                 <a:solidFill>
@@ -22885,7 +21961,6 @@
             </a:r>
           </a:p>
           <a:p>
-            <a:endParaRPr sz="1543" dirty="0"/>
             <a:r>
               <a:rPr lang="en-US" altLang="ja-JP" sz="900" dirty="0">
                 <a:solidFill>
@@ -22997,13 +22072,6 @@
               </a:buClr>
               <a:buSzPts val="1000"/>
             </a:pPr>
-            <a:endParaRPr lang="ja-JP" altLang="en-US" sz="1543">
-              <a:solidFill>
-                <a:schemeClr val="bg1"/>
-              </a:solidFill>
-              <a:latin typeface="游ゴシック" panose="020B0604030504040204" pitchFamily="50" charset="-128"/>
-              <a:ea typeface="游ゴシック" panose="020B0604030504040204" pitchFamily="50" charset="-128"/>
-            </a:endParaRPr>
             <a:r>
               <a:rPr lang="ja-JP" altLang="en-US" sz="1102">
                 <a:solidFill>
@@ -23129,13 +22197,6 @@
                       <a:pPr marL="0" marR="0" lvl="0" indent="0" algn="ctr" rtl="0">
                         <a:buNone/>
                       </a:pPr>
-                      <a:endParaRPr lang="en-US" sz="1400" b="1" u="none" strike="noStrike" cap="none" dirty="0">
-                        <a:solidFill>
-                          <a:schemeClr val="lt1"/>
-                        </a:solidFill>
-                        <a:latin typeface="游ゴシック" panose="020B0604030504040204" pitchFamily="50" charset="-128"/>
-                        <a:ea typeface="游ゴシック" panose="020B0604030504040204" pitchFamily="50" charset="-128"/>
-                      </a:endParaRPr>
                       <a:r>
                         <a:rPr lang="en-US" altLang="ja-JP" sz="1400" b="1" u="none" strike="noStrike" cap="none" dirty="0">
                           <a:solidFill>
@@ -23200,10 +22261,6 @@
                       <a:pPr marL="0" marR="0" lvl="0" indent="0" algn="ctr" rtl="0">
                         <a:buNone/>
                       </a:pPr>
-                      <a:endParaRPr lang="ja-JP" altLang="en-US" sz="1400" b="1" dirty="0">
-                        <a:latin typeface="游ゴシック" panose="020B0604030504040204" pitchFamily="50" charset="-128"/>
-                        <a:ea typeface="游ゴシック" panose="020B0604030504040204" pitchFamily="50" charset="-128"/>
-                      </a:endParaRPr>
                       <a:r>
                         <a:rPr lang="ja-JP" altLang="en-US" sz="1400" b="1" u="none" strike="noStrike" cap="none" dirty="0">
                           <a:solidFill>
@@ -23266,10 +22323,6 @@
                       <a:pPr marL="0" marR="0" lvl="0" indent="0" algn="ctr" rtl="0">
                         <a:buNone/>
                       </a:pPr>
-                      <a:endParaRPr lang="ja-JP" altLang="en-US" sz="1400" b="1" dirty="0">
-                        <a:latin typeface="游ゴシック" panose="020B0604030504040204" pitchFamily="50" charset="-128"/>
-                        <a:ea typeface="游ゴシック" panose="020B0604030504040204" pitchFamily="50" charset="-128"/>
-                      </a:endParaRPr>
                       <a:r>
                         <a:rPr lang="ja-JP" altLang="en-US" sz="1400" b="1" u="none" strike="noStrike" cap="none" dirty="0">
                           <a:solidFill>
@@ -23332,10 +22385,6 @@
                       <a:pPr marL="0" marR="0" lvl="0" indent="0" algn="ctr" rtl="0">
                         <a:buNone/>
                       </a:pPr>
-                      <a:endParaRPr lang="ja-JP" altLang="en-US" sz="1400" b="1" dirty="0">
-                        <a:latin typeface="游ゴシック" panose="020B0604030504040204" pitchFamily="50" charset="-128"/>
-                        <a:ea typeface="游ゴシック" panose="020B0604030504040204" pitchFamily="50" charset="-128"/>
-                      </a:endParaRPr>
                       <a:r>
                         <a:rPr lang="ja-JP" altLang="en-US" sz="1400" b="1" u="none" strike="noStrike" cap="none" dirty="0">
                           <a:solidFill>
@@ -23407,10 +22456,6 @@
                       <a:pPr marL="0" marR="0" lvl="0" indent="0" algn="ctr" rtl="0">
                         <a:buNone/>
                       </a:pPr>
-                      <a:endParaRPr lang="ja-JP" altLang="en-US" sz="1600" b="0" u="none" strike="noStrike" cap="none" dirty="0">
-                        <a:latin typeface="游ゴシック" panose="020B0604030504040204" pitchFamily="50" charset="-128"/>
-                        <a:ea typeface="游ゴシック" panose="020B0604030504040204" pitchFamily="50" charset="-128"/>
-                      </a:endParaRPr>
                       <a:r>
                         <a:rPr lang="en-US" altLang="ja-JP" sz="1600" b="0" u="none" strike="noStrike" cap="none" dirty="0">
                           <a:latin typeface="游ゴシック" panose="020B0604030504040204" pitchFamily="50" charset="-128"/>
@@ -23472,10 +22517,6 @@
                       <a:pPr marL="0" marR="0" lvl="0" indent="0" algn="ctr" rtl="0">
                         <a:buNone/>
                       </a:pPr>
-                      <a:endParaRPr lang="ja-JP" altLang="en-US" sz="1400" dirty="0">
-                        <a:latin typeface="游ゴシック" panose="020B0604030504040204" pitchFamily="50" charset="-128"/>
-                        <a:ea typeface="游ゴシック" panose="020B0604030504040204" pitchFamily="50" charset="-128"/>
-                      </a:endParaRPr>
                       <a:r>
                         <a:rPr lang="ja-JP" altLang="en-US" sz="1300" u="none" strike="noStrike" cap="none" dirty="0" b="0">
                           <a:solidFill>
@@ -23637,10 +22678,6 @@
                         <a:buFont typeface="游ゴシック"/>
                         <a:buNone/>
                       </a:pPr>
-                      <a:endParaRPr lang="ja-JP" altLang="en-US" sz="1400" b="0" dirty="0">
-                        <a:latin typeface="游ゴシック" panose="020B0604030504040204" pitchFamily="50" charset="-128"/>
-                        <a:ea typeface="游ゴシック" panose="020B0604030504040204" pitchFamily="50" charset="-128"/>
-                      </a:endParaRPr>
                       <a:r>
                         <a:rPr lang="ja-JP" altLang="en-US" sz="1500" b="1" i="0" u="none" strike="noStrike" cap="none" dirty="0">
                           <a:solidFill>
@@ -23714,10 +22751,6 @@
                       <a:pPr marL="0" marR="0" lvl="0" indent="0" algn="ctr" rtl="0">
                         <a:buNone/>
                       </a:pPr>
-                      <a:endParaRPr lang="ja-JP" altLang="en-US" sz="1600" b="0" u="none" strike="noStrike" cap="none" dirty="0">
-                        <a:latin typeface="游ゴシック" panose="020B0604030504040204" pitchFamily="50" charset="-128"/>
-                        <a:ea typeface="游ゴシック" panose="020B0604030504040204" pitchFamily="50" charset="-128"/>
-                      </a:endParaRPr>
                       <a:r>
                         <a:rPr lang="en-US" altLang="ja-JP" sz="1600" b="0" u="none" strike="noStrike" cap="none" dirty="0">
                           <a:latin typeface="游ゴシック" panose="020B0604030504040204" pitchFamily="50" charset="-128"/>
@@ -23779,10 +22812,6 @@
                       <a:pPr marL="0" marR="0" lvl="0" indent="0" algn="ctr" rtl="0">
                         <a:buNone/>
                       </a:pPr>
-                      <a:endParaRPr lang="ja-JP" altLang="en-US" sz="1400">
-                        <a:latin typeface="游ゴシック" panose="020B0604030504040204" pitchFamily="50" charset="-128"/>
-                        <a:ea typeface="游ゴシック" panose="020B0604030504040204" pitchFamily="50" charset="-128"/>
-                      </a:endParaRPr>
                       <a:r>
                         <a:rPr lang="ja-JP" altLang="en-US" sz="1300" u="none" strike="noStrike" cap="none" b="0">
                           <a:solidFill>
@@ -23852,10 +22881,6 @@
                         <a:buFont typeface="游ゴシック"/>
                         <a:buNone/>
                       </a:pPr>
-                      <a:endParaRPr lang="ja-JP" altLang="en-US" sz="1400" dirty="0">
-                        <a:latin typeface="游ゴシック" panose="020B0604030504040204" pitchFamily="50" charset="-128"/>
-                        <a:ea typeface="游ゴシック" panose="020B0604030504040204" pitchFamily="50" charset="-128"/>
-                      </a:endParaRPr>
                       <a:r>
                         <a:rPr lang="en-US" altLang="ja-JP" sz="1050" u="none" strike="noStrike" cap="none" dirty="0" b="0">
                           <a:solidFill>
@@ -23876,10 +22901,6 @@
                         <a:buFont typeface="游ゴシック"/>
                         <a:buNone/>
                       </a:pPr>
-                      <a:endParaRPr lang="ja-JP" altLang="en-US" sz="1400" dirty="0">
-                        <a:latin typeface="游ゴシック" panose="020B0604030504040204" pitchFamily="50" charset="-128"/>
-                        <a:ea typeface="游ゴシック" panose="020B0604030504040204" pitchFamily="50" charset="-128"/>
-                      </a:endParaRPr>
                       <a:r>
                         <a:rPr lang="en-US" altLang="ja-JP" sz="1050" u="none" strike="noStrike" cap="none" dirty="0" b="0">
                           <a:solidFill>
@@ -24025,10 +23046,6 @@
                       <a:pPr marL="0" marR="0" lvl="0" indent="0" algn="ctr" rtl="0">
                         <a:buNone/>
                       </a:pPr>
-                      <a:endParaRPr lang="ja-JP" altLang="en-US" sz="1600" b="0" u="none" strike="noStrike" cap="none" dirty="0">
-                        <a:latin typeface="游ゴシック" panose="020B0604030504040204" pitchFamily="50" charset="-128"/>
-                        <a:ea typeface="游ゴシック" panose="020B0604030504040204" pitchFamily="50" charset="-128"/>
-                      </a:endParaRPr>
                       <a:r>
                         <a:rPr lang="en-US" altLang="ja-JP" sz="1600" b="0" u="none" strike="noStrike" cap="none" dirty="0">
                           <a:latin typeface="游ゴシック" panose="020B0604030504040204" pitchFamily="50" charset="-128"/>
@@ -24151,10 +23168,6 @@
                         <a:buFont typeface="游ゴシック"/>
                         <a:buNone/>
                       </a:pPr>
-                      <a:endParaRPr lang="en-US" altLang="ja-JP" sz="1100" u="none" strike="noStrike" cap="none" dirty="0">
-                        <a:latin typeface="游ゴシック" panose="020B0604030504040204" pitchFamily="50" charset="-128"/>
-                        <a:ea typeface="游ゴシック" panose="020B0604030504040204" pitchFamily="50" charset="-128"/>
-                      </a:endParaRPr>
                       <a:r>
                         <a:rPr lang="ja-JP" altLang="en-US" sz="1050" b="0" u="none" strike="noStrike" cap="none" dirty="0">
                           <a:solidFill>
@@ -24175,10 +23188,6 @@
                         <a:buFont typeface="游ゴシック"/>
                         <a:buNone/>
                       </a:pPr>
-                      <a:endParaRPr lang="en-US" altLang="ja-JP" sz="1100" u="none" strike="noStrike" cap="none" dirty="0">
-                        <a:latin typeface="游ゴシック" panose="020B0604030504040204" pitchFamily="50" charset="-128"/>
-                        <a:ea typeface="游ゴシック" panose="020B0604030504040204" pitchFamily="50" charset="-128"/>
-                      </a:endParaRPr>
                       <a:r>
                         <a:rPr lang="ja-JP" altLang="en-US" sz="1050" b="0" u="none" strike="noStrike" cap="none" dirty="0">
                           <a:solidFill>
@@ -24249,21 +23258,6 @@
                         <a:tabLst/>
                         <a:defRPr/>
                       </a:pPr>
-                      <a:endParaRPr kumimoji="0" lang="ja-JP" altLang="en-US" sz="1400" b="1" i="0" u="none" strike="noStrike" kern="0" cap="none" spc="0" normalizeH="0" baseline="0" noProof="0" dirty="0">
-                        <a:ln>
-                          <a:noFill/>
-                        </a:ln>
-                        <a:solidFill>
-                          <a:srgbClr val="000000"/>
-                        </a:solidFill>
-                        <a:effectLst/>
-                        <a:uLnTx/>
-                        <a:uFillTx/>
-                        <a:latin typeface="游ゴシック" panose="020B0604030504040204" pitchFamily="50" charset="-128"/>
-                        <a:ea typeface="游ゴシック" panose="020B0604030504040204" pitchFamily="50" charset="-128"/>
-                        <a:cs typeface="+mn-cs"/>
-                        <a:sym typeface="Arial"/>
-                      </a:endParaRPr>
                       <a:r>
                         <a:rPr kumimoji="0" lang="ja-JP" altLang="en-US" sz="1500" b="1" i="0" u="none" strike="noStrike" kern="0" cap="none" spc="0" normalizeH="0" baseline="0" noProof="0">
                           <a:ln>
@@ -24339,10 +23333,6 @@
                       <a:pPr marL="0" marR="0" lvl="0" indent="0" algn="ctr" rtl="0">
                         <a:buNone/>
                       </a:pPr>
-                      <a:endParaRPr lang="ja-JP" altLang="en-US" sz="1600" b="0" u="none" strike="noStrike" cap="none" dirty="0">
-                        <a:latin typeface="游ゴシック" panose="020B0604030504040204" pitchFamily="50" charset="-128"/>
-                        <a:ea typeface="游ゴシック" panose="020B0604030504040204" pitchFamily="50" charset="-128"/>
-                      </a:endParaRPr>
                       <a:r>
                         <a:rPr lang="en-US" altLang="ja-JP" sz="1600" b="0" u="none" strike="noStrike" cap="none" dirty="0">
                           <a:latin typeface="游ゴシック" panose="020B0604030504040204" pitchFamily="50" charset="-128"/>
@@ -24400,10 +23390,6 @@
                       <a:pPr marL="0" marR="0" lvl="0" indent="0" algn="ctr" rtl="0">
                         <a:buNone/>
                       </a:pPr>
-                      <a:endParaRPr lang="ja-JP" altLang="en-US" sz="1400" dirty="0">
-                        <a:latin typeface="游ゴシック" panose="020B0604030504040204" pitchFamily="50" charset="-128"/>
-                        <a:ea typeface="游ゴシック" panose="020B0604030504040204" pitchFamily="50" charset="-128"/>
-                      </a:endParaRPr>
                       <a:r>
                         <a:rPr lang="ja-JP" altLang="en-US" sz="1300" u="none" strike="noStrike" cap="none" dirty="0" b="0">
                           <a:solidFill>
@@ -24472,15 +23458,6 @@
                         <a:buFont typeface="游ゴシック"/>
                         <a:buNone/>
                       </a:pPr>
-                      <a:endParaRPr lang="en-US" altLang="ja-JP" sz="1400" b="1" u="none" strike="noStrike" cap="none" dirty="0">
-                        <a:solidFill>
-                          <a:schemeClr val="dk1"/>
-                        </a:solidFill>
-                        <a:latin typeface="游ゴシック" panose="020B0604030504040204" pitchFamily="50" charset="-128"/>
-                        <a:ea typeface="游ゴシック" panose="020B0604030504040204" pitchFamily="50" charset="-128"/>
-                        <a:cs typeface="游ゴシック"/>
-                        <a:sym typeface="游ゴシック"/>
-                      </a:endParaRPr>
                       <a:r>
                         <a:rPr lang="ja-JP" altLang="en-US" sz="1050" u="none" strike="noStrike" cap="none" dirty="0" b="0">
                           <a:solidFill>
@@ -24506,15 +23483,6 @@
                         <a:buFont typeface="游ゴシック"/>
                         <a:buNone/>
                       </a:pPr>
-                      <a:endParaRPr lang="en-US" altLang="ja-JP" sz="1400" b="1" u="none" strike="noStrike" cap="none" dirty="0">
-                        <a:solidFill>
-                          <a:schemeClr val="dk1"/>
-                        </a:solidFill>
-                        <a:latin typeface="游ゴシック" panose="020B0604030504040204" pitchFamily="50" charset="-128"/>
-                        <a:ea typeface="游ゴシック" panose="020B0604030504040204" pitchFamily="50" charset="-128"/>
-                        <a:cs typeface="游ゴシック"/>
-                        <a:sym typeface="游ゴシック"/>
-                      </a:endParaRPr>
                       <a:r>
                         <a:rPr lang="ja-JP" altLang="en-US" sz="1050" u="none" strike="noStrike" cap="none" dirty="0" b="0">
                           <a:solidFill>
@@ -24587,21 +23555,6 @@
                         <a:tabLst/>
                         <a:defRPr/>
                       </a:pPr>
-                      <a:endParaRPr kumimoji="0" lang="ja-JP" altLang="en-US" sz="1400" b="1" i="0" u="none" strike="noStrike" kern="0" cap="none" spc="0" normalizeH="0" baseline="0" noProof="0" dirty="0">
-                        <a:ln>
-                          <a:noFill/>
-                        </a:ln>
-                        <a:solidFill>
-                          <a:srgbClr val="000000"/>
-                        </a:solidFill>
-                        <a:effectLst/>
-                        <a:uLnTx/>
-                        <a:uFillTx/>
-                        <a:latin typeface="游ゴシック" panose="020B0604030504040204" pitchFamily="50" charset="-128"/>
-                        <a:ea typeface="游ゴシック" panose="020B0604030504040204" pitchFamily="50" charset="-128"/>
-                        <a:cs typeface="+mn-cs"/>
-                        <a:sym typeface="Arial"/>
-                      </a:endParaRPr>
                       <a:r>
                         <a:rPr kumimoji="0" lang="ja-JP" altLang="en-US" sz="1500" b="1" i="0" u="none" strike="noStrike" kern="0" cap="none" spc="0" normalizeH="0" baseline="0" noProof="0">
                           <a:ln>
@@ -24677,10 +23630,6 @@
                       <a:pPr marL="0" marR="0" lvl="0" indent="0" algn="ctr" rtl="0">
                         <a:buNone/>
                       </a:pPr>
-                      <a:endParaRPr lang="ja-JP" altLang="en-US" sz="1600" b="0" u="none" strike="noStrike" cap="none" dirty="0">
-                        <a:latin typeface="游ゴシック" panose="020B0604030504040204" pitchFamily="50" charset="-128"/>
-                        <a:ea typeface="游ゴシック" panose="020B0604030504040204" pitchFamily="50" charset="-128"/>
-                      </a:endParaRPr>
                       <a:r>
                         <a:rPr lang="en-US" altLang="ja-JP" sz="1600" b="0" u="none" strike="noStrike" cap="none" dirty="0">
                           <a:latin typeface="游ゴシック" panose="020B0604030504040204" pitchFamily="50" charset="-128"/>
@@ -24738,13 +23687,6 @@
                       <a:pPr marL="0" marR="0" lvl="0" indent="0" algn="ctr" rtl="0">
                         <a:buNone/>
                       </a:pPr>
-                      <a:endParaRPr lang="en-US" altLang="ja-JP" sz="1600" u="none" strike="noStrike" cap="none" dirty="0">
-                        <a:solidFill>
-                          <a:schemeClr val="dk1"/>
-                        </a:solidFill>
-                        <a:latin typeface="游ゴシック" panose="020B0604030504040204" pitchFamily="50" charset="-128"/>
-                        <a:ea typeface="游ゴシック" panose="020B0604030504040204" pitchFamily="50" charset="-128"/>
-                      </a:endParaRPr>
                       <a:r>
                         <a:rPr lang="ja-JP" altLang="en-US" sz="1300" u="none" strike="noStrike" cap="none" dirty="0" b="0">
                           <a:solidFill>
@@ -24813,10 +23755,6 @@
                         <a:buFont typeface="游ゴシック"/>
                         <a:buNone/>
                       </a:pPr>
-                      <a:endParaRPr lang="en-US" altLang="ja-JP" sz="1400" dirty="0">
-                        <a:latin typeface="游ゴシック" panose="020B0604030504040204" pitchFamily="50" charset="-128"/>
-                        <a:ea typeface="游ゴシック" panose="020B0604030504040204" pitchFamily="50" charset="-128"/>
-                      </a:endParaRPr>
                       <a:r>
                         <a:rPr lang="ja-JP" altLang="en-US" sz="1050" dirty="0" b="0">
                           <a:latin typeface="游ゴシック" panose="020B0604030504040204" pitchFamily="50" charset="-128"/>
@@ -24884,21 +23822,6 @@
                         <a:tabLst/>
                         <a:defRPr/>
                       </a:pPr>
-                      <a:endParaRPr kumimoji="0" lang="ja-JP" altLang="en-US" sz="1400" b="1" i="0" u="none" strike="noStrike" kern="0" cap="none" spc="0" normalizeH="0" baseline="0" noProof="0" dirty="0">
-                        <a:ln>
-                          <a:noFill/>
-                        </a:ln>
-                        <a:solidFill>
-                          <a:srgbClr val="000000"/>
-                        </a:solidFill>
-                        <a:effectLst/>
-                        <a:uLnTx/>
-                        <a:uFillTx/>
-                        <a:latin typeface="游ゴシック" panose="020B0604030504040204" pitchFamily="50" charset="-128"/>
-                        <a:ea typeface="游ゴシック" panose="020B0604030504040204" pitchFamily="50" charset="-128"/>
-                        <a:cs typeface="+mn-cs"/>
-                        <a:sym typeface="Arial"/>
-                      </a:endParaRPr>
                       <a:r>
                         <a:rPr kumimoji="0" lang="ja-JP" altLang="en-US" sz="1500" b="1" i="0" u="none" strike="noStrike" kern="0" cap="none" spc="0" normalizeH="0" baseline="0" noProof="0">
                           <a:ln>
@@ -24974,10 +23897,6 @@
                       <a:pPr marL="0" marR="0" lvl="0" indent="0" algn="ctr" rtl="0">
                         <a:buNone/>
                       </a:pPr>
-                      <a:endParaRPr lang="ja-JP" altLang="en-US" sz="1600" b="0" u="none" strike="noStrike" cap="none" dirty="0">
-                        <a:latin typeface="游ゴシック" panose="020B0604030504040204" pitchFamily="50" charset="-128"/>
-                        <a:ea typeface="游ゴシック" panose="020B0604030504040204" pitchFamily="50" charset="-128"/>
-                      </a:endParaRPr>
                       <a:r>
                         <a:rPr lang="en-US" altLang="ja-JP" sz="1600" b="0" u="none" strike="noStrike" cap="none" dirty="0">
                           <a:latin typeface="游ゴシック" panose="020B0604030504040204" pitchFamily="50" charset="-128"/>
@@ -25103,15 +24022,6 @@
                       <a:pPr marL="0" marR="0" lvl="0" indent="0" algn="l" rtl="0">
                         <a:buNone/>
                       </a:pPr>
-                      <a:endParaRPr lang="en-US" altLang="ja-JP" sz="1400" u="none" strike="noStrike" cap="none" dirty="0">
-                        <a:solidFill>
-                          <a:schemeClr val="dk1"/>
-                        </a:solidFill>
-                        <a:latin typeface="游ゴシック" panose="020B0604030504040204" pitchFamily="50" charset="-128"/>
-                        <a:ea typeface="游ゴシック" panose="020B0604030504040204" pitchFamily="50" charset="-128"/>
-                        <a:cs typeface="游ゴシック"/>
-                        <a:sym typeface="游ゴシック"/>
-                      </a:endParaRPr>
                       <a:r>
                         <a:rPr lang="ja-JP" altLang="en-US" sz="1050" u="none" strike="noStrike" cap="none" dirty="0" b="0">
                           <a:solidFill>
@@ -25184,21 +24094,6 @@
                         <a:tabLst/>
                         <a:defRPr/>
                       </a:pPr>
-                      <a:endParaRPr kumimoji="0" lang="ja-JP" altLang="en-US" sz="1400" b="1" i="0" u="none" strike="noStrike" kern="0" cap="none" spc="0" normalizeH="0" baseline="0" noProof="0" dirty="0">
-                        <a:ln>
-                          <a:noFill/>
-                        </a:ln>
-                        <a:solidFill>
-                          <a:srgbClr val="000000"/>
-                        </a:solidFill>
-                        <a:effectLst/>
-                        <a:uLnTx/>
-                        <a:uFillTx/>
-                        <a:latin typeface="游ゴシック" panose="020B0604030504040204" pitchFamily="50" charset="-128"/>
-                        <a:ea typeface="游ゴシック" panose="020B0604030504040204" pitchFamily="50" charset="-128"/>
-                        <a:cs typeface="+mn-cs"/>
-                        <a:sym typeface="Arial"/>
-                      </a:endParaRPr>
                       <a:r>
                         <a:rPr kumimoji="0" lang="ja-JP" altLang="en-US" sz="1500" b="1" i="0" u="none" strike="noStrike" kern="0" cap="none" spc="0" normalizeH="0" baseline="0" noProof="0">
                           <a:ln>
@@ -25274,10 +24169,6 @@
                       <a:pPr marL="0" marR="0" lvl="0" indent="0" algn="ctr" rtl="0">
                         <a:buNone/>
                       </a:pPr>
-                      <a:endParaRPr lang="ja-JP" altLang="en-US" sz="1600" b="0" dirty="0">
-                        <a:latin typeface="游ゴシック" panose="020B0604030504040204" pitchFamily="50" charset="-128"/>
-                        <a:ea typeface="游ゴシック" panose="020B0604030504040204" pitchFamily="50" charset="-128"/>
-                      </a:endParaRPr>
                       <a:r>
                         <a:rPr lang="en-US" altLang="ja-JP" sz="1600" b="0" dirty="0">
                           <a:latin typeface="游ゴシック" panose="020B0604030504040204" pitchFamily="50" charset="-128"/>
@@ -25343,13 +24234,6 @@
                         <a:buFont typeface="游ゴシック"/>
                         <a:buNone/>
                       </a:pPr>
-                      <a:endParaRPr lang="en-US" altLang="ja-JP" sz="1600" dirty="0">
-                        <a:solidFill>
-                          <a:schemeClr val="dk1"/>
-                        </a:solidFill>
-                        <a:latin typeface="游ゴシック" panose="020B0604030504040204" pitchFamily="50" charset="-128"/>
-                        <a:ea typeface="游ゴシック" panose="020B0604030504040204" pitchFamily="50" charset="-128"/>
-                      </a:endParaRPr>
                       <a:r>
                         <a:rPr lang="ja-JP" altLang="en-US" sz="1300" dirty="0" b="0">
                           <a:solidFill>
@@ -25418,10 +24302,6 @@
                         <a:buFont typeface="游ゴシック"/>
                         <a:buNone/>
                       </a:pPr>
-                      <a:endParaRPr lang="ja-JP" altLang="en-US" sz="1400" dirty="0">
-                        <a:latin typeface="游ゴシック" panose="020B0604030504040204" pitchFamily="50" charset="-128"/>
-                        <a:ea typeface="游ゴシック" panose="020B0604030504040204" pitchFamily="50" charset="-128"/>
-                      </a:endParaRPr>
                       <a:r>
                         <a:rPr lang="ja-JP" altLang="en-US" sz="1050" dirty="0" b="0">
                           <a:solidFill>
@@ -25447,10 +24327,6 @@
                         <a:buFont typeface="游ゴシック"/>
                         <a:buNone/>
                       </a:pPr>
-                      <a:endParaRPr lang="ja-JP" altLang="en-US" sz="1400" dirty="0">
-                        <a:latin typeface="游ゴシック" panose="020B0604030504040204" pitchFamily="50" charset="-128"/>
-                        <a:ea typeface="游ゴシック" panose="020B0604030504040204" pitchFamily="50" charset="-128"/>
-                      </a:endParaRPr>
                       <a:r>
                         <a:rPr lang="ja-JP" altLang="en-US" sz="1050" dirty="0" b="0">
                           <a:solidFill>
@@ -25523,21 +24399,6 @@
                         <a:tabLst/>
                         <a:defRPr/>
                       </a:pPr>
-                      <a:endParaRPr kumimoji="0" lang="ja-JP" altLang="en-US" sz="1400" b="1" i="0" u="none" strike="noStrike" kern="0" cap="none" spc="0" normalizeH="0" baseline="0" noProof="0" dirty="0">
-                        <a:ln>
-                          <a:noFill/>
-                        </a:ln>
-                        <a:solidFill>
-                          <a:srgbClr val="000000"/>
-                        </a:solidFill>
-                        <a:effectLst/>
-                        <a:uLnTx/>
-                        <a:uFillTx/>
-                        <a:latin typeface="游ゴシック" panose="020B0604030504040204" pitchFamily="50" charset="-128"/>
-                        <a:ea typeface="游ゴシック" panose="020B0604030504040204" pitchFamily="50" charset="-128"/>
-                        <a:cs typeface="+mn-cs"/>
-                        <a:sym typeface="Arial"/>
-                      </a:endParaRPr>
                       <a:r>
                         <a:rPr kumimoji="0" lang="ja-JP" altLang="en-US" sz="1500" b="1" i="0" u="none" strike="noStrike" kern="0" cap="none" spc="0" normalizeH="0" baseline="0" noProof="0" dirty="0">
                           <a:ln>
@@ -25613,10 +24474,6 @@
                       <a:pPr marL="0" marR="0" lvl="0" indent="0" algn="ctr" rtl="0">
                         <a:buNone/>
                       </a:pPr>
-                      <a:endParaRPr lang="ja-JP" altLang="en-US" sz="1600" b="0" u="none" strike="noStrike" cap="none" dirty="0">
-                        <a:latin typeface="游ゴシック" panose="020B0604030504040204" pitchFamily="50" charset="-128"/>
-                        <a:ea typeface="游ゴシック" panose="020B0604030504040204" pitchFamily="50" charset="-128"/>
-                      </a:endParaRPr>
                       <a:r>
                         <a:rPr lang="en-US" altLang="ja-JP" sz="1600" b="0" u="none" strike="noStrike" cap="none" dirty="0">
                           <a:latin typeface="游ゴシック" panose="020B0604030504040204" pitchFamily="50" charset="-128"/>
@@ -25678,10 +24535,6 @@
                       <a:pPr marL="0" marR="0" lvl="0" indent="0" algn="ctr" rtl="0">
                         <a:buNone/>
                       </a:pPr>
-                      <a:endParaRPr lang="ja-JP" altLang="en-US" sz="1400">
-                        <a:latin typeface="游ゴシック" panose="020B0604030504040204" pitchFamily="50" charset="-128"/>
-                        <a:ea typeface="游ゴシック" panose="020B0604030504040204" pitchFamily="50" charset="-128"/>
-                      </a:endParaRPr>
                       <a:r>
                         <a:rPr lang="ja-JP" altLang="en-US" sz="1300" u="none" strike="noStrike" cap="none" b="0">
                           <a:solidFill>
@@ -25751,10 +24604,6 @@
                         <a:buFont typeface="游ゴシック"/>
                         <a:buNone/>
                       </a:pPr>
-                      <a:endParaRPr lang="ja-JP" altLang="en-US" sz="1400" dirty="0">
-                        <a:latin typeface="游ゴシック" panose="020B0604030504040204" pitchFamily="50" charset="-128"/>
-                        <a:ea typeface="游ゴシック" panose="020B0604030504040204" pitchFamily="50" charset="-128"/>
-                      </a:endParaRPr>
                       <a:r>
                         <a:rPr lang="en-US" altLang="ja-JP" sz="1050" u="none" strike="noStrike" cap="none" dirty="0" b="0">
                           <a:solidFill>
@@ -25775,10 +24624,6 @@
                         <a:buFont typeface="游ゴシック"/>
                         <a:buNone/>
                       </a:pPr>
-                      <a:endParaRPr lang="ja-JP" altLang="en-US" sz="1400" dirty="0">
-                        <a:latin typeface="游ゴシック" panose="020B0604030504040204" pitchFamily="50" charset="-128"/>
-                        <a:ea typeface="游ゴシック" panose="020B0604030504040204" pitchFamily="50" charset="-128"/>
-                      </a:endParaRPr>
                       <a:r>
                         <a:rPr lang="en-US" altLang="ja-JP" sz="1050" u="none" strike="noStrike" cap="none" dirty="0" b="0">
                           <a:solidFill>
@@ -25946,7 +24791,6 @@
           </a:bodyPr>
           <a:lstStyle/>
           <a:p>
-            <a:endParaRPr sz="1543" dirty="0"/>
             <a:r>
               <a:rPr lang="en-US" altLang="ja-JP" sz="900" dirty="0">
                 <a:solidFill>
@@ -25957,7 +24801,6 @@
             </a:r>
           </a:p>
           <a:p>
-            <a:endParaRPr sz="1543" dirty="0"/>
             <a:r>
               <a:rPr lang="en-US" altLang="ja-JP" sz="900" dirty="0">
                 <a:solidFill>
@@ -25968,7 +24811,6 @@
             </a:r>
           </a:p>
           <a:p>
-            <a:endParaRPr sz="1543" dirty="0"/>
             <a:r>
               <a:rPr lang="en-US" altLang="ja-JP" sz="900" dirty="0">
                 <a:solidFill>
@@ -25979,7 +24821,6 @@
             </a:r>
           </a:p>
           <a:p>
-            <a:endParaRPr sz="1543" dirty="0"/>
             <a:r>
               <a:rPr lang="en-US" altLang="ja-JP" sz="900" dirty="0">
                 <a:solidFill>
@@ -25990,7 +24831,6 @@
             </a:r>
           </a:p>
           <a:p>
-            <a:endParaRPr sz="1543" dirty="0"/>
             <a:r>
               <a:rPr lang="en-US" altLang="ja-JP" sz="900" dirty="0">
                 <a:solidFill>
@@ -26102,13 +24942,6 @@
               </a:buClr>
               <a:buSzPts val="1000"/>
             </a:pPr>
-            <a:endParaRPr lang="ja-JP" altLang="en-US" sz="1543">
-              <a:solidFill>
-                <a:schemeClr val="bg1"/>
-              </a:solidFill>
-              <a:latin typeface="游ゴシック" panose="020B0604030504040204" pitchFamily="50" charset="-128"/>
-              <a:ea typeface="游ゴシック" panose="020B0604030504040204" pitchFamily="50" charset="-128"/>
-            </a:endParaRPr>
             <a:r>
               <a:rPr lang="ja-JP" altLang="en-US" sz="1102">
                 <a:solidFill>
@@ -26234,13 +25067,6 @@
                       <a:pPr marL="0" marR="0" lvl="0" indent="0" algn="ctr" rtl="0">
                         <a:buNone/>
                       </a:pPr>
-                      <a:endParaRPr lang="en-US" sz="1400" b="1" u="none" strike="noStrike" cap="none" dirty="0">
-                        <a:solidFill>
-                          <a:schemeClr val="lt1"/>
-                        </a:solidFill>
-                        <a:latin typeface="游ゴシック" panose="020B0604030504040204" pitchFamily="50" charset="-128"/>
-                        <a:ea typeface="游ゴシック" panose="020B0604030504040204" pitchFamily="50" charset="-128"/>
-                      </a:endParaRPr>
                       <a:r>
                         <a:rPr lang="en-US" altLang="ja-JP" sz="1400" b="1" u="none" strike="noStrike" cap="none" dirty="0">
                           <a:solidFill>
@@ -26305,10 +25131,6 @@
                       <a:pPr marL="0" marR="0" lvl="0" indent="0" algn="ctr" rtl="0">
                         <a:buNone/>
                       </a:pPr>
-                      <a:endParaRPr lang="ja-JP" altLang="en-US" sz="1400" b="1" dirty="0">
-                        <a:latin typeface="游ゴシック" panose="020B0604030504040204" pitchFamily="50" charset="-128"/>
-                        <a:ea typeface="游ゴシック" panose="020B0604030504040204" pitchFamily="50" charset="-128"/>
-                      </a:endParaRPr>
                       <a:r>
                         <a:rPr lang="ja-JP" altLang="en-US" sz="1400" b="1" u="none" strike="noStrike" cap="none" dirty="0">
                           <a:solidFill>
@@ -26371,10 +25193,6 @@
                       <a:pPr marL="0" marR="0" lvl="0" indent="0" algn="ctr" rtl="0">
                         <a:buNone/>
                       </a:pPr>
-                      <a:endParaRPr lang="ja-JP" altLang="en-US" sz="1400" b="1" dirty="0">
-                        <a:latin typeface="游ゴシック" panose="020B0604030504040204" pitchFamily="50" charset="-128"/>
-                        <a:ea typeface="游ゴシック" panose="020B0604030504040204" pitchFamily="50" charset="-128"/>
-                      </a:endParaRPr>
                       <a:r>
                         <a:rPr lang="ja-JP" altLang="en-US" sz="1400" b="1" u="none" strike="noStrike" cap="none" dirty="0">
                           <a:solidFill>
@@ -26437,10 +25255,6 @@
                       <a:pPr marL="0" marR="0" lvl="0" indent="0" algn="ctr" rtl="0">
                         <a:buNone/>
                       </a:pPr>
-                      <a:endParaRPr lang="ja-JP" altLang="en-US" sz="1400" b="1" dirty="0">
-                        <a:latin typeface="游ゴシック" panose="020B0604030504040204" pitchFamily="50" charset="-128"/>
-                        <a:ea typeface="游ゴシック" panose="020B0604030504040204" pitchFamily="50" charset="-128"/>
-                      </a:endParaRPr>
                       <a:r>
                         <a:rPr lang="ja-JP" altLang="en-US" sz="1400" b="1" u="none" strike="noStrike" cap="none" dirty="0">
                           <a:solidFill>
@@ -26512,10 +25326,6 @@
                       <a:pPr marL="0" marR="0" lvl="0" indent="0" algn="ctr" rtl="0">
                         <a:buNone/>
                       </a:pPr>
-                      <a:endParaRPr lang="ja-JP" altLang="en-US" sz="1600" b="0" u="none" strike="noStrike" cap="none" dirty="0">
-                        <a:latin typeface="游ゴシック" panose="020B0604030504040204" pitchFamily="50" charset="-128"/>
-                        <a:ea typeface="游ゴシック" panose="020B0604030504040204" pitchFamily="50" charset="-128"/>
-                      </a:endParaRPr>
                       <a:r>
                         <a:rPr lang="en-US" altLang="ja-JP" sz="1600" b="0" u="none" strike="noStrike" cap="none" dirty="0">
                           <a:latin typeface="游ゴシック" panose="020B0604030504040204" pitchFamily="50" charset="-128"/>
@@ -26577,10 +25387,6 @@
                       <a:pPr marL="0" marR="0" lvl="0" indent="0" algn="ctr" rtl="0">
                         <a:buNone/>
                       </a:pPr>
-                      <a:endParaRPr lang="ja-JP" altLang="en-US" sz="1400" dirty="0">
-                        <a:latin typeface="游ゴシック" panose="020B0604030504040204" pitchFamily="50" charset="-128"/>
-                        <a:ea typeface="游ゴシック" panose="020B0604030504040204" pitchFamily="50" charset="-128"/>
-                      </a:endParaRPr>
                       <a:r>
                         <a:rPr lang="ja-JP" altLang="en-US" sz="1300" u="none" strike="noStrike" cap="none" dirty="0" b="0">
                           <a:solidFill>
@@ -26596,10 +25402,6 @@
                       <a:pPr marL="0" marR="0" lvl="0" indent="0" algn="ctr" rtl="0">
                         <a:buNone/>
                       </a:pPr>
-                      <a:endParaRPr lang="ja-JP" altLang="en-US" sz="1400" dirty="0">
-                        <a:latin typeface="游ゴシック" panose="020B0604030504040204" pitchFamily="50" charset="-128"/>
-                        <a:ea typeface="游ゴシック" panose="020B0604030504040204" pitchFamily="50" charset="-128"/>
-                      </a:endParaRPr>
                       <a:r>
                         <a:rPr lang="ja-JP" altLang="en-US" sz="1300" u="none" strike="noStrike" cap="none" dirty="0" b="0">
                           <a:solidFill>
@@ -26761,10 +25563,6 @@
                         <a:buFont typeface="游ゴシック"/>
                         <a:buNone/>
                       </a:pPr>
-                      <a:endParaRPr lang="ja-JP" altLang="en-US" sz="1400" b="0" dirty="0">
-                        <a:latin typeface="游ゴシック" panose="020B0604030504040204" pitchFamily="50" charset="-128"/>
-                        <a:ea typeface="游ゴシック" panose="020B0604030504040204" pitchFamily="50" charset="-128"/>
-                      </a:endParaRPr>
                       <a:r>
                         <a:rPr lang="ja-JP" altLang="en-US" sz="1500" b="1" i="0" u="none" strike="noStrike" cap="none" dirty="0">
                           <a:solidFill>
@@ -26838,10 +25636,6 @@
                       <a:pPr marL="0" marR="0" lvl="0" indent="0" algn="ctr" rtl="0">
                         <a:buNone/>
                       </a:pPr>
-                      <a:endParaRPr lang="ja-JP" altLang="en-US" sz="1600" b="0" u="none" strike="noStrike" cap="none" dirty="0">
-                        <a:latin typeface="游ゴシック" panose="020B0604030504040204" pitchFamily="50" charset="-128"/>
-                        <a:ea typeface="游ゴシック" panose="020B0604030504040204" pitchFamily="50" charset="-128"/>
-                      </a:endParaRPr>
                       <a:r>
                         <a:rPr lang="en-US" altLang="ja-JP" sz="1600" b="0" u="none" strike="noStrike" cap="none" dirty="0">
                           <a:latin typeface="游ゴシック" panose="020B0604030504040204" pitchFamily="50" charset="-128"/>
@@ -26903,10 +25697,6 @@
                       <a:pPr marL="0" marR="0" lvl="0" indent="0" algn="ctr" rtl="0">
                         <a:buNone/>
                       </a:pPr>
-                      <a:endParaRPr lang="ja-JP" altLang="en-US" sz="1400">
-                        <a:latin typeface="游ゴシック" panose="020B0604030504040204" pitchFamily="50" charset="-128"/>
-                        <a:ea typeface="游ゴシック" panose="020B0604030504040204" pitchFamily="50" charset="-128"/>
-                      </a:endParaRPr>
                       <a:r>
                         <a:rPr lang="ja-JP" altLang="en-US" sz="1300" u="none" strike="noStrike" cap="none" b="0">
                           <a:solidFill>
@@ -26976,10 +25766,6 @@
                         <a:buFont typeface="游ゴシック"/>
                         <a:buNone/>
                       </a:pPr>
-                      <a:endParaRPr lang="ja-JP" altLang="en-US" sz="1400" dirty="0">
-                        <a:latin typeface="游ゴシック" panose="020B0604030504040204" pitchFamily="50" charset="-128"/>
-                        <a:ea typeface="游ゴシック" panose="020B0604030504040204" pitchFamily="50" charset="-128"/>
-                      </a:endParaRPr>
                       <a:r>
                         <a:rPr lang="en-US" altLang="ja-JP" sz="1050" u="none" strike="noStrike" cap="none" dirty="0" b="0">
                           <a:solidFill>
@@ -27000,10 +25786,6 @@
                         <a:buFont typeface="游ゴシック"/>
                         <a:buNone/>
                       </a:pPr>
-                      <a:endParaRPr lang="ja-JP" altLang="en-US" sz="1400" dirty="0">
-                        <a:latin typeface="游ゴシック" panose="020B0604030504040204" pitchFamily="50" charset="-128"/>
-                        <a:ea typeface="游ゴシック" panose="020B0604030504040204" pitchFamily="50" charset="-128"/>
-                      </a:endParaRPr>
                       <a:r>
                         <a:rPr lang="en-US" altLang="ja-JP" sz="1050" u="none" strike="noStrike" cap="none" dirty="0" b="0">
                           <a:solidFill>
@@ -27149,10 +25931,6 @@
                       <a:pPr marL="0" marR="0" lvl="0" indent="0" algn="ctr" rtl="0">
                         <a:buNone/>
                       </a:pPr>
-                      <a:endParaRPr lang="ja-JP" altLang="en-US" sz="1600" b="0" u="none" strike="noStrike" cap="none" dirty="0">
-                        <a:latin typeface="游ゴシック" panose="020B0604030504040204" pitchFamily="50" charset="-128"/>
-                        <a:ea typeface="游ゴシック" panose="020B0604030504040204" pitchFamily="50" charset="-128"/>
-                      </a:endParaRPr>
                       <a:r>
                         <a:rPr lang="en-US" altLang="ja-JP" sz="1600" b="0" u="none" strike="noStrike" cap="none" dirty="0">
                           <a:latin typeface="游ゴシック" panose="020B0604030504040204" pitchFamily="50" charset="-128"/>
@@ -27275,10 +26053,6 @@
                         <a:buFont typeface="游ゴシック"/>
                         <a:buNone/>
                       </a:pPr>
-                      <a:endParaRPr lang="en-US" altLang="ja-JP" sz="1100" u="none" strike="noStrike" cap="none" dirty="0">
-                        <a:latin typeface="游ゴシック" panose="020B0604030504040204" pitchFamily="50" charset="-128"/>
-                        <a:ea typeface="游ゴシック" panose="020B0604030504040204" pitchFamily="50" charset="-128"/>
-                      </a:endParaRPr>
                       <a:r>
                         <a:rPr lang="ja-JP" altLang="en-US" sz="1050" b="0" u="none" strike="noStrike" cap="none" dirty="0">
                           <a:solidFill>
@@ -27299,10 +26073,6 @@
                         <a:buFont typeface="游ゴシック"/>
                         <a:buNone/>
                       </a:pPr>
-                      <a:endParaRPr lang="en-US" altLang="ja-JP" sz="1100" u="none" strike="noStrike" cap="none" dirty="0">
-                        <a:latin typeface="游ゴシック" panose="020B0604030504040204" pitchFamily="50" charset="-128"/>
-                        <a:ea typeface="游ゴシック" panose="020B0604030504040204" pitchFamily="50" charset="-128"/>
-                      </a:endParaRPr>
                       <a:r>
                         <a:rPr lang="ja-JP" altLang="en-US" sz="1050" b="0" u="none" strike="noStrike" cap="none" dirty="0">
                           <a:solidFill>
@@ -27373,21 +26143,6 @@
                         <a:tabLst/>
                         <a:defRPr/>
                       </a:pPr>
-                      <a:endParaRPr kumimoji="0" lang="ja-JP" altLang="en-US" sz="1400" b="1" i="0" u="none" strike="noStrike" kern="0" cap="none" spc="0" normalizeH="0" baseline="0" noProof="0" dirty="0">
-                        <a:ln>
-                          <a:noFill/>
-                        </a:ln>
-                        <a:solidFill>
-                          <a:srgbClr val="000000"/>
-                        </a:solidFill>
-                        <a:effectLst/>
-                        <a:uLnTx/>
-                        <a:uFillTx/>
-                        <a:latin typeface="游ゴシック" panose="020B0604030504040204" pitchFamily="50" charset="-128"/>
-                        <a:ea typeface="游ゴシック" panose="020B0604030504040204" pitchFamily="50" charset="-128"/>
-                        <a:cs typeface="+mn-cs"/>
-                        <a:sym typeface="Arial"/>
-                      </a:endParaRPr>
                       <a:r>
                         <a:rPr kumimoji="0" lang="ja-JP" altLang="en-US" sz="1500" b="1" i="0" u="none" strike="noStrike" kern="0" cap="none" spc="0" normalizeH="0" baseline="0" noProof="0">
                           <a:ln>
@@ -27463,10 +26218,6 @@
                       <a:pPr marL="0" marR="0" lvl="0" indent="0" algn="ctr" rtl="0">
                         <a:buNone/>
                       </a:pPr>
-                      <a:endParaRPr lang="ja-JP" altLang="en-US" sz="1600" b="0" u="none" strike="noStrike" cap="none" dirty="0">
-                        <a:latin typeface="游ゴシック" panose="020B0604030504040204" pitchFamily="50" charset="-128"/>
-                        <a:ea typeface="游ゴシック" panose="020B0604030504040204" pitchFamily="50" charset="-128"/>
-                      </a:endParaRPr>
                       <a:r>
                         <a:rPr lang="en-US" altLang="ja-JP" sz="1600" b="0" u="none" strike="noStrike" cap="none" dirty="0">
                           <a:latin typeface="游ゴシック" panose="020B0604030504040204" pitchFamily="50" charset="-128"/>
@@ -27524,10 +26275,6 @@
                       <a:pPr marL="0" marR="0" lvl="0" indent="0" algn="ctr" rtl="0">
                         <a:buNone/>
                       </a:pPr>
-                      <a:endParaRPr lang="ja-JP" altLang="en-US" sz="1400" dirty="0">
-                        <a:latin typeface="游ゴシック" panose="020B0604030504040204" pitchFamily="50" charset="-128"/>
-                        <a:ea typeface="游ゴシック" panose="020B0604030504040204" pitchFamily="50" charset="-128"/>
-                      </a:endParaRPr>
                       <a:r>
                         <a:rPr lang="ja-JP" altLang="en-US" sz="1300" u="none" strike="noStrike" cap="none" dirty="0" b="0">
                           <a:solidFill>
@@ -27596,15 +26343,6 @@
                         <a:buFont typeface="游ゴシック"/>
                         <a:buNone/>
                       </a:pPr>
-                      <a:endParaRPr lang="en-US" altLang="ja-JP" sz="1400" b="1" u="none" strike="noStrike" cap="none" dirty="0">
-                        <a:solidFill>
-                          <a:schemeClr val="dk1"/>
-                        </a:solidFill>
-                        <a:latin typeface="游ゴシック" panose="020B0604030504040204" pitchFamily="50" charset="-128"/>
-                        <a:ea typeface="游ゴシック" panose="020B0604030504040204" pitchFamily="50" charset="-128"/>
-                        <a:cs typeface="游ゴシック"/>
-                        <a:sym typeface="游ゴシック"/>
-                      </a:endParaRPr>
                       <a:r>
                         <a:rPr lang="ja-JP" altLang="en-US" sz="1050" u="none" strike="noStrike" cap="none" dirty="0" b="0">
                           <a:solidFill>
@@ -27630,15 +26368,6 @@
                         <a:buFont typeface="游ゴシック"/>
                         <a:buNone/>
                       </a:pPr>
-                      <a:endParaRPr lang="en-US" altLang="ja-JP" sz="1400" b="1" u="none" strike="noStrike" cap="none" dirty="0">
-                        <a:solidFill>
-                          <a:schemeClr val="dk1"/>
-                        </a:solidFill>
-                        <a:latin typeface="游ゴシック" panose="020B0604030504040204" pitchFamily="50" charset="-128"/>
-                        <a:ea typeface="游ゴシック" panose="020B0604030504040204" pitchFamily="50" charset="-128"/>
-                        <a:cs typeface="游ゴシック"/>
-                        <a:sym typeface="游ゴシック"/>
-                      </a:endParaRPr>
                       <a:r>
                         <a:rPr lang="ja-JP" altLang="en-US" sz="1050" u="none" strike="noStrike" cap="none" dirty="0" b="0">
                           <a:solidFill>
@@ -27711,21 +26440,6 @@
                         <a:tabLst/>
                         <a:defRPr/>
                       </a:pPr>
-                      <a:endParaRPr kumimoji="0" lang="ja-JP" altLang="en-US" sz="1400" b="1" i="0" u="none" strike="noStrike" kern="0" cap="none" spc="0" normalizeH="0" baseline="0" noProof="0" dirty="0">
-                        <a:ln>
-                          <a:noFill/>
-                        </a:ln>
-                        <a:solidFill>
-                          <a:srgbClr val="000000"/>
-                        </a:solidFill>
-                        <a:effectLst/>
-                        <a:uLnTx/>
-                        <a:uFillTx/>
-                        <a:latin typeface="游ゴシック" panose="020B0604030504040204" pitchFamily="50" charset="-128"/>
-                        <a:ea typeface="游ゴシック" panose="020B0604030504040204" pitchFamily="50" charset="-128"/>
-                        <a:cs typeface="+mn-cs"/>
-                        <a:sym typeface="Arial"/>
-                      </a:endParaRPr>
                       <a:r>
                         <a:rPr kumimoji="0" lang="ja-JP" altLang="en-US" sz="1500" b="1" i="0" u="none" strike="noStrike" kern="0" cap="none" spc="0" normalizeH="0" baseline="0" noProof="0">
                           <a:ln>
@@ -27801,10 +26515,6 @@
                       <a:pPr marL="0" marR="0" lvl="0" indent="0" algn="ctr" rtl="0">
                         <a:buNone/>
                       </a:pPr>
-                      <a:endParaRPr lang="ja-JP" altLang="en-US" sz="1600" b="0" u="none" strike="noStrike" cap="none" dirty="0">
-                        <a:latin typeface="游ゴシック" panose="020B0604030504040204" pitchFamily="50" charset="-128"/>
-                        <a:ea typeface="游ゴシック" panose="020B0604030504040204" pitchFamily="50" charset="-128"/>
-                      </a:endParaRPr>
                       <a:r>
                         <a:rPr lang="en-US" altLang="ja-JP" sz="1600" b="0" u="none" strike="noStrike" cap="none" dirty="0">
                           <a:latin typeface="游ゴシック" panose="020B0604030504040204" pitchFamily="50" charset="-128"/>
@@ -27862,13 +26572,6 @@
                       <a:pPr marL="0" marR="0" lvl="0" indent="0" algn="ctr" rtl="0">
                         <a:buNone/>
                       </a:pPr>
-                      <a:endParaRPr lang="en-US" altLang="ja-JP" sz="1600" u="none" strike="noStrike" cap="none" dirty="0">
-                        <a:solidFill>
-                          <a:schemeClr val="dk1"/>
-                        </a:solidFill>
-                        <a:latin typeface="游ゴシック" panose="020B0604030504040204" pitchFamily="50" charset="-128"/>
-                        <a:ea typeface="游ゴシック" panose="020B0604030504040204" pitchFamily="50" charset="-128"/>
-                      </a:endParaRPr>
                       <a:r>
                         <a:rPr lang="ja-JP" altLang="en-US" sz="1300" u="none" strike="noStrike" cap="none" dirty="0" b="0">
                           <a:solidFill>
@@ -27937,10 +26640,6 @@
                         <a:buFont typeface="游ゴシック"/>
                         <a:buNone/>
                       </a:pPr>
-                      <a:endParaRPr lang="en-US" altLang="ja-JP" sz="1400" dirty="0">
-                        <a:latin typeface="游ゴシック" panose="020B0604030504040204" pitchFamily="50" charset="-128"/>
-                        <a:ea typeface="游ゴシック" panose="020B0604030504040204" pitchFamily="50" charset="-128"/>
-                      </a:endParaRPr>
                       <a:r>
                         <a:rPr lang="ja-JP" altLang="en-US" sz="1050" dirty="0" b="0">
                           <a:latin typeface="游ゴシック" panose="020B0604030504040204" pitchFamily="50" charset="-128"/>
@@ -27961,10 +26660,6 @@
                         <a:buFont typeface="游ゴシック"/>
                         <a:buNone/>
                       </a:pPr>
-                      <a:endParaRPr lang="en-US" altLang="ja-JP" sz="1400" dirty="0">
-                        <a:latin typeface="游ゴシック" panose="020B0604030504040204" pitchFamily="50" charset="-128"/>
-                        <a:ea typeface="游ゴシック" panose="020B0604030504040204" pitchFamily="50" charset="-128"/>
-                      </a:endParaRPr>
                       <a:r>
                         <a:rPr lang="ja-JP" altLang="en-US" sz="1050" dirty="0" b="0">
                           <a:latin typeface="游ゴシック" panose="020B0604030504040204" pitchFamily="50" charset="-128"/>
@@ -28032,21 +26727,6 @@
                         <a:tabLst/>
                         <a:defRPr/>
                       </a:pPr>
-                      <a:endParaRPr kumimoji="0" lang="ja-JP" altLang="en-US" sz="1400" b="1" i="0" u="none" strike="noStrike" kern="0" cap="none" spc="0" normalizeH="0" baseline="0" noProof="0" dirty="0">
-                        <a:ln>
-                          <a:noFill/>
-                        </a:ln>
-                        <a:solidFill>
-                          <a:srgbClr val="000000"/>
-                        </a:solidFill>
-                        <a:effectLst/>
-                        <a:uLnTx/>
-                        <a:uFillTx/>
-                        <a:latin typeface="游ゴシック" panose="020B0604030504040204" pitchFamily="50" charset="-128"/>
-                        <a:ea typeface="游ゴシック" panose="020B0604030504040204" pitchFamily="50" charset="-128"/>
-                        <a:cs typeface="+mn-cs"/>
-                        <a:sym typeface="Arial"/>
-                      </a:endParaRPr>
                       <a:r>
                         <a:rPr kumimoji="0" lang="ja-JP" altLang="en-US" sz="1500" b="0" i="0" u="none" strike="noStrike" kern="0" cap="none" spc="0" normalizeH="0" baseline="0" noProof="0">
                           <a:ln>
@@ -28122,10 +26802,6 @@
                       <a:pPr marL="0" marR="0" lvl="0" indent="0" algn="ctr" rtl="0">
                         <a:buNone/>
                       </a:pPr>
-                      <a:endParaRPr lang="ja-JP" altLang="en-US" sz="1600" b="0" u="none" strike="noStrike" cap="none" dirty="0">
-                        <a:latin typeface="游ゴシック" panose="020B0604030504040204" pitchFamily="50" charset="-128"/>
-                        <a:ea typeface="游ゴシック" panose="020B0604030504040204" pitchFamily="50" charset="-128"/>
-                      </a:endParaRPr>
                       <a:r>
                         <a:rPr lang="en-US" altLang="ja-JP" sz="1600" b="0" u="none" strike="noStrike" cap="none" dirty="0">
                           <a:latin typeface="游ゴシック" panose="020B0604030504040204" pitchFamily="50" charset="-128"/>
@@ -28251,15 +26927,6 @@
                       <a:pPr marL="0" marR="0" lvl="0" indent="0" algn="l" rtl="0">
                         <a:buNone/>
                       </a:pPr>
-                      <a:endParaRPr lang="en-US" altLang="ja-JP" sz="1400" u="none" strike="noStrike" cap="none" dirty="0">
-                        <a:solidFill>
-                          <a:schemeClr val="dk1"/>
-                        </a:solidFill>
-                        <a:latin typeface="游ゴシック" panose="020B0604030504040204" pitchFamily="50" charset="-128"/>
-                        <a:ea typeface="游ゴシック" panose="020B0604030504040204" pitchFamily="50" charset="-128"/>
-                        <a:cs typeface="游ゴシック"/>
-                        <a:sym typeface="游ゴシック"/>
-                      </a:endParaRPr>
                       <a:r>
                         <a:rPr lang="ja-JP" altLang="en-US" sz="1050" u="none" strike="noStrike" cap="none" dirty="0" b="0">
                           <a:solidFill>
@@ -28277,15 +26944,6 @@
                       <a:pPr marL="0" marR="0" lvl="0" indent="0" algn="l" rtl="0">
                         <a:buNone/>
                       </a:pPr>
-                      <a:endParaRPr lang="en-US" altLang="ja-JP" sz="1400" u="none" strike="noStrike" cap="none" dirty="0">
-                        <a:solidFill>
-                          <a:schemeClr val="dk1"/>
-                        </a:solidFill>
-                        <a:latin typeface="游ゴシック" panose="020B0604030504040204" pitchFamily="50" charset="-128"/>
-                        <a:ea typeface="游ゴシック" panose="020B0604030504040204" pitchFamily="50" charset="-128"/>
-                        <a:cs typeface="游ゴシック"/>
-                        <a:sym typeface="游ゴシック"/>
-                      </a:endParaRPr>
                       <a:r>
                         <a:rPr lang="ja-JP" altLang="en-US" sz="1050" u="none" strike="noStrike" cap="none" dirty="0" b="0">
                           <a:solidFill>
@@ -28358,21 +27016,6 @@
                         <a:tabLst/>
                         <a:defRPr/>
                       </a:pPr>
-                      <a:endParaRPr kumimoji="0" lang="ja-JP" altLang="en-US" sz="1400" b="1" i="0" u="none" strike="noStrike" kern="0" cap="none" spc="0" normalizeH="0" baseline="0" noProof="0" dirty="0">
-                        <a:ln>
-                          <a:noFill/>
-                        </a:ln>
-                        <a:solidFill>
-                          <a:srgbClr val="000000"/>
-                        </a:solidFill>
-                        <a:effectLst/>
-                        <a:uLnTx/>
-                        <a:uFillTx/>
-                        <a:latin typeface="游ゴシック" panose="020B0604030504040204" pitchFamily="50" charset="-128"/>
-                        <a:ea typeface="游ゴシック" panose="020B0604030504040204" pitchFamily="50" charset="-128"/>
-                        <a:cs typeface="+mn-cs"/>
-                        <a:sym typeface="Arial"/>
-                      </a:endParaRPr>
                       <a:r>
                         <a:rPr kumimoji="0" lang="ja-JP" altLang="en-US" sz="1500" b="0" i="0" u="none" strike="noStrike" kern="0" cap="none" spc="0" normalizeH="0" baseline="0" noProof="0">
                           <a:ln>
@@ -28448,10 +27091,6 @@
                       <a:pPr marL="0" marR="0" lvl="0" indent="0" algn="ctr" rtl="0">
                         <a:buNone/>
                       </a:pPr>
-                      <a:endParaRPr lang="ja-JP" altLang="en-US" sz="1600" b="0" dirty="0">
-                        <a:latin typeface="游ゴシック" panose="020B0604030504040204" pitchFamily="50" charset="-128"/>
-                        <a:ea typeface="游ゴシック" panose="020B0604030504040204" pitchFamily="50" charset="-128"/>
-                      </a:endParaRPr>
                       <a:r>
                         <a:rPr lang="en-US" altLang="ja-JP" sz="1600" b="0" dirty="0">
                           <a:latin typeface="游ゴシック" panose="020B0604030504040204" pitchFamily="50" charset="-128"/>
@@ -28517,13 +27156,6 @@
                         <a:buFont typeface="游ゴシック"/>
                         <a:buNone/>
                       </a:pPr>
-                      <a:endParaRPr lang="en-US" altLang="ja-JP" sz="1600" dirty="0">
-                        <a:solidFill>
-                          <a:schemeClr val="dk1"/>
-                        </a:solidFill>
-                        <a:latin typeface="游ゴシック" panose="020B0604030504040204" pitchFamily="50" charset="-128"/>
-                        <a:ea typeface="游ゴシック" panose="020B0604030504040204" pitchFamily="50" charset="-128"/>
-                      </a:endParaRPr>
                       <a:r>
                         <a:rPr lang="ja-JP" altLang="en-US" sz="1300" dirty="0" b="0">
                           <a:solidFill>
@@ -28592,10 +27224,6 @@
                         <a:buFont typeface="游ゴシック"/>
                         <a:buNone/>
                       </a:pPr>
-                      <a:endParaRPr lang="ja-JP" altLang="en-US" sz="1400" dirty="0">
-                        <a:latin typeface="游ゴシック" panose="020B0604030504040204" pitchFamily="50" charset="-128"/>
-                        <a:ea typeface="游ゴシック" panose="020B0604030504040204" pitchFamily="50" charset="-128"/>
-                      </a:endParaRPr>
                       <a:r>
                         <a:rPr lang="ja-JP" altLang="en-US" sz="1050" dirty="0" b="0">
                           <a:solidFill>
@@ -28668,21 +27296,6 @@
                         <a:tabLst/>
                         <a:defRPr/>
                       </a:pPr>
-                      <a:endParaRPr kumimoji="0" lang="ja-JP" altLang="en-US" sz="1400" b="1" i="0" u="none" strike="noStrike" kern="0" cap="none" spc="0" normalizeH="0" baseline="0" noProof="0" dirty="0">
-                        <a:ln>
-                          <a:noFill/>
-                        </a:ln>
-                        <a:solidFill>
-                          <a:srgbClr val="000000"/>
-                        </a:solidFill>
-                        <a:effectLst/>
-                        <a:uLnTx/>
-                        <a:uFillTx/>
-                        <a:latin typeface="游ゴシック" panose="020B0604030504040204" pitchFamily="50" charset="-128"/>
-                        <a:ea typeface="游ゴシック" panose="020B0604030504040204" pitchFamily="50" charset="-128"/>
-                        <a:cs typeface="+mn-cs"/>
-                        <a:sym typeface="Arial"/>
-                      </a:endParaRPr>
                       <a:r>
                         <a:rPr kumimoji="0" lang="ja-JP" altLang="en-US" sz="1500" b="0" i="0" u="none" strike="noStrike" kern="0" cap="none" spc="0" normalizeH="0" baseline="0" noProof="0" dirty="0">
                           <a:ln>
@@ -28758,10 +27371,6 @@
                       <a:pPr marL="0" marR="0" lvl="0" indent="0" algn="ctr" rtl="0">
                         <a:buNone/>
                       </a:pPr>
-                      <a:endParaRPr lang="ja-JP" altLang="en-US" sz="1600" b="0" u="none" strike="noStrike" cap="none" dirty="0">
-                        <a:latin typeface="游ゴシック" panose="020B0604030504040204" pitchFamily="50" charset="-128"/>
-                        <a:ea typeface="游ゴシック" panose="020B0604030504040204" pitchFamily="50" charset="-128"/>
-                      </a:endParaRPr>
                       <a:r>
                         <a:rPr lang="en-US" altLang="ja-JP" sz="1600" b="0" u="none" strike="noStrike" cap="none" dirty="0">
                           <a:latin typeface="游ゴシック" panose="020B0604030504040204" pitchFamily="50" charset="-128"/>
@@ -28823,10 +27432,6 @@
                       <a:pPr marL="0" marR="0" lvl="0" indent="0" algn="ctr" rtl="0">
                         <a:buNone/>
                       </a:pPr>
-                      <a:endParaRPr lang="ja-JP" altLang="en-US" sz="1400">
-                        <a:latin typeface="游ゴシック" panose="020B0604030504040204" pitchFamily="50" charset="-128"/>
-                        <a:ea typeface="游ゴシック" panose="020B0604030504040204" pitchFamily="50" charset="-128"/>
-                      </a:endParaRPr>
                       <a:r>
                         <a:rPr lang="ja-JP" altLang="en-US" sz="1300" u="none" strike="noStrike" cap="none" b="0">
                           <a:solidFill>
@@ -28896,10 +27501,6 @@
                         <a:buFont typeface="游ゴシック"/>
                         <a:buNone/>
                       </a:pPr>
-                      <a:endParaRPr lang="ja-JP" altLang="en-US" sz="1400" dirty="0">
-                        <a:latin typeface="游ゴシック" panose="020B0604030504040204" pitchFamily="50" charset="-128"/>
-                        <a:ea typeface="游ゴシック" panose="020B0604030504040204" pitchFamily="50" charset="-128"/>
-                      </a:endParaRPr>
                       <a:r>
                         <a:rPr lang="en-US" altLang="ja-JP" sz="1050" u="none" strike="noStrike" cap="none" dirty="0" b="0">
                           <a:solidFill>
@@ -29067,7 +27668,6 @@
           </a:bodyPr>
           <a:lstStyle/>
           <a:p>
-            <a:endParaRPr sz="1543" dirty="0"/>
             <a:r>
               <a:rPr lang="en-US" altLang="ja-JP" sz="900" dirty="0">
                 <a:solidFill>
@@ -29078,7 +27678,6 @@
             </a:r>
           </a:p>
           <a:p>
-            <a:endParaRPr sz="1543" dirty="0"/>
             <a:r>
               <a:rPr lang="en-US" altLang="ja-JP" sz="900" dirty="0">
                 <a:solidFill>
@@ -29089,7 +27688,6 @@
             </a:r>
           </a:p>
           <a:p>
-            <a:endParaRPr sz="1543" dirty="0"/>
             <a:r>
               <a:rPr lang="en-US" altLang="ja-JP" sz="900" dirty="0">
                 <a:solidFill>
@@ -29100,7 +27698,6 @@
             </a:r>
           </a:p>
           <a:p>
-            <a:endParaRPr sz="1543" dirty="0"/>
             <a:r>
               <a:rPr lang="en-US" altLang="ja-JP" sz="900" dirty="0">
                 <a:solidFill>
@@ -29111,7 +27708,6 @@
             </a:r>
           </a:p>
           <a:p>
-            <a:endParaRPr sz="1543" dirty="0"/>
             <a:r>
               <a:rPr lang="en-US" altLang="ja-JP" sz="900" dirty="0">
                 <a:solidFill>
@@ -29219,13 +27815,6 @@
               </a:buClr>
               <a:buSzPts val="1000"/>
             </a:pPr>
-            <a:endParaRPr lang="ja-JP" altLang="en-US" sz="1543">
-              <a:solidFill>
-                <a:schemeClr val="bg1"/>
-              </a:solidFill>
-              <a:latin typeface="游ゴシック" panose="020B0604030504040204" pitchFamily="50" charset="-128"/>
-              <a:ea typeface="游ゴシック" panose="020B0604030504040204" pitchFamily="50" charset="-128"/>
-            </a:endParaRPr>
             <a:r>
               <a:rPr lang="ja-JP" altLang="en-US" sz="1102">
                 <a:solidFill>
@@ -29351,15 +27940,6 @@
                       <a:pPr marL="0" marR="0" lvl="0" indent="0" algn="ctr" rtl="0">
                         <a:buNone/>
                       </a:pPr>
-                      <a:endParaRPr lang="en-US" sz="1400" b="1" dirty="0">
-                        <a:solidFill>
-                          <a:schemeClr val="lt1"/>
-                        </a:solidFill>
-                        <a:latin typeface="游ゴシック" panose="020B0604030504040204" pitchFamily="50" charset="-128"/>
-                        <a:ea typeface="游ゴシック" panose="020B0604030504040204" pitchFamily="50" charset="-128"/>
-                        <a:cs typeface="游ゴシック"/>
-                        <a:sym typeface="游ゴシック"/>
-                      </a:endParaRPr>
                       <a:r>
                         <a:rPr lang="en-US" altLang="ja-JP" sz="1400" b="1" dirty="0">
                           <a:solidFill>
@@ -29428,10 +28008,6 @@
                       <a:pPr marL="0" marR="0" lvl="0" indent="0" algn="ctr" rtl="0">
                         <a:buNone/>
                       </a:pPr>
-                      <a:endParaRPr lang="ja-JP" altLang="en-US" sz="1400" dirty="0">
-                        <a:latin typeface="游ゴシック" panose="020B0604030504040204" pitchFamily="50" charset="-128"/>
-                        <a:ea typeface="游ゴシック" panose="020B0604030504040204" pitchFamily="50" charset="-128"/>
-                      </a:endParaRPr>
                       <a:r>
                         <a:rPr lang="ja-JP" altLang="en-US" sz="1400" b="1" dirty="0">
                           <a:solidFill>
@@ -29498,10 +28074,6 @@
                       <a:pPr marL="0" marR="0" lvl="0" indent="0" algn="ctr" rtl="0">
                         <a:buNone/>
                       </a:pPr>
-                      <a:endParaRPr lang="ja-JP" altLang="en-US" sz="1400" dirty="0">
-                        <a:latin typeface="游ゴシック" panose="020B0604030504040204" pitchFamily="50" charset="-128"/>
-                        <a:ea typeface="游ゴシック" panose="020B0604030504040204" pitchFamily="50" charset="-128"/>
-                      </a:endParaRPr>
                       <a:r>
                         <a:rPr lang="ja-JP" altLang="en-US" sz="1400" b="1" dirty="0">
                           <a:solidFill>
@@ -29568,10 +28140,6 @@
                       <a:pPr marL="0" marR="0" lvl="0" indent="0" algn="ctr" rtl="0">
                         <a:buNone/>
                       </a:pPr>
-                      <a:endParaRPr lang="ja-JP" altLang="en-US" sz="1400" dirty="0">
-                        <a:latin typeface="游ゴシック" panose="020B0604030504040204" pitchFamily="50" charset="-128"/>
-                        <a:ea typeface="游ゴシック" panose="020B0604030504040204" pitchFamily="50" charset="-128"/>
-                      </a:endParaRPr>
                       <a:r>
                         <a:rPr lang="ja-JP" altLang="en-US" sz="1400" b="1" dirty="0">
                           <a:solidFill>
@@ -29655,10 +28223,6 @@
                         <a:buFont typeface="游ゴシック"/>
                         <a:buNone/>
                       </a:pPr>
-                      <a:endParaRPr lang="ja-JP" altLang="en-US" sz="1600" b="0" dirty="0">
-                        <a:latin typeface="游ゴシック" panose="020B0604030504040204" pitchFamily="50" charset="-128"/>
-                        <a:ea typeface="游ゴシック" panose="020B0604030504040204" pitchFamily="50" charset="-128"/>
-                      </a:endParaRPr>
                       <a:r>
                         <a:rPr lang="en-US" altLang="ja-JP" sz="1600" b="0" dirty="0">
                           <a:latin typeface="游ゴシック" panose="020B0604030504040204" pitchFamily="50" charset="-128"/>
@@ -29888,21 +28452,6 @@
                         <a:tabLst/>
                         <a:defRPr/>
                       </a:pPr>
-                      <a:endParaRPr kumimoji="0" lang="ja-JP" altLang="en-US" sz="1600" b="1" i="0" u="none" strike="noStrike" kern="0" cap="none" spc="0" normalizeH="0" baseline="0" noProof="0" dirty="0">
-                        <a:ln>
-                          <a:noFill/>
-                        </a:ln>
-                        <a:solidFill>
-                          <a:srgbClr val="252525"/>
-                        </a:solidFill>
-                        <a:effectLst/>
-                        <a:uLnTx/>
-                        <a:uFillTx/>
-                        <a:latin typeface="游ゴシック" panose="020B0604030504040204" pitchFamily="50" charset="-128"/>
-                        <a:ea typeface="游ゴシック" panose="020B0604030504040204" pitchFamily="50" charset="-128"/>
-                        <a:cs typeface="游ゴシック"/>
-                        <a:sym typeface="游ゴシック"/>
-                      </a:endParaRPr>
                       <a:r>
                         <a:rPr kumimoji="0" lang="ja-JP" altLang="en-US" sz="1500" b="1" i="0" u="none" strike="noStrike" kern="0" cap="none" spc="0" normalizeH="0" baseline="0" noProof="0">
                           <a:ln>
@@ -29986,10 +28535,6 @@
                         <a:buFont typeface="游ゴシック"/>
                         <a:buNone/>
                       </a:pPr>
-                      <a:endParaRPr lang="ja-JP" altLang="en-US" sz="1600" b="0" dirty="0">
-                        <a:latin typeface="游ゴシック" panose="020B0604030504040204" pitchFamily="50" charset="-128"/>
-                        <a:ea typeface="游ゴシック" panose="020B0604030504040204" pitchFamily="50" charset="-128"/>
-                      </a:endParaRPr>
                       <a:r>
                         <a:rPr lang="en-US" altLang="ja-JP" sz="1600" b="0" dirty="0">
                           <a:latin typeface="游ゴシック" panose="020B0604030504040204" pitchFamily="50" charset="-128"/>
@@ -30219,21 +28764,6 @@
                         <a:tabLst/>
                         <a:defRPr/>
                       </a:pPr>
-                      <a:endParaRPr kumimoji="0" lang="ja-JP" altLang="en-US" sz="1600" b="1" i="0" u="none" strike="noStrike" kern="0" cap="none" spc="0" normalizeH="0" baseline="0" noProof="0" dirty="0">
-                        <a:ln>
-                          <a:noFill/>
-                        </a:ln>
-                        <a:solidFill>
-                          <a:srgbClr val="252525"/>
-                        </a:solidFill>
-                        <a:effectLst/>
-                        <a:uLnTx/>
-                        <a:uFillTx/>
-                        <a:latin typeface="游ゴシック" panose="020B0604030504040204" pitchFamily="50" charset="-128"/>
-                        <a:ea typeface="游ゴシック" panose="020B0604030504040204" pitchFamily="50" charset="-128"/>
-                        <a:cs typeface="游ゴシック"/>
-                        <a:sym typeface="游ゴシック"/>
-                      </a:endParaRPr>
                       <a:r>
                         <a:rPr kumimoji="0" lang="ja-JP" altLang="en-US" sz="1500" b="1" i="0" u="none" strike="noStrike" kern="0" cap="none" spc="0" normalizeH="0" baseline="0" noProof="0">
                           <a:ln>
@@ -30309,10 +28839,6 @@
                       <a:pPr marL="0" marR="0" lvl="0" indent="0" algn="ctr" rtl="0">
                         <a:buNone/>
                       </a:pPr>
-                      <a:endParaRPr lang="ja-JP" altLang="en-US" sz="1600" b="0" dirty="0">
-                        <a:latin typeface="游ゴシック" panose="020B0604030504040204" pitchFamily="50" charset="-128"/>
-                        <a:ea typeface="游ゴシック" panose="020B0604030504040204" pitchFamily="50" charset="-128"/>
-                      </a:endParaRPr>
                       <a:r>
                         <a:rPr lang="en-US" altLang="ja-JP" sz="1600" b="0" dirty="0">
                           <a:latin typeface="游ゴシック" panose="020B0604030504040204" pitchFamily="50" charset="-128"/>
@@ -30438,16 +28964,6 @@
                         <a:buFont typeface="Arial" panose="020B0604020202020204" pitchFamily="34" charset="0"/>
                         <a:buNone/>
                       </a:pPr>
-                      <a:endParaRPr lang="en-US" altLang="ja-JP" sz="1400" b="0" dirty="0">
-                        <a:solidFill>
-                          <a:schemeClr val="dk1"/>
-                        </a:solidFill>
-                        <a:highlight>
-                          <a:srgbClr val="FFFF00"/>
-                        </a:highlight>
-                        <a:latin typeface="游ゴシック" panose="020B0604030504040204" pitchFamily="50" charset="-128"/>
-                        <a:ea typeface="游ゴシック" panose="020B0604030504040204" pitchFamily="50" charset="-128"/>
-                      </a:endParaRPr>
                       <a:r>
                         <a:rPr lang="ja-JP" altLang="en-US" sz="1100" b="0" dirty="0">
                           <a:solidFill>
@@ -30471,16 +28987,6 @@
                         <a:buFont typeface="Arial" panose="020B0604020202020204" pitchFamily="34" charset="0"/>
                         <a:buNone/>
                       </a:pPr>
-                      <a:endParaRPr lang="en-US" altLang="ja-JP" sz="1400" b="0" dirty="0">
-                        <a:solidFill>
-                          <a:schemeClr val="dk1"/>
-                        </a:solidFill>
-                        <a:highlight>
-                          <a:srgbClr val="FFFF00"/>
-                        </a:highlight>
-                        <a:latin typeface="游ゴシック" panose="020B0604030504040204" pitchFamily="50" charset="-128"/>
-                        <a:ea typeface="游ゴシック" panose="020B0604030504040204" pitchFamily="50" charset="-128"/>
-                      </a:endParaRPr>
                       <a:r>
                         <a:rPr lang="ja-JP" altLang="en-US" sz="1100" b="0" dirty="0">
                           <a:solidFill>
@@ -30626,10 +29132,6 @@
                       <a:pPr marL="0" marR="0" lvl="0" indent="0" algn="ctr" rtl="0">
                         <a:buNone/>
                       </a:pPr>
-                      <a:endParaRPr lang="ja-JP" altLang="en-US" sz="1600" b="0" dirty="0">
-                        <a:latin typeface="游ゴシック" panose="020B0604030504040204" pitchFamily="50" charset="-128"/>
-                        <a:ea typeface="游ゴシック" panose="020B0604030504040204" pitchFamily="50" charset="-128"/>
-                      </a:endParaRPr>
                       <a:r>
                         <a:rPr lang="en-US" altLang="ja-JP" sz="1600" b="0" dirty="0">
                           <a:latin typeface="游ゴシック" panose="020B0604030504040204" pitchFamily="50" charset="-128"/>
@@ -30687,10 +29189,6 @@
                       <a:pPr marL="0" marR="0" lvl="0" indent="0" algn="ctr" rtl="0">
                         <a:buNone/>
                       </a:pPr>
-                      <a:endParaRPr lang="ja-JP" altLang="en-US" sz="1600" dirty="0">
-                        <a:latin typeface="游ゴシック" panose="020B0604030504040204" pitchFamily="50" charset="-128"/>
-                        <a:ea typeface="游ゴシック" panose="020B0604030504040204" pitchFamily="50" charset="-128"/>
-                      </a:endParaRPr>
                       <a:r>
                         <a:rPr lang="ja-JP" altLang="en-US" sz="1300" dirty="0" b="0">
                           <a:solidFill>
@@ -30759,15 +29257,6 @@
                         <a:buFont typeface="Arial" panose="020B0604020202020204" pitchFamily="34" charset="0"/>
                         <a:buNone/>
                       </a:pPr>
-                      <a:endParaRPr lang="en-US" altLang="ja-JP" sz="1400" dirty="0">
-                        <a:solidFill>
-                          <a:schemeClr val="dk1"/>
-                        </a:solidFill>
-                        <a:latin typeface="游ゴシック" panose="020B0604030504040204" pitchFamily="50" charset="-128"/>
-                        <a:ea typeface="游ゴシック" panose="020B0604030504040204" pitchFamily="50" charset="-128"/>
-                        <a:cs typeface="游ゴシック"/>
-                        <a:sym typeface="游ゴシック"/>
-                      </a:endParaRPr>
                       <a:r>
                         <a:rPr lang="ja-JP" altLang="en-US" sz="1100" dirty="0" b="0">
                           <a:solidFill>
@@ -30793,15 +29282,6 @@
                         <a:buFont typeface="Arial" panose="020B0604020202020204" pitchFamily="34" charset="0"/>
                         <a:buNone/>
                       </a:pPr>
-                      <a:endParaRPr lang="en-US" altLang="ja-JP" sz="1400" dirty="0">
-                        <a:solidFill>
-                          <a:schemeClr val="dk1"/>
-                        </a:solidFill>
-                        <a:latin typeface="游ゴシック" panose="020B0604030504040204" pitchFamily="50" charset="-128"/>
-                        <a:ea typeface="游ゴシック" panose="020B0604030504040204" pitchFamily="50" charset="-128"/>
-                        <a:cs typeface="游ゴシック"/>
-                        <a:sym typeface="游ゴシック"/>
-                      </a:endParaRPr>
                       <a:r>
                         <a:rPr lang="ja-JP" altLang="en-US" sz="1100" dirty="0" b="0">
                           <a:solidFill>
@@ -30940,10 +29420,6 @@
                       <a:pPr marL="0" marR="0" lvl="0" indent="0" algn="ctr" rtl="0">
                         <a:buNone/>
                       </a:pPr>
-                      <a:endParaRPr lang="ja-JP" altLang="en-US" sz="1600" b="0" dirty="0">
-                        <a:latin typeface="游ゴシック" panose="020B0604030504040204" pitchFamily="50" charset="-128"/>
-                        <a:ea typeface="游ゴシック" panose="020B0604030504040204" pitchFamily="50" charset="-128"/>
-                      </a:endParaRPr>
                       <a:r>
                         <a:rPr lang="en-US" altLang="ja-JP" sz="1600" b="0" dirty="0">
                           <a:latin typeface="游ゴシック" panose="020B0604030504040204" pitchFamily="50" charset="-128"/>
@@ -31147,10 +29623,6 @@
                         <a:buFont typeface="游ゴシック"/>
                         <a:buNone/>
                       </a:pPr>
-                      <a:endParaRPr lang="ja-JP" altLang="en-US" sz="1400" dirty="0">
-                        <a:latin typeface="游ゴシック" panose="020B0604030504040204" pitchFamily="50" charset="-128"/>
-                        <a:ea typeface="游ゴシック" panose="020B0604030504040204" pitchFamily="50" charset="-128"/>
-                      </a:endParaRPr>
                       <a:r>
                         <a:rPr lang="ja-JP" altLang="en-US" sz="1500" b="1" i="0" u="none" strike="noStrike" cap="none" dirty="0">
                           <a:solidFill>
@@ -31228,10 +29700,6 @@
                         <a:buFont typeface="游ゴシック"/>
                         <a:buNone/>
                       </a:pPr>
-                      <a:endParaRPr lang="ja-JP" altLang="en-US" sz="1600" b="0" dirty="0">
-                        <a:latin typeface="游ゴシック" panose="020B0604030504040204" pitchFamily="50" charset="-128"/>
-                        <a:ea typeface="游ゴシック" panose="020B0604030504040204" pitchFamily="50" charset="-128"/>
-                      </a:endParaRPr>
                       <a:r>
                         <a:rPr lang="en-US" altLang="ja-JP" sz="1600" b="0" dirty="0">
                           <a:latin typeface="游ゴシック" panose="020B0604030504040204" pitchFamily="50" charset="-128"/>
@@ -31436,21 +29904,6 @@
                         <a:tabLst/>
                         <a:defRPr/>
                       </a:pPr>
-                      <a:endParaRPr kumimoji="0" lang="ja-JP" altLang="en-US" sz="1600" b="1" i="0" u="none" strike="noStrike" kern="0" cap="none" spc="0" normalizeH="0" baseline="0" noProof="0" dirty="0">
-                        <a:ln>
-                          <a:noFill/>
-                        </a:ln>
-                        <a:solidFill>
-                          <a:srgbClr val="252525"/>
-                        </a:solidFill>
-                        <a:effectLst/>
-                        <a:uLnTx/>
-                        <a:uFillTx/>
-                        <a:latin typeface="游ゴシック" panose="020B0604030504040204" pitchFamily="50" charset="-128"/>
-                        <a:ea typeface="游ゴシック" panose="020B0604030504040204" pitchFamily="50" charset="-128"/>
-                        <a:cs typeface="游ゴシック"/>
-                        <a:sym typeface="游ゴシック"/>
-                      </a:endParaRPr>
                       <a:r>
                         <a:rPr kumimoji="0" lang="ja-JP" altLang="en-US" sz="1500" b="1" i="0" u="none" strike="noStrike" kern="0" cap="none" spc="0" normalizeH="0" baseline="0" noProof="0">
                           <a:ln>
@@ -31548,7 +30001,6 @@
           </a:bodyPr>
           <a:lstStyle/>
           <a:p>
-            <a:endParaRPr sz="1543"/>
             <a:r>
               <a:rPr lang="en-US" altLang="ja-JP" sz="900">
                 <a:solidFill>
@@ -31559,7 +30011,6 @@
             </a:r>
           </a:p>
           <a:p>
-            <a:endParaRPr sz="1543"/>
             <a:r>
               <a:rPr lang="en-US" altLang="ja-JP" sz="900">
                 <a:solidFill>
@@ -31570,7 +30021,6 @@
             </a:r>
           </a:p>
           <a:p>
-            <a:endParaRPr sz="1543"/>
             <a:r>
               <a:rPr lang="en-US" altLang="ja-JP" sz="900">
                 <a:solidFill>
@@ -31581,7 +30031,6 @@
             </a:r>
           </a:p>
           <a:p>
-            <a:endParaRPr sz="1543"/>
             <a:r>
               <a:rPr lang="en-US" altLang="ja-JP" sz="900">
                 <a:solidFill>
@@ -31689,13 +30138,6 @@
               </a:buClr>
               <a:buSzPts val="1000"/>
             </a:pPr>
-            <a:endParaRPr lang="ja-JP" altLang="en-US" sz="1543">
-              <a:solidFill>
-                <a:schemeClr val="bg1"/>
-              </a:solidFill>
-              <a:latin typeface="游ゴシック" panose="020B0604030504040204" pitchFamily="50" charset="-128"/>
-              <a:ea typeface="游ゴシック" panose="020B0604030504040204" pitchFamily="50" charset="-128"/>
-            </a:endParaRPr>
             <a:r>
               <a:rPr lang="ja-JP" altLang="en-US" sz="1102">
                 <a:solidFill>
@@ -31821,15 +30263,6 @@
                       <a:pPr marL="0" marR="0" lvl="0" indent="0" algn="ctr" rtl="0">
                         <a:buNone/>
                       </a:pPr>
-                      <a:endParaRPr lang="en-US" sz="1400" b="1" dirty="0">
-                        <a:solidFill>
-                          <a:schemeClr val="lt1"/>
-                        </a:solidFill>
-                        <a:latin typeface="游ゴシック" panose="020B0604030504040204" pitchFamily="50" charset="-128"/>
-                        <a:ea typeface="游ゴシック" panose="020B0604030504040204" pitchFamily="50" charset="-128"/>
-                        <a:cs typeface="游ゴシック"/>
-                        <a:sym typeface="游ゴシック"/>
-                      </a:endParaRPr>
                       <a:r>
                         <a:rPr lang="en-US" altLang="ja-JP" sz="1400" b="1" dirty="0">
                           <a:solidFill>
@@ -31898,10 +30331,6 @@
                       <a:pPr marL="0" marR="0" lvl="0" indent="0" algn="ctr" rtl="0">
                         <a:buNone/>
                       </a:pPr>
-                      <a:endParaRPr lang="ja-JP" altLang="en-US" sz="1400" dirty="0">
-                        <a:latin typeface="游ゴシック" panose="020B0604030504040204" pitchFamily="50" charset="-128"/>
-                        <a:ea typeface="游ゴシック" panose="020B0604030504040204" pitchFamily="50" charset="-128"/>
-                      </a:endParaRPr>
                       <a:r>
                         <a:rPr lang="ja-JP" altLang="en-US" sz="1400" b="1" dirty="0">
                           <a:solidFill>
@@ -31968,10 +30397,6 @@
                       <a:pPr marL="0" marR="0" lvl="0" indent="0" algn="ctr" rtl="0">
                         <a:buNone/>
                       </a:pPr>
-                      <a:endParaRPr lang="ja-JP" altLang="en-US" sz="1400" dirty="0">
-                        <a:latin typeface="游ゴシック" panose="020B0604030504040204" pitchFamily="50" charset="-128"/>
-                        <a:ea typeface="游ゴシック" panose="020B0604030504040204" pitchFamily="50" charset="-128"/>
-                      </a:endParaRPr>
                       <a:r>
                         <a:rPr lang="ja-JP" altLang="en-US" sz="1400" b="1" dirty="0">
                           <a:solidFill>
@@ -32038,10 +30463,6 @@
                       <a:pPr marL="0" marR="0" lvl="0" indent="0" algn="ctr" rtl="0">
                         <a:buNone/>
                       </a:pPr>
-                      <a:endParaRPr lang="ja-JP" altLang="en-US" sz="1400" dirty="0">
-                        <a:latin typeface="游ゴシック" panose="020B0604030504040204" pitchFamily="50" charset="-128"/>
-                        <a:ea typeface="游ゴシック" panose="020B0604030504040204" pitchFamily="50" charset="-128"/>
-                      </a:endParaRPr>
                       <a:r>
                         <a:rPr lang="ja-JP" altLang="en-US" sz="1400" b="1" dirty="0">
                           <a:solidFill>
@@ -32125,10 +30546,6 @@
                         <a:buFont typeface="游ゴシック"/>
                         <a:buNone/>
                       </a:pPr>
-                      <a:endParaRPr lang="ja-JP" altLang="en-US" sz="1600" b="0" dirty="0">
-                        <a:latin typeface="游ゴシック" panose="020B0604030504040204" pitchFamily="50" charset="-128"/>
-                        <a:ea typeface="游ゴシック" panose="020B0604030504040204" pitchFamily="50" charset="-128"/>
-                      </a:endParaRPr>
                       <a:r>
                         <a:rPr lang="en-US" altLang="ja-JP" sz="1600" b="0" dirty="0">
                           <a:latin typeface="游ゴシック" panose="020B0604030504040204" pitchFamily="50" charset="-128"/>
@@ -32358,21 +30775,6 @@
                         <a:tabLst/>
                         <a:defRPr/>
                       </a:pPr>
-                      <a:endParaRPr kumimoji="0" lang="ja-JP" altLang="en-US" sz="1600" b="1" i="0" u="none" strike="noStrike" kern="0" cap="none" spc="0" normalizeH="0" baseline="0" noProof="0" dirty="0">
-                        <a:ln>
-                          <a:noFill/>
-                        </a:ln>
-                        <a:solidFill>
-                          <a:srgbClr val="252525"/>
-                        </a:solidFill>
-                        <a:effectLst/>
-                        <a:uLnTx/>
-                        <a:uFillTx/>
-                        <a:latin typeface="游ゴシック" panose="020B0604030504040204" pitchFamily="50" charset="-128"/>
-                        <a:ea typeface="游ゴシック" panose="020B0604030504040204" pitchFamily="50" charset="-128"/>
-                        <a:cs typeface="游ゴシック"/>
-                        <a:sym typeface="游ゴシック"/>
-                      </a:endParaRPr>
                       <a:r>
                         <a:rPr kumimoji="0" lang="ja-JP" altLang="en-US" sz="1500" b="1" i="0" u="none" strike="noStrike" kern="0" cap="none" spc="0" normalizeH="0" baseline="0" noProof="0">
                           <a:ln>
@@ -32456,10 +30858,6 @@
                         <a:buFont typeface="游ゴシック"/>
                         <a:buNone/>
                       </a:pPr>
-                      <a:endParaRPr lang="ja-JP" altLang="en-US" sz="1600" b="0" dirty="0">
-                        <a:latin typeface="游ゴシック" panose="020B0604030504040204" pitchFamily="50" charset="-128"/>
-                        <a:ea typeface="游ゴシック" panose="020B0604030504040204" pitchFamily="50" charset="-128"/>
-                      </a:endParaRPr>
                       <a:r>
                         <a:rPr lang="en-US" altLang="ja-JP" sz="1600" b="0" dirty="0">
                           <a:latin typeface="游ゴシック" panose="020B0604030504040204" pitchFamily="50" charset="-128"/>
@@ -32689,21 +31087,6 @@
                         <a:tabLst/>
                         <a:defRPr/>
                       </a:pPr>
-                      <a:endParaRPr kumimoji="0" lang="ja-JP" altLang="en-US" sz="1600" b="1" i="0" u="none" strike="noStrike" kern="0" cap="none" spc="0" normalizeH="0" baseline="0" noProof="0" dirty="0">
-                        <a:ln>
-                          <a:noFill/>
-                        </a:ln>
-                        <a:solidFill>
-                          <a:srgbClr val="252525"/>
-                        </a:solidFill>
-                        <a:effectLst/>
-                        <a:uLnTx/>
-                        <a:uFillTx/>
-                        <a:latin typeface="游ゴシック" panose="020B0604030504040204" pitchFamily="50" charset="-128"/>
-                        <a:ea typeface="游ゴシック" panose="020B0604030504040204" pitchFamily="50" charset="-128"/>
-                        <a:cs typeface="游ゴシック"/>
-                        <a:sym typeface="游ゴシック"/>
-                      </a:endParaRPr>
                       <a:r>
                         <a:rPr kumimoji="0" lang="ja-JP" altLang="en-US" sz="1500" b="1" i="0" u="none" strike="noStrike" kern="0" cap="none" spc="0" normalizeH="0" baseline="0" noProof="0">
                           <a:ln>
@@ -32779,10 +31162,6 @@
                       <a:pPr marL="0" marR="0" lvl="0" indent="0" algn="ctr" rtl="0">
                         <a:buNone/>
                       </a:pPr>
-                      <a:endParaRPr lang="ja-JP" altLang="en-US" sz="1600" b="0" dirty="0">
-                        <a:latin typeface="游ゴシック" panose="020B0604030504040204" pitchFamily="50" charset="-128"/>
-                        <a:ea typeface="游ゴシック" panose="020B0604030504040204" pitchFamily="50" charset="-128"/>
-                      </a:endParaRPr>
                       <a:r>
                         <a:rPr lang="en-US" altLang="ja-JP" sz="1600" b="0" dirty="0">
                           <a:latin typeface="游ゴシック" panose="020B0604030504040204" pitchFamily="50" charset="-128"/>
@@ -32908,16 +31287,6 @@
                         <a:buFont typeface="Arial" panose="020B0604020202020204" pitchFamily="34" charset="0"/>
                         <a:buNone/>
                       </a:pPr>
-                      <a:endParaRPr lang="en-US" altLang="ja-JP" sz="1400" b="0" dirty="0">
-                        <a:solidFill>
-                          <a:schemeClr val="dk1"/>
-                        </a:solidFill>
-                        <a:highlight>
-                          <a:srgbClr val="FFFF00"/>
-                        </a:highlight>
-                        <a:latin typeface="游ゴシック" panose="020B0604030504040204" pitchFamily="50" charset="-128"/>
-                        <a:ea typeface="游ゴシック" panose="020B0604030504040204" pitchFamily="50" charset="-128"/>
-                      </a:endParaRPr>
                       <a:r>
                         <a:rPr lang="ja-JP" altLang="en-US" sz="1100" b="0" dirty="0">
                           <a:solidFill>
@@ -32941,16 +31310,6 @@
                         <a:buFont typeface="Arial" panose="020B0604020202020204" pitchFamily="34" charset="0"/>
                         <a:buNone/>
                       </a:pPr>
-                      <a:endParaRPr lang="en-US" altLang="ja-JP" sz="1400" b="0" dirty="0">
-                        <a:solidFill>
-                          <a:schemeClr val="dk1"/>
-                        </a:solidFill>
-                        <a:highlight>
-                          <a:srgbClr val="FFFF00"/>
-                        </a:highlight>
-                        <a:latin typeface="游ゴシック" panose="020B0604030504040204" pitchFamily="50" charset="-128"/>
-                        <a:ea typeface="游ゴシック" panose="020B0604030504040204" pitchFamily="50" charset="-128"/>
-                      </a:endParaRPr>
                       <a:r>
                         <a:rPr lang="ja-JP" altLang="en-US" sz="1100" b="0" dirty="0">
                           <a:solidFill>
@@ -33096,10 +31455,6 @@
                       <a:pPr marL="0" marR="0" lvl="0" indent="0" algn="ctr" rtl="0">
                         <a:buNone/>
                       </a:pPr>
-                      <a:endParaRPr lang="ja-JP" altLang="en-US" sz="1600" b="0" dirty="0">
-                        <a:latin typeface="游ゴシック" panose="020B0604030504040204" pitchFamily="50" charset="-128"/>
-                        <a:ea typeface="游ゴシック" panose="020B0604030504040204" pitchFamily="50" charset="-128"/>
-                      </a:endParaRPr>
                       <a:r>
                         <a:rPr lang="en-US" altLang="ja-JP" sz="1600" b="0" dirty="0">
                           <a:latin typeface="游ゴシック" panose="020B0604030504040204" pitchFamily="50" charset="-128"/>
@@ -33157,10 +31512,6 @@
                       <a:pPr marL="0" marR="0" lvl="0" indent="0" algn="ctr" rtl="0">
                         <a:buNone/>
                       </a:pPr>
-                      <a:endParaRPr lang="ja-JP" altLang="en-US" sz="1600" dirty="0">
-                        <a:latin typeface="游ゴシック" panose="020B0604030504040204" pitchFamily="50" charset="-128"/>
-                        <a:ea typeface="游ゴシック" panose="020B0604030504040204" pitchFamily="50" charset="-128"/>
-                      </a:endParaRPr>
                       <a:r>
                         <a:rPr lang="ja-JP" altLang="en-US" sz="1300" dirty="0" b="0">
                           <a:solidFill>
@@ -33176,10 +31527,6 @@
                       <a:pPr marL="0" marR="0" lvl="0" indent="0" algn="ctr" rtl="0">
                         <a:buNone/>
                       </a:pPr>
-                      <a:endParaRPr lang="ja-JP" altLang="en-US" sz="1600" dirty="0">
-                        <a:latin typeface="游ゴシック" panose="020B0604030504040204" pitchFamily="50" charset="-128"/>
-                        <a:ea typeface="游ゴシック" panose="020B0604030504040204" pitchFamily="50" charset="-128"/>
-                      </a:endParaRPr>
                       <a:r>
                         <a:rPr lang="ja-JP" altLang="en-US" sz="1300" dirty="0" b="0">
                           <a:solidFill>
@@ -33248,15 +31595,6 @@
                         <a:buFont typeface="Arial" panose="020B0604020202020204" pitchFamily="34" charset="0"/>
                         <a:buNone/>
                       </a:pPr>
-                      <a:endParaRPr lang="en-US" altLang="ja-JP" sz="1400" dirty="0">
-                        <a:solidFill>
-                          <a:schemeClr val="dk1"/>
-                        </a:solidFill>
-                        <a:latin typeface="游ゴシック" panose="020B0604030504040204" pitchFamily="50" charset="-128"/>
-                        <a:ea typeface="游ゴシック" panose="020B0604030504040204" pitchFamily="50" charset="-128"/>
-                        <a:cs typeface="游ゴシック"/>
-                        <a:sym typeface="游ゴシック"/>
-                      </a:endParaRPr>
                       <a:r>
                         <a:rPr lang="ja-JP" altLang="en-US" sz="1100" dirty="0" b="0">
                           <a:solidFill>
@@ -33282,15 +31620,6 @@
                         <a:buFont typeface="Arial" panose="020B0604020202020204" pitchFamily="34" charset="0"/>
                         <a:buNone/>
                       </a:pPr>
-                      <a:endParaRPr lang="en-US" altLang="ja-JP" sz="1400" dirty="0">
-                        <a:solidFill>
-                          <a:schemeClr val="dk1"/>
-                        </a:solidFill>
-                        <a:latin typeface="游ゴシック" panose="020B0604030504040204" pitchFamily="50" charset="-128"/>
-                        <a:ea typeface="游ゴシック" panose="020B0604030504040204" pitchFamily="50" charset="-128"/>
-                        <a:cs typeface="游ゴシック"/>
-                        <a:sym typeface="游ゴシック"/>
-                      </a:endParaRPr>
                       <a:r>
                         <a:rPr lang="ja-JP" altLang="en-US" sz="1100" dirty="0" b="0">
                           <a:solidFill>
@@ -33429,10 +31758,6 @@
                       <a:pPr marL="0" marR="0" lvl="0" indent="0" algn="ctr" rtl="0">
                         <a:buNone/>
                       </a:pPr>
-                      <a:endParaRPr lang="ja-JP" altLang="en-US" sz="1600" b="0" dirty="0">
-                        <a:latin typeface="游ゴシック" panose="020B0604030504040204" pitchFamily="50" charset="-128"/>
-                        <a:ea typeface="游ゴシック" panose="020B0604030504040204" pitchFamily="50" charset="-128"/>
-                      </a:endParaRPr>
                       <a:r>
                         <a:rPr lang="en-US" altLang="ja-JP" sz="1600" b="0" dirty="0">
                           <a:latin typeface="游ゴシック" panose="020B0604030504040204" pitchFamily="50" charset="-128"/>
@@ -33649,10 +31974,6 @@
                         <a:buFont typeface="游ゴシック"/>
                         <a:buNone/>
                       </a:pPr>
-                      <a:endParaRPr lang="ja-JP" altLang="en-US" sz="1400" dirty="0">
-                        <a:latin typeface="游ゴシック" panose="020B0604030504040204" pitchFamily="50" charset="-128"/>
-                        <a:ea typeface="游ゴシック" panose="020B0604030504040204" pitchFamily="50" charset="-128"/>
-                      </a:endParaRPr>
                       <a:r>
                         <a:rPr lang="ja-JP" altLang="en-US" sz="1500" b="1" i="0" u="none" strike="noStrike" cap="none" dirty="0">
                           <a:solidFill>
@@ -33730,10 +32051,6 @@
                         <a:buFont typeface="游ゴシック"/>
                         <a:buNone/>
                       </a:pPr>
-                      <a:endParaRPr lang="ja-JP" altLang="en-US" sz="1600" b="0" dirty="0">
-                        <a:latin typeface="游ゴシック" panose="020B0604030504040204" pitchFamily="50" charset="-128"/>
-                        <a:ea typeface="游ゴシック" panose="020B0604030504040204" pitchFamily="50" charset="-128"/>
-                      </a:endParaRPr>
                       <a:r>
                         <a:rPr lang="en-US" altLang="ja-JP" sz="1600" b="0" dirty="0">
                           <a:latin typeface="游ゴシック" panose="020B0604030504040204" pitchFamily="50" charset="-128"/>
@@ -33963,21 +32280,6 @@
                         <a:tabLst/>
                         <a:defRPr/>
                       </a:pPr>
-                      <a:endParaRPr kumimoji="0" lang="ja-JP" altLang="en-US" sz="1600" b="1" i="0" u="none" strike="noStrike" kern="0" cap="none" spc="0" normalizeH="0" baseline="0" noProof="0" dirty="0">
-                        <a:ln>
-                          <a:noFill/>
-                        </a:ln>
-                        <a:solidFill>
-                          <a:srgbClr val="252525"/>
-                        </a:solidFill>
-                        <a:effectLst/>
-                        <a:uLnTx/>
-                        <a:uFillTx/>
-                        <a:latin typeface="游ゴシック" panose="020B0604030504040204" pitchFamily="50" charset="-128"/>
-                        <a:ea typeface="游ゴシック" panose="020B0604030504040204" pitchFamily="50" charset="-128"/>
-                        <a:cs typeface="游ゴシック"/>
-                        <a:sym typeface="游ゴシック"/>
-                      </a:endParaRPr>
                       <a:r>
                         <a:rPr kumimoji="0" lang="ja-JP" altLang="en-US" sz="1500" b="1" i="0" u="none" strike="noStrike" kern="0" cap="none" spc="0" normalizeH="0" baseline="0" noProof="0">
                           <a:ln>
@@ -34075,7 +32377,6 @@
           </a:bodyPr>
           <a:lstStyle/>
           <a:p>
-            <a:endParaRPr sz="1543"/>
             <a:r>
               <a:rPr lang="en-US" altLang="ja-JP" sz="900">
                 <a:solidFill>
@@ -34086,7 +32387,6 @@
             </a:r>
           </a:p>
           <a:p>
-            <a:endParaRPr sz="1543"/>
             <a:r>
               <a:rPr lang="en-US" altLang="ja-JP" sz="900">
                 <a:solidFill>
@@ -34097,7 +32397,6 @@
             </a:r>
           </a:p>
           <a:p>
-            <a:endParaRPr sz="1543"/>
             <a:r>
               <a:rPr lang="en-US" altLang="ja-JP" sz="900">
                 <a:solidFill>
@@ -34108,7 +32407,6 @@
             </a:r>
           </a:p>
           <a:p>
-            <a:endParaRPr sz="1543"/>
             <a:r>
               <a:rPr lang="en-US" altLang="ja-JP" sz="900">
                 <a:solidFill>
